--- a/FDE-assessment-week2/Gate2-Final-Presentation.pptx
+++ b/FDE-assessment-week2/Gate2-Final-Presentation.pptx
@@ -10,6 +10,10 @@
     <p:sldId id="258" r:id="rId9"/>
     <p:sldId id="259" r:id="rId10"/>
     <p:sldId id="260" r:id="rId11"/>
+    <p:sldId id="261" r:id="rId12"/>
+    <p:sldId id="262" r:id="rId13"/>
+    <p:sldId id="263" r:id="rId14"/>
+    <p:sldId id="264" r:id="rId15"/>
   </p:sldIdLst>
   <p:sldSz cx="12188952" cy="6858000" type="screen4x3"/>
   <p:notesSz cx="6858000" cy="9144000"/>
@@ -3220,7 +3224,7 @@
         </p:nvSpPr>
         <p:spPr>
           <a:xfrm>
-            <a:off x="457200" y="2926080"/>
+            <a:off x="457200" y="2560320"/>
             <a:ext cx="10972800" cy="457200"/>
           </a:xfrm>
           <a:prstGeom prst="rect">
@@ -3236,12 +3240,80 @@
           <a:p>
             <a:pPr algn="ctr"/>
             <a:r>
-              <a:rPr sz="2600" b="1" i="0">
+              <a:rPr sz="2800" b="1" i="0">
                 <a:solidFill>
                   <a:srgbClr val="1B3A6B"/>
                 </a:solidFill>
               </a:rPr>
-              <a:t>Gate 2 Assessment: Build ETA Inquiry Agent First</a:t>
+              <a:t>Gate 2 Agentic Transformation Assessment</a:t>
+            </a:r>
+          </a:p>
+        </p:txBody>
+      </p:sp>
+      <p:sp>
+        <p:nvSpPr>
+          <p:cNvPr id="6" name="TextBox 5"/>
+          <p:cNvSpPr txBox="1"/>
+          <p:nvPr/>
+        </p:nvSpPr>
+        <p:spPr>
+          <a:xfrm>
+            <a:off x="457200" y="3291840"/>
+            <a:ext cx="10972800" cy="365760"/>
+          </a:xfrm>
+          <a:prstGeom prst="rect">
+            <a:avLst/>
+          </a:prstGeom>
+          <a:noFill/>
+        </p:spPr>
+        <p:txBody>
+          <a:bodyPr wrap="square">
+            <a:spAutoFit/>
+          </a:bodyPr>
+          <a:lstStyle/>
+          <a:p>
+            <a:pPr algn="ctr"/>
+            <a:r>
+              <a:rPr sz="2200" b="0" i="0">
+                <a:solidFill>
+                  <a:srgbClr val="2E5FA3"/>
+                </a:solidFill>
+              </a:rPr>
+              <a:t>Recommendation: Build ETA Inquiry Agent (Phase 1)</a:t>
+            </a:r>
+          </a:p>
+        </p:txBody>
+      </p:sp>
+      <p:sp>
+        <p:nvSpPr>
+          <p:cNvPr id="7" name="TextBox 6"/>
+          <p:cNvSpPr txBox="1"/>
+          <p:nvPr/>
+        </p:nvSpPr>
+        <p:spPr>
+          <a:xfrm>
+            <a:off x="457200" y="3840480"/>
+            <a:ext cx="10972800" cy="365760"/>
+          </a:xfrm>
+          <a:prstGeom prst="rect">
+            <a:avLst/>
+          </a:prstGeom>
+          <a:noFill/>
+        </p:spPr>
+        <p:txBody>
+          <a:bodyPr wrap="square">
+            <a:spAutoFit/>
+          </a:bodyPr>
+          <a:lstStyle/>
+          <a:p>
+            <a:pPr algn="ctr"/>
+            <a:r>
+              <a:rPr sz="2000" b="0" i="0">
+                <a:solidFill>
+                  <a:srgbClr val="CC8400"/>
+                </a:solidFill>
+              </a:rPr>
+              <a:t>Then Tackle Billing Disputes (Phase 2)</a:t>
             </a:r>
           </a:p>
         </p:txBody>
@@ -3336,7 +3408,7 @@
                   <a:srgbClr val="FFFFFF"/>
                 </a:solidFill>
               </a:rPr>
-              <a:t>Problem &amp; Solution</a:t>
+              <a:t>The Problem at Apex Distribution</a:t>
             </a:r>
           </a:p>
         </p:txBody>
@@ -3370,7 +3442,7 @@
                   <a:srgbClr val="1B3A6B"/>
                 </a:solidFill>
               </a:rPr>
-              <a:t>The Problem</a:t>
+              <a:t>Organization Context</a:t>
             </a:r>
           </a:p>
         </p:txBody>
@@ -3404,7 +3476,7 @@
                   <a:srgbClr val="2D2D2D"/>
                 </a:solidFill>
               </a:rPr>
-              <a:t>35 staff handling 730 requests/day</a:t>
+              <a:t>Birmingham-based carrier</a:t>
             </a:r>
           </a:p>
           <a:p>
@@ -3415,7 +3487,7 @@
                   <a:srgbClr val="2D2D2D"/>
                 </a:solidFill>
               </a:rPr>
-              <a:t>4 work streams analyzed</a:t>
+              <a:t>35-person Customer Ops team</a:t>
             </a:r>
           </a:p>
           <a:p>
@@ -3426,7 +3498,18 @@
                   <a:srgbClr val="2D2D2D"/>
                 </a:solidFill>
               </a:rPr>
-              <a:t>2 prior automation failures</a:t>
+              <a:t>730 customer interactions/day</a:t>
+            </a:r>
+          </a:p>
+          <a:p>
+            <a:pPr/>
+            <a:r>
+              <a:rPr sz="1500">
+                <a:solidFill>
+                  <a:srgbClr val="2D2D2D"/>
+                </a:solidFill>
+              </a:rPr>
+              <a:t>4 work streams overlap constantly</a:t>
             </a:r>
           </a:p>
         </p:txBody>
@@ -3457,10 +3540,10 @@
             <a:r>
               <a:rPr sz="1800" b="1" i="0">
                 <a:solidFill>
-                  <a:srgbClr val="1A7A3C"/>
-                </a:solidFill>
-              </a:rPr>
-              <a:t>The Solution</a:t>
+                  <a:srgbClr val="BF352A"/>
+                </a:solidFill>
+              </a:rPr>
+              <a:t>The Challenge</a:t>
             </a:r>
           </a:p>
         </p:txBody>
@@ -3494,7 +3577,7 @@
                   <a:srgbClr val="2D2D2D"/>
                 </a:solidFill>
               </a:rPr>
-              <a:t>Build W2: ETA Agent first</a:t>
+              <a:t>Team overwhelmed with volume</a:t>
             </a:r>
           </a:p>
           <a:p>
@@ -3505,7 +3588,7 @@
                   <a:srgbClr val="2D2D2D"/>
                 </a:solidFill>
               </a:rPr>
-              <a:t>400 inquiries/day automated</a:t>
+              <a:t>2 automation failures (chatbot, RPA)</a:t>
             </a:r>
           </a:p>
           <a:p>
@@ -3516,7 +3599,7 @@
                   <a:srgbClr val="2D2D2D"/>
                 </a:solidFill>
               </a:rPr>
-              <a:t>1-2 month ROI payback</a:t>
+              <a:t>COO Sarah skeptical but needs results</a:t>
             </a:r>
           </a:p>
           <a:p>
@@ -3527,7 +3610,7 @@
                   <a:srgbClr val="2D2D2D"/>
                 </a:solidFill>
               </a:rPr>
-              <a:t>Low risk, high volume</a:t>
+              <a:t>Legacy systems constrain options</a:t>
             </a:r>
           </a:p>
         </p:txBody>
@@ -3601,10 +3684,10 @@
             <a:r>
               <a:rPr sz="2000" b="1" i="0">
                 <a:solidFill>
-                  <a:srgbClr val="1A7A3C"/>
-                </a:solidFill>
-              </a:rPr>
-              <a:t>Why W2 (ETA Inquiries) Was Chosen</a:t>
+                  <a:srgbClr val="0E7C7B"/>
+                </a:solidFill>
+              </a:rPr>
+              <a:t>Our Assessment Approach</a:t>
             </a:r>
           </a:p>
         </p:txBody>
@@ -3618,7 +3701,7 @@
         <p:spPr>
           <a:xfrm>
             <a:off x="914400" y="4206240"/>
-            <a:ext cx="10332720" cy="1371600"/>
+            <a:ext cx="10332720" cy="1645920"/>
           </a:xfrm>
           <a:prstGeom prst="rect">
             <a:avLst/>
@@ -3638,7 +3721,7 @@
                   <a:srgbClr val="2D2D2D"/>
                 </a:solidFill>
               </a:rPr>
-              <a:t>Highest volume (400/day) + lowest build risk = fastest win</a:t>
+              <a:t>Analyzed all 4 work streams using ATX methodology (7-phase assessment)</a:t>
             </a:r>
           </a:p>
           <a:p>
@@ -3649,7 +3732,7 @@
                   <a:srgbClr val="2D2D2D"/>
                 </a:solidFill>
               </a:rPr>
-              <a:t>Simple: Lookup order + ask driver location via CRM API</a:t>
+              <a:t>Scored each on: Volume × Automation Potential × Build Risk × Strategic Value</a:t>
             </a:r>
           </a:p>
           <a:p>
@@ -3660,7 +3743,7 @@
                   <a:srgbClr val="2D2D2D"/>
                 </a:solidFill>
               </a:rPr>
-              <a:t>Saves 2.8 FTE (558 hours/month) - fastest payback</a:t>
+              <a:t>Identified which work can be fully automated vs. requires human judgment</a:t>
             </a:r>
           </a:p>
           <a:p>
@@ -3671,7 +3754,7 @@
                   <a:srgbClr val="2D2D2D"/>
                 </a:solidFill>
               </a:rPr>
-              <a:t>Rebuilds trust after failed chatbot and RPA projects</a:t>
+              <a:t>Prioritized based on fastest ROI and lowest risk to rebuild trust</a:t>
             </a:r>
           </a:p>
         </p:txBody>
@@ -3766,7 +3849,7 @@
                   <a:srgbClr val="FFFFFF"/>
                 </a:solidFill>
               </a:rPr>
-              <a:t>All 4 Workstreams Compared</a:t>
+              <a:t>4 Workstreams Analyzed</a:t>
             </a:r>
           </a:p>
         </p:txBody>
@@ -3780,546 +3863,7 @@
         <p:spPr>
           <a:xfrm>
             <a:off x="457200" y="1371600"/>
-            <a:ext cx="2560320" cy="457200"/>
-          </a:xfrm>
-          <a:prstGeom prst="rect">
-            <a:avLst/>
-          </a:prstGeom>
-          <a:solidFill>
-            <a:srgbClr val="2E5FA3"/>
-          </a:solidFill>
-          <a:ln>
-            <a:noFill/>
-          </a:ln>
-        </p:spPr>
-        <p:style>
-          <a:lnRef idx="1">
-            <a:schemeClr val="accent1"/>
-          </a:lnRef>
-          <a:fillRef idx="3">
-            <a:schemeClr val="accent1"/>
-          </a:fillRef>
-          <a:effectRef idx="2">
-            <a:schemeClr val="accent1"/>
-          </a:effectRef>
-          <a:fontRef idx="minor">
-            <a:schemeClr val="lt1"/>
-          </a:fontRef>
-        </p:style>
-        <p:txBody>
-          <a:bodyPr rtlCol="0" anchor="ctr"/>
-          <a:lstStyle/>
-          <a:p>
-            <a:pPr algn="ctr"/>
-          </a:p>
-        </p:txBody>
-      </p:sp>
-      <p:sp>
-        <p:nvSpPr>
-          <p:cNvPr id="5" name="TextBox 4"/>
-          <p:cNvSpPr txBox="1"/>
-          <p:nvPr/>
-        </p:nvSpPr>
-        <p:spPr>
-          <a:xfrm>
-            <a:off x="548640" y="1463040"/>
-            <a:ext cx="2377439" cy="274320"/>
-          </a:xfrm>
-          <a:prstGeom prst="rect">
-            <a:avLst/>
-          </a:prstGeom>
-          <a:noFill/>
-        </p:spPr>
-        <p:txBody>
-          <a:bodyPr wrap="square">
-            <a:spAutoFit/>
-          </a:bodyPr>
-          <a:lstStyle/>
-          <a:p>
-            <a:pPr algn="l"/>
-            <a:r>
-              <a:rPr sz="1400" b="1" i="0">
-                <a:solidFill>
-                  <a:srgbClr val="FFFFFF"/>
-                </a:solidFill>
-              </a:rPr>
-              <a:t>Workstream</a:t>
-            </a:r>
-          </a:p>
-        </p:txBody>
-      </p:sp>
-      <p:sp>
-        <p:nvSpPr>
-          <p:cNvPr id="6" name="Rectangle 5"/>
-          <p:cNvSpPr/>
-          <p:nvPr/>
-        </p:nvSpPr>
-        <p:spPr>
-          <a:xfrm>
-            <a:off x="3017520" y="1371600"/>
-            <a:ext cx="1371600" cy="457200"/>
-          </a:xfrm>
-          <a:prstGeom prst="rect">
-            <a:avLst/>
-          </a:prstGeom>
-          <a:solidFill>
-            <a:srgbClr val="2E5FA3"/>
-          </a:solidFill>
-          <a:ln>
-            <a:noFill/>
-          </a:ln>
-        </p:spPr>
-        <p:style>
-          <a:lnRef idx="1">
-            <a:schemeClr val="accent1"/>
-          </a:lnRef>
-          <a:fillRef idx="3">
-            <a:schemeClr val="accent1"/>
-          </a:fillRef>
-          <a:effectRef idx="2">
-            <a:schemeClr val="accent1"/>
-          </a:effectRef>
-          <a:fontRef idx="minor">
-            <a:schemeClr val="lt1"/>
-          </a:fontRef>
-        </p:style>
-        <p:txBody>
-          <a:bodyPr rtlCol="0" anchor="ctr"/>
-          <a:lstStyle/>
-          <a:p>
-            <a:pPr algn="ctr"/>
-          </a:p>
-        </p:txBody>
-      </p:sp>
-      <p:sp>
-        <p:nvSpPr>
-          <p:cNvPr id="7" name="TextBox 6"/>
-          <p:cNvSpPr txBox="1"/>
-          <p:nvPr/>
-        </p:nvSpPr>
-        <p:spPr>
-          <a:xfrm>
-            <a:off x="3108960" y="1463040"/>
-            <a:ext cx="1188720" cy="274320"/>
-          </a:xfrm>
-          <a:prstGeom prst="rect">
-            <a:avLst/>
-          </a:prstGeom>
-          <a:noFill/>
-        </p:spPr>
-        <p:txBody>
-          <a:bodyPr wrap="square">
-            <a:spAutoFit/>
-          </a:bodyPr>
-          <a:lstStyle/>
-          <a:p>
-            <a:pPr algn="l"/>
-            <a:r>
-              <a:rPr sz="1400" b="1" i="0">
-                <a:solidFill>
-                  <a:srgbClr val="FFFFFF"/>
-                </a:solidFill>
-              </a:rPr>
-              <a:t>Volume</a:t>
-            </a:r>
-          </a:p>
-        </p:txBody>
-      </p:sp>
-      <p:sp>
-        <p:nvSpPr>
-          <p:cNvPr id="8" name="Rectangle 7"/>
-          <p:cNvSpPr/>
-          <p:nvPr/>
-        </p:nvSpPr>
-        <p:spPr>
-          <a:xfrm>
-            <a:off x="4389120" y="1371600"/>
-            <a:ext cx="1371600" cy="457200"/>
-          </a:xfrm>
-          <a:prstGeom prst="rect">
-            <a:avLst/>
-          </a:prstGeom>
-          <a:solidFill>
-            <a:srgbClr val="2E5FA3"/>
-          </a:solidFill>
-          <a:ln>
-            <a:noFill/>
-          </a:ln>
-        </p:spPr>
-        <p:style>
-          <a:lnRef idx="1">
-            <a:schemeClr val="accent1"/>
-          </a:lnRef>
-          <a:fillRef idx="3">
-            <a:schemeClr val="accent1"/>
-          </a:fillRef>
-          <a:effectRef idx="2">
-            <a:schemeClr val="accent1"/>
-          </a:effectRef>
-          <a:fontRef idx="minor">
-            <a:schemeClr val="lt1"/>
-          </a:fontRef>
-        </p:style>
-        <p:txBody>
-          <a:bodyPr rtlCol="0" anchor="ctr"/>
-          <a:lstStyle/>
-          <a:p>
-            <a:pPr algn="ctr"/>
-          </a:p>
-        </p:txBody>
-      </p:sp>
-      <p:sp>
-        <p:nvSpPr>
-          <p:cNvPr id="9" name="TextBox 8"/>
-          <p:cNvSpPr txBox="1"/>
-          <p:nvPr/>
-        </p:nvSpPr>
-        <p:spPr>
-          <a:xfrm>
-            <a:off x="4480559" y="1463040"/>
-            <a:ext cx="1188720" cy="274320"/>
-          </a:xfrm>
-          <a:prstGeom prst="rect">
-            <a:avLst/>
-          </a:prstGeom>
-          <a:noFill/>
-        </p:spPr>
-        <p:txBody>
-          <a:bodyPr wrap="square">
-            <a:spAutoFit/>
-          </a:bodyPr>
-          <a:lstStyle/>
-          <a:p>
-            <a:pPr algn="l"/>
-            <a:r>
-              <a:rPr sz="1400" b="1" i="0">
-                <a:solidFill>
-                  <a:srgbClr val="FFFFFF"/>
-                </a:solidFill>
-              </a:rPr>
-              <a:t>Savings</a:t>
-            </a:r>
-          </a:p>
-        </p:txBody>
-      </p:sp>
-      <p:sp>
-        <p:nvSpPr>
-          <p:cNvPr id="10" name="Rectangle 9"/>
-          <p:cNvSpPr/>
-          <p:nvPr/>
-        </p:nvSpPr>
-        <p:spPr>
-          <a:xfrm>
-            <a:off x="5760720" y="1371600"/>
-            <a:ext cx="1188720" cy="457200"/>
-          </a:xfrm>
-          <a:prstGeom prst="rect">
-            <a:avLst/>
-          </a:prstGeom>
-          <a:solidFill>
-            <a:srgbClr val="2E5FA3"/>
-          </a:solidFill>
-          <a:ln>
-            <a:noFill/>
-          </a:ln>
-        </p:spPr>
-        <p:style>
-          <a:lnRef idx="1">
-            <a:schemeClr val="accent1"/>
-          </a:lnRef>
-          <a:fillRef idx="3">
-            <a:schemeClr val="accent1"/>
-          </a:fillRef>
-          <a:effectRef idx="2">
-            <a:schemeClr val="accent1"/>
-          </a:effectRef>
-          <a:fontRef idx="minor">
-            <a:schemeClr val="lt1"/>
-          </a:fontRef>
-        </p:style>
-        <p:txBody>
-          <a:bodyPr rtlCol="0" anchor="ctr"/>
-          <a:lstStyle/>
-          <a:p>
-            <a:pPr algn="ctr"/>
-          </a:p>
-        </p:txBody>
-      </p:sp>
-      <p:sp>
-        <p:nvSpPr>
-          <p:cNvPr id="11" name="TextBox 10"/>
-          <p:cNvSpPr txBox="1"/>
-          <p:nvPr/>
-        </p:nvSpPr>
-        <p:spPr>
-          <a:xfrm>
-            <a:off x="5852159" y="1463040"/>
-            <a:ext cx="1005840" cy="274320"/>
-          </a:xfrm>
-          <a:prstGeom prst="rect">
-            <a:avLst/>
-          </a:prstGeom>
-          <a:noFill/>
-        </p:spPr>
-        <p:txBody>
-          <a:bodyPr wrap="square">
-            <a:spAutoFit/>
-          </a:bodyPr>
-          <a:lstStyle/>
-          <a:p>
-            <a:pPr algn="l"/>
-            <a:r>
-              <a:rPr sz="1400" b="1" i="0">
-                <a:solidFill>
-                  <a:srgbClr val="FFFFFF"/>
-                </a:solidFill>
-              </a:rPr>
-              <a:t>Risk</a:t>
-            </a:r>
-          </a:p>
-        </p:txBody>
-      </p:sp>
-      <p:sp>
-        <p:nvSpPr>
-          <p:cNvPr id="12" name="Rectangle 11"/>
-          <p:cNvSpPr/>
-          <p:nvPr/>
-        </p:nvSpPr>
-        <p:spPr>
-          <a:xfrm>
-            <a:off x="6949440" y="1371600"/>
-            <a:ext cx="1463040" cy="457200"/>
-          </a:xfrm>
-          <a:prstGeom prst="rect">
-            <a:avLst/>
-          </a:prstGeom>
-          <a:solidFill>
-            <a:srgbClr val="2E5FA3"/>
-          </a:solidFill>
-          <a:ln>
-            <a:noFill/>
-          </a:ln>
-        </p:spPr>
-        <p:style>
-          <a:lnRef idx="1">
-            <a:schemeClr val="accent1"/>
-          </a:lnRef>
-          <a:fillRef idx="3">
-            <a:schemeClr val="accent1"/>
-          </a:fillRef>
-          <a:effectRef idx="2">
-            <a:schemeClr val="accent1"/>
-          </a:effectRef>
-          <a:fontRef idx="minor">
-            <a:schemeClr val="lt1"/>
-          </a:fontRef>
-        </p:style>
-        <p:txBody>
-          <a:bodyPr rtlCol="0" anchor="ctr"/>
-          <a:lstStyle/>
-          <a:p>
-            <a:pPr algn="ctr"/>
-          </a:p>
-        </p:txBody>
-      </p:sp>
-      <p:sp>
-        <p:nvSpPr>
-          <p:cNvPr id="13" name="TextBox 12"/>
-          <p:cNvSpPr txBox="1"/>
-          <p:nvPr/>
-        </p:nvSpPr>
-        <p:spPr>
-          <a:xfrm>
-            <a:off x="7040879" y="1463040"/>
-            <a:ext cx="1280160" cy="274320"/>
-          </a:xfrm>
-          <a:prstGeom prst="rect">
-            <a:avLst/>
-          </a:prstGeom>
-          <a:noFill/>
-        </p:spPr>
-        <p:txBody>
-          <a:bodyPr wrap="square">
-            <a:spAutoFit/>
-          </a:bodyPr>
-          <a:lstStyle/>
-          <a:p>
-            <a:pPr algn="l"/>
-            <a:r>
-              <a:rPr sz="1400" b="1" i="0">
-                <a:solidFill>
-                  <a:srgbClr val="FFFFFF"/>
-                </a:solidFill>
-              </a:rPr>
-              <a:t>ROI</a:t>
-            </a:r>
-          </a:p>
-        </p:txBody>
-      </p:sp>
-      <p:sp>
-        <p:nvSpPr>
-          <p:cNvPr id="14" name="Rectangle 13"/>
-          <p:cNvSpPr/>
-          <p:nvPr/>
-        </p:nvSpPr>
-        <p:spPr>
-          <a:xfrm>
-            <a:off x="8412480" y="1371600"/>
-            <a:ext cx="1828800" cy="457200"/>
-          </a:xfrm>
-          <a:prstGeom prst="rect">
-            <a:avLst/>
-          </a:prstGeom>
-          <a:solidFill>
-            <a:srgbClr val="2E5FA3"/>
-          </a:solidFill>
-          <a:ln>
-            <a:noFill/>
-          </a:ln>
-        </p:spPr>
-        <p:style>
-          <a:lnRef idx="1">
-            <a:schemeClr val="accent1"/>
-          </a:lnRef>
-          <a:fillRef idx="3">
-            <a:schemeClr val="accent1"/>
-          </a:fillRef>
-          <a:effectRef idx="2">
-            <a:schemeClr val="accent1"/>
-          </a:effectRef>
-          <a:fontRef idx="minor">
-            <a:schemeClr val="lt1"/>
-          </a:fontRef>
-        </p:style>
-        <p:txBody>
-          <a:bodyPr rtlCol="0" anchor="ctr"/>
-          <a:lstStyle/>
-          <a:p>
-            <a:pPr algn="ctr"/>
-          </a:p>
-        </p:txBody>
-      </p:sp>
-      <p:sp>
-        <p:nvSpPr>
-          <p:cNvPr id="15" name="TextBox 14"/>
-          <p:cNvSpPr txBox="1"/>
-          <p:nvPr/>
-        </p:nvSpPr>
-        <p:spPr>
-          <a:xfrm>
-            <a:off x="8503919" y="1463040"/>
-            <a:ext cx="1645920" cy="274320"/>
-          </a:xfrm>
-          <a:prstGeom prst="rect">
-            <a:avLst/>
-          </a:prstGeom>
-          <a:noFill/>
-        </p:spPr>
-        <p:txBody>
-          <a:bodyPr wrap="square">
-            <a:spAutoFit/>
-          </a:bodyPr>
-          <a:lstStyle/>
-          <a:p>
-            <a:pPr algn="l"/>
-            <a:r>
-              <a:rPr sz="1400" b="1" i="0">
-                <a:solidFill>
-                  <a:srgbClr val="FFFFFF"/>
-                </a:solidFill>
-              </a:rPr>
-              <a:t>Decision</a:t>
-            </a:r>
-          </a:p>
-        </p:txBody>
-      </p:sp>
-      <p:sp>
-        <p:nvSpPr>
-          <p:cNvPr id="16" name="Rectangle 15"/>
-          <p:cNvSpPr/>
-          <p:nvPr/>
-        </p:nvSpPr>
-        <p:spPr>
-          <a:xfrm>
-            <a:off x="457200" y="1828800"/>
-            <a:ext cx="2560320" cy="548640"/>
-          </a:xfrm>
-          <a:prstGeom prst="rect">
-            <a:avLst/>
-          </a:prstGeom>
-          <a:solidFill>
-            <a:srgbClr val="1A7A3C"/>
-          </a:solidFill>
-          <a:ln>
-            <a:noFill/>
-          </a:ln>
-        </p:spPr>
-        <p:style>
-          <a:lnRef idx="1">
-            <a:schemeClr val="accent1"/>
-          </a:lnRef>
-          <a:fillRef idx="3">
-            <a:schemeClr val="accent1"/>
-          </a:fillRef>
-          <a:effectRef idx="2">
-            <a:schemeClr val="accent1"/>
-          </a:effectRef>
-          <a:fontRef idx="minor">
-            <a:schemeClr val="lt1"/>
-          </a:fontRef>
-        </p:style>
-        <p:txBody>
-          <a:bodyPr rtlCol="0" anchor="ctr"/>
-          <a:lstStyle/>
-          <a:p>
-            <a:pPr algn="ctr"/>
-          </a:p>
-        </p:txBody>
-      </p:sp>
-      <p:sp>
-        <p:nvSpPr>
-          <p:cNvPr id="17" name="TextBox 16"/>
-          <p:cNvSpPr txBox="1"/>
-          <p:nvPr/>
-        </p:nvSpPr>
-        <p:spPr>
-          <a:xfrm>
-            <a:off x="548640" y="1965960"/>
-            <a:ext cx="2377440" cy="274320"/>
-          </a:xfrm>
-          <a:prstGeom prst="rect">
-            <a:avLst/>
-          </a:prstGeom>
-          <a:noFill/>
-        </p:spPr>
-        <p:txBody>
-          <a:bodyPr wrap="square">
-            <a:spAutoFit/>
-          </a:bodyPr>
-          <a:lstStyle/>
-          <a:p>
-            <a:pPr algn="l"/>
-            <a:r>
-              <a:rPr sz="1400" b="1" i="0">
-                <a:solidFill>
-                  <a:srgbClr val="FFFFFF"/>
-                </a:solidFill>
-              </a:rPr>
-              <a:t>W2: ETA Inquiries</a:t>
-            </a:r>
-          </a:p>
-        </p:txBody>
-      </p:sp>
-      <p:sp>
-        <p:nvSpPr>
-          <p:cNvPr id="18" name="Rectangle 17"/>
-          <p:cNvSpPr/>
-          <p:nvPr/>
-        </p:nvSpPr>
-        <p:spPr>
-          <a:xfrm>
-            <a:off x="3017520" y="1828800"/>
-            <a:ext cx="1371600" cy="548640"/>
+            <a:ext cx="5486400" cy="1188720"/>
           </a:xfrm>
           <a:prstGeom prst="rect">
             <a:avLst/>
@@ -4355,14 +3899,14 @@
       </p:sp>
       <p:sp>
         <p:nvSpPr>
-          <p:cNvPr id="19" name="TextBox 18"/>
+          <p:cNvPr id="5" name="TextBox 4"/>
           <p:cNvSpPr txBox="1"/>
           <p:nvPr/>
         </p:nvSpPr>
         <p:spPr>
           <a:xfrm>
-            <a:off x="3108960" y="1965960"/>
-            <a:ext cx="1188720" cy="274320"/>
+            <a:off x="640080" y="1554480"/>
+            <a:ext cx="5029200" cy="274320"/>
           </a:xfrm>
           <a:prstGeom prst="rect">
             <a:avLst/>
@@ -4377,26 +3921,239 @@
           <a:p>
             <a:pPr algn="l"/>
             <a:r>
-              <a:rPr sz="1400" b="0" i="0">
+              <a:rPr sz="1700" b="1" i="0">
+                <a:solidFill>
+                  <a:srgbClr val="1B3A6B"/>
+                </a:solidFill>
+              </a:rPr>
+              <a:t>W1: Delivery Exceptions</a:t>
+            </a:r>
+          </a:p>
+        </p:txBody>
+      </p:sp>
+      <p:sp>
+        <p:nvSpPr>
+          <p:cNvPr id="6" name="TextBox 5"/>
+          <p:cNvSpPr txBox="1"/>
+          <p:nvPr/>
+        </p:nvSpPr>
+        <p:spPr>
+          <a:xfrm>
+            <a:off x="640080" y="1828800"/>
+            <a:ext cx="5029200" cy="274320"/>
+          </a:xfrm>
+          <a:prstGeom prst="rect">
+            <a:avLst/>
+          </a:prstGeom>
+          <a:noFill/>
+        </p:spPr>
+        <p:txBody>
+          <a:bodyPr wrap="square">
+            <a:spAutoFit/>
+          </a:bodyPr>
+          <a:lstStyle/>
+          <a:p>
+            <a:pPr algn="l"/>
+            <a:r>
+              <a:rPr sz="1300" b="0" i="0">
+                <a:solidFill>
+                  <a:srgbClr val="606060"/>
+                </a:solidFill>
+              </a:rPr>
+              <a:t>180/day | 12 min avg | 792 hrs/month</a:t>
+            </a:r>
+          </a:p>
+        </p:txBody>
+      </p:sp>
+      <p:sp>
+        <p:nvSpPr>
+          <p:cNvPr id="7" name="TextBox 6"/>
+          <p:cNvSpPr txBox="1"/>
+          <p:nvPr/>
+        </p:nvSpPr>
+        <p:spPr>
+          <a:xfrm>
+            <a:off x="640080" y="2103120"/>
+            <a:ext cx="5029200" cy="457200"/>
+          </a:xfrm>
+          <a:prstGeom prst="rect">
+            <a:avLst/>
+          </a:prstGeom>
+          <a:noFill/>
+        </p:spPr>
+        <p:txBody>
+          <a:bodyPr wrap="square">
+            <a:spAutoFit/>
+          </a:bodyPr>
+          <a:lstStyle/>
+          <a:p>
+            <a:pPr algn="l"/>
+            <a:r>
+              <a:rPr sz="1200" b="0" i="0">
                 <a:solidFill>
                   <a:srgbClr val="2D2D2D"/>
                 </a:solidFill>
               </a:rPr>
-              <a:t>400/day</a:t>
-            </a:r>
-          </a:p>
-        </p:txBody>
-      </p:sp>
-      <p:sp>
-        <p:nvSpPr>
-          <p:cNvPr id="20" name="Rectangle 19"/>
+              <a:t>Driver issues, refused deliveries, damages, missed windows. Requires dispatcher judgment.</a:t>
+            </a:r>
+          </a:p>
+        </p:txBody>
+      </p:sp>
+      <p:sp>
+        <p:nvSpPr>
+          <p:cNvPr id="8" name="Rectangle 7"/>
           <p:cNvSpPr/>
           <p:nvPr/>
         </p:nvSpPr>
         <p:spPr>
           <a:xfrm>
-            <a:off x="4389120" y="1828800"/>
-            <a:ext cx="1371600" cy="548640"/>
+            <a:off x="6217920" y="1371600"/>
+            <a:ext cx="5486400" cy="1188720"/>
+          </a:xfrm>
+          <a:prstGeom prst="rect">
+            <a:avLst/>
+          </a:prstGeom>
+          <a:solidFill>
+            <a:srgbClr val="D6EEDC"/>
+          </a:solidFill>
+          <a:ln>
+            <a:noFill/>
+          </a:ln>
+        </p:spPr>
+        <p:style>
+          <a:lnRef idx="1">
+            <a:schemeClr val="accent1"/>
+          </a:lnRef>
+          <a:fillRef idx="3">
+            <a:schemeClr val="accent1"/>
+          </a:fillRef>
+          <a:effectRef idx="2">
+            <a:schemeClr val="accent1"/>
+          </a:effectRef>
+          <a:fontRef idx="minor">
+            <a:schemeClr val="lt1"/>
+          </a:fontRef>
+        </p:style>
+        <p:txBody>
+          <a:bodyPr rtlCol="0" anchor="ctr"/>
+          <a:lstStyle/>
+          <a:p>
+            <a:pPr algn="ctr"/>
+          </a:p>
+        </p:txBody>
+      </p:sp>
+      <p:sp>
+        <p:nvSpPr>
+          <p:cNvPr id="9" name="TextBox 8"/>
+          <p:cNvSpPr txBox="1"/>
+          <p:nvPr/>
+        </p:nvSpPr>
+        <p:spPr>
+          <a:xfrm>
+            <a:off x="6400800" y="1554480"/>
+            <a:ext cx="5029200" cy="274320"/>
+          </a:xfrm>
+          <a:prstGeom prst="rect">
+            <a:avLst/>
+          </a:prstGeom>
+          <a:noFill/>
+        </p:spPr>
+        <p:txBody>
+          <a:bodyPr wrap="square">
+            <a:spAutoFit/>
+          </a:bodyPr>
+          <a:lstStyle/>
+          <a:p>
+            <a:pPr algn="l"/>
+            <a:r>
+              <a:rPr sz="1700" b="1" i="0">
+                <a:solidFill>
+                  <a:srgbClr val="1A7A3C"/>
+                </a:solidFill>
+              </a:rPr>
+              <a:t>W2: ETA Inquiries (WINNER)</a:t>
+            </a:r>
+          </a:p>
+        </p:txBody>
+      </p:sp>
+      <p:sp>
+        <p:nvSpPr>
+          <p:cNvPr id="10" name="TextBox 9"/>
+          <p:cNvSpPr txBox="1"/>
+          <p:nvPr/>
+        </p:nvSpPr>
+        <p:spPr>
+          <a:xfrm>
+            <a:off x="6400800" y="1828800"/>
+            <a:ext cx="5029200" cy="274320"/>
+          </a:xfrm>
+          <a:prstGeom prst="rect">
+            <a:avLst/>
+          </a:prstGeom>
+          <a:noFill/>
+        </p:spPr>
+        <p:txBody>
+          <a:bodyPr wrap="square">
+            <a:spAutoFit/>
+          </a:bodyPr>
+          <a:lstStyle/>
+          <a:p>
+            <a:pPr algn="l"/>
+            <a:r>
+              <a:rPr sz="1300" b="0" i="0">
+                <a:solidFill>
+                  <a:srgbClr val="2D2D2D"/>
+                </a:solidFill>
+              </a:rPr>
+              <a:t>400/day | 4 min avg | 587 hrs/month</a:t>
+            </a:r>
+          </a:p>
+        </p:txBody>
+      </p:sp>
+      <p:sp>
+        <p:nvSpPr>
+          <p:cNvPr id="11" name="TextBox 10"/>
+          <p:cNvSpPr txBox="1"/>
+          <p:nvPr/>
+        </p:nvSpPr>
+        <p:spPr>
+          <a:xfrm>
+            <a:off x="6400800" y="2103120"/>
+            <a:ext cx="5029200" cy="457200"/>
+          </a:xfrm>
+          <a:prstGeom prst="rect">
+            <a:avLst/>
+          </a:prstGeom>
+          <a:noFill/>
+        </p:spPr>
+        <p:txBody>
+          <a:bodyPr wrap="square">
+            <a:spAutoFit/>
+          </a:bodyPr>
+          <a:lstStyle/>
+          <a:p>
+            <a:pPr algn="l"/>
+            <a:r>
+              <a:rPr sz="1200" b="0" i="0">
+                <a:solidFill>
+                  <a:srgbClr val="2D2D2D"/>
+                </a:solidFill>
+              </a:rPr>
+              <a:t>'Where's my delivery?' Mostly lookup + driver location query. 95% automatable.</a:t>
+            </a:r>
+          </a:p>
+        </p:txBody>
+      </p:sp>
+      <p:sp>
+        <p:nvSpPr>
+          <p:cNvPr id="12" name="Rectangle 11"/>
+          <p:cNvSpPr/>
+          <p:nvPr/>
+        </p:nvSpPr>
+        <p:spPr>
+          <a:xfrm>
+            <a:off x="457200" y="2834640"/>
+            <a:ext cx="5486400" cy="1188720"/>
           </a:xfrm>
           <a:prstGeom prst="rect">
             <a:avLst/>
@@ -4432,14 +4189,14 @@
       </p:sp>
       <p:sp>
         <p:nvSpPr>
-          <p:cNvPr id="21" name="TextBox 20"/>
+          <p:cNvPr id="13" name="TextBox 12"/>
           <p:cNvSpPr txBox="1"/>
           <p:nvPr/>
         </p:nvSpPr>
         <p:spPr>
           <a:xfrm>
-            <a:off x="4480560" y="1965960"/>
-            <a:ext cx="1188720" cy="274320"/>
+            <a:off x="640080" y="3017520"/>
+            <a:ext cx="5029200" cy="274320"/>
           </a:xfrm>
           <a:prstGeom prst="rect">
             <a:avLst/>
@@ -4454,26 +4211,94 @@
           <a:p>
             <a:pPr algn="l"/>
             <a:r>
-              <a:rPr sz="1400" b="0" i="0">
+              <a:rPr sz="1700" b="1" i="0">
+                <a:solidFill>
+                  <a:srgbClr val="1B3A6B"/>
+                </a:solidFill>
+              </a:rPr>
+              <a:t>W3: Dispatch Adjustments</a:t>
+            </a:r>
+          </a:p>
+        </p:txBody>
+      </p:sp>
+      <p:sp>
+        <p:nvSpPr>
+          <p:cNvPr id="14" name="TextBox 13"/>
+          <p:cNvSpPr txBox="1"/>
+          <p:nvPr/>
+        </p:nvSpPr>
+        <p:spPr>
+          <a:xfrm>
+            <a:off x="640080" y="3291840"/>
+            <a:ext cx="5029200" cy="274320"/>
+          </a:xfrm>
+          <a:prstGeom prst="rect">
+            <a:avLst/>
+          </a:prstGeom>
+          <a:noFill/>
+        </p:spPr>
+        <p:txBody>
+          <a:bodyPr wrap="square">
+            <a:spAutoFit/>
+          </a:bodyPr>
+          <a:lstStyle/>
+          <a:p>
+            <a:pPr algn="l"/>
+            <a:r>
+              <a:rPr sz="1300" b="0" i="0">
+                <a:solidFill>
+                  <a:srgbClr val="606060"/>
+                </a:solidFill>
+              </a:rPr>
+              <a:t>90/day | 18 min avg | 594 hrs/month</a:t>
+            </a:r>
+          </a:p>
+        </p:txBody>
+      </p:sp>
+      <p:sp>
+        <p:nvSpPr>
+          <p:cNvPr id="15" name="TextBox 14"/>
+          <p:cNvSpPr txBox="1"/>
+          <p:nvPr/>
+        </p:nvSpPr>
+        <p:spPr>
+          <a:xfrm>
+            <a:off x="640080" y="3566160"/>
+            <a:ext cx="5029200" cy="457200"/>
+          </a:xfrm>
+          <a:prstGeom prst="rect">
+            <a:avLst/>
+          </a:prstGeom>
+          <a:noFill/>
+        </p:spPr>
+        <p:txBody>
+          <a:bodyPr wrap="square">
+            <a:spAutoFit/>
+          </a:bodyPr>
+          <a:lstStyle/>
+          <a:p>
+            <a:pPr algn="l"/>
+            <a:r>
+              <a:rPr sz="1200" b="0" i="0">
                 <a:solidFill>
                   <a:srgbClr val="2D2D2D"/>
                 </a:solidFill>
               </a:rPr>
-              <a:t>2.8 FTE</a:t>
-            </a:r>
-          </a:p>
-        </p:txBody>
-      </p:sp>
-      <p:sp>
-        <p:nvSpPr>
-          <p:cNvPr id="22" name="Rectangle 21"/>
+              <a:t>Mid-route changes, driver swaps, diversions. High judgment + route optimization complexity.</a:t>
+            </a:r>
+          </a:p>
+        </p:txBody>
+      </p:sp>
+      <p:sp>
+        <p:nvSpPr>
+          <p:cNvPr id="16" name="Rectangle 15"/>
           <p:cNvSpPr/>
           <p:nvPr/>
         </p:nvSpPr>
         <p:spPr>
           <a:xfrm>
-            <a:off x="5760720" y="1828800"/>
-            <a:ext cx="1188720" cy="548640"/>
+            <a:off x="6217920" y="2834640"/>
+            <a:ext cx="5486400" cy="1188720"/>
           </a:xfrm>
           <a:prstGeom prst="rect">
             <a:avLst/>
@@ -4509,14 +4334,14 @@
       </p:sp>
       <p:sp>
         <p:nvSpPr>
-          <p:cNvPr id="23" name="TextBox 22"/>
+          <p:cNvPr id="17" name="TextBox 16"/>
           <p:cNvSpPr txBox="1"/>
           <p:nvPr/>
         </p:nvSpPr>
         <p:spPr>
           <a:xfrm>
-            <a:off x="5852160" y="1965960"/>
-            <a:ext cx="1005840" cy="274320"/>
+            <a:off x="6400800" y="3017520"/>
+            <a:ext cx="5029200" cy="274320"/>
           </a:xfrm>
           <a:prstGeom prst="rect">
             <a:avLst/>
@@ -4531,69 +4356,26 @@
           <a:p>
             <a:pPr algn="l"/>
             <a:r>
-              <a:rPr sz="1400" b="1" i="0">
-                <a:solidFill>
-                  <a:srgbClr val="1A7A3C"/>
-                </a:solidFill>
-              </a:rPr>
-              <a:t>LOW</a:t>
-            </a:r>
-          </a:p>
-        </p:txBody>
-      </p:sp>
-      <p:sp>
-        <p:nvSpPr>
-          <p:cNvPr id="24" name="Rectangle 23"/>
-          <p:cNvSpPr/>
-          <p:nvPr/>
-        </p:nvSpPr>
-        <p:spPr>
-          <a:xfrm>
-            <a:off x="6949440" y="1828800"/>
-            <a:ext cx="1463040" cy="548640"/>
-          </a:xfrm>
-          <a:prstGeom prst="rect">
-            <a:avLst/>
-          </a:prstGeom>
-          <a:solidFill>
-            <a:srgbClr val="F2F4F7"/>
-          </a:solidFill>
-          <a:ln>
-            <a:noFill/>
-          </a:ln>
-        </p:spPr>
-        <p:style>
-          <a:lnRef idx="1">
-            <a:schemeClr val="accent1"/>
-          </a:lnRef>
-          <a:fillRef idx="3">
-            <a:schemeClr val="accent1"/>
-          </a:fillRef>
-          <a:effectRef idx="2">
-            <a:schemeClr val="accent1"/>
-          </a:effectRef>
-          <a:fontRef idx="minor">
-            <a:schemeClr val="lt1"/>
-          </a:fontRef>
-        </p:style>
-        <p:txBody>
-          <a:bodyPr rtlCol="0" anchor="ctr"/>
-          <a:lstStyle/>
-          <a:p>
-            <a:pPr algn="ctr"/>
-          </a:p>
-        </p:txBody>
-      </p:sp>
-      <p:sp>
-        <p:nvSpPr>
-          <p:cNvPr id="25" name="TextBox 24"/>
+              <a:rPr sz="1700" b="1" i="0">
+                <a:solidFill>
+                  <a:srgbClr val="1B3A6B"/>
+                </a:solidFill>
+              </a:rPr>
+              <a:t>W4: Billing Disputes</a:t>
+            </a:r>
+          </a:p>
+        </p:txBody>
+      </p:sp>
+      <p:sp>
+        <p:nvSpPr>
+          <p:cNvPr id="18" name="TextBox 17"/>
           <p:cNvSpPr txBox="1"/>
           <p:nvPr/>
         </p:nvSpPr>
         <p:spPr>
           <a:xfrm>
-            <a:off x="7040880" y="1965960"/>
-            <a:ext cx="1280160" cy="274320"/>
+            <a:off x="6400800" y="3291840"/>
+            <a:ext cx="5029200" cy="274320"/>
           </a:xfrm>
           <a:prstGeom prst="rect">
             <a:avLst/>
@@ -4608,69 +4390,26 @@
           <a:p>
             <a:pPr algn="l"/>
             <a:r>
-              <a:rPr sz="1400" b="1" i="0">
-                <a:solidFill>
-                  <a:srgbClr val="1A7A3C"/>
-                </a:solidFill>
-              </a:rPr>
-              <a:t>1-2 mo</a:t>
-            </a:r>
-          </a:p>
-        </p:txBody>
-      </p:sp>
-      <p:sp>
-        <p:nvSpPr>
-          <p:cNvPr id="26" name="Rectangle 25"/>
-          <p:cNvSpPr/>
-          <p:nvPr/>
-        </p:nvSpPr>
-        <p:spPr>
-          <a:xfrm>
-            <a:off x="8412480" y="1828800"/>
-            <a:ext cx="1828800" cy="548640"/>
-          </a:xfrm>
-          <a:prstGeom prst="rect">
-            <a:avLst/>
-          </a:prstGeom>
-          <a:solidFill>
-            <a:srgbClr val="1A7A3C"/>
-          </a:solidFill>
-          <a:ln>
-            <a:noFill/>
-          </a:ln>
-        </p:spPr>
-        <p:style>
-          <a:lnRef idx="1">
-            <a:schemeClr val="accent1"/>
-          </a:lnRef>
-          <a:fillRef idx="3">
-            <a:schemeClr val="accent1"/>
-          </a:fillRef>
-          <a:effectRef idx="2">
-            <a:schemeClr val="accent1"/>
-          </a:effectRef>
-          <a:fontRef idx="minor">
-            <a:schemeClr val="lt1"/>
-          </a:fontRef>
-        </p:style>
-        <p:txBody>
-          <a:bodyPr rtlCol="0" anchor="ctr"/>
-          <a:lstStyle/>
-          <a:p>
-            <a:pPr algn="ctr"/>
-          </a:p>
-        </p:txBody>
-      </p:sp>
-      <p:sp>
-        <p:nvSpPr>
-          <p:cNvPr id="27" name="TextBox 26"/>
+              <a:rPr sz="1300" b="0" i="0">
+                <a:solidFill>
+                  <a:srgbClr val="606060"/>
+                </a:solidFill>
+              </a:rPr>
+              <a:t>60/day | 28 min avg | 616 hrs/month</a:t>
+            </a:r>
+          </a:p>
+        </p:txBody>
+      </p:sp>
+      <p:sp>
+        <p:nvSpPr>
+          <p:cNvPr id="19" name="TextBox 18"/>
           <p:cNvSpPr txBox="1"/>
           <p:nvPr/>
         </p:nvSpPr>
         <p:spPr>
           <a:xfrm>
-            <a:off x="8503920" y="1965960"/>
-            <a:ext cx="1645920" cy="274320"/>
+            <a:off x="6400800" y="3566160"/>
+            <a:ext cx="5029200" cy="457200"/>
           </a:xfrm>
           <a:prstGeom prst="rect">
             <a:avLst/>
@@ -4685,69 +4424,26 @@
           <a:p>
             <a:pPr algn="l"/>
             <a:r>
-              <a:rPr sz="1400" b="1" i="0">
-                <a:solidFill>
-                  <a:srgbClr val="FFFFFF"/>
-                </a:solidFill>
-              </a:rPr>
-              <a:t>PHASE 1</a:t>
-            </a:r>
-          </a:p>
-        </p:txBody>
-      </p:sp>
-      <p:sp>
-        <p:nvSpPr>
-          <p:cNvPr id="28" name="Rectangle 27"/>
-          <p:cNvSpPr/>
-          <p:nvPr/>
-        </p:nvSpPr>
-        <p:spPr>
-          <a:xfrm>
-            <a:off x="457200" y="2377440"/>
-            <a:ext cx="2560320" cy="457200"/>
-          </a:xfrm>
-          <a:prstGeom prst="rect">
-            <a:avLst/>
-          </a:prstGeom>
-          <a:solidFill>
-            <a:srgbClr val="F2F4F7"/>
-          </a:solidFill>
-          <a:ln>
-            <a:noFill/>
-          </a:ln>
-        </p:spPr>
-        <p:style>
-          <a:lnRef idx="1">
-            <a:schemeClr val="accent1"/>
-          </a:lnRef>
-          <a:fillRef idx="3">
-            <a:schemeClr val="accent1"/>
-          </a:fillRef>
-          <a:effectRef idx="2">
-            <a:schemeClr val="accent1"/>
-          </a:effectRef>
-          <a:fontRef idx="minor">
-            <a:schemeClr val="lt1"/>
-          </a:fontRef>
-        </p:style>
-        <p:txBody>
-          <a:bodyPr rtlCol="0" anchor="ctr"/>
-          <a:lstStyle/>
-          <a:p>
-            <a:pPr algn="ctr"/>
-          </a:p>
-        </p:txBody>
-      </p:sp>
-      <p:sp>
-        <p:nvSpPr>
-          <p:cNvPr id="29" name="TextBox 28"/>
+              <a:rPr sz="1200" b="0" i="0">
+                <a:solidFill>
+                  <a:srgbClr val="2D2D2D"/>
+                </a:solidFill>
+              </a:rPr>
+              <a:t>Charge disputes, fuel surcharges, credits. High strategic value but legacy Aurum dependency.</a:t>
+            </a:r>
+          </a:p>
+        </p:txBody>
+      </p:sp>
+      <p:sp>
+        <p:nvSpPr>
+          <p:cNvPr id="20" name="TextBox 19"/>
           <p:cNvSpPr txBox="1"/>
           <p:nvPr/>
         </p:nvSpPr>
         <p:spPr>
           <a:xfrm>
-            <a:off x="548640" y="2468880"/>
-            <a:ext cx="2377440" cy="274320"/>
+            <a:off x="457200" y="4389120"/>
+            <a:ext cx="11247120" cy="365760"/>
           </a:xfrm>
           <a:prstGeom prst="rect">
             <a:avLst/>
@@ -4760,71 +4456,28 @@
           </a:bodyPr>
           <a:lstStyle/>
           <a:p>
-            <a:pPr algn="l"/>
-            <a:r>
-              <a:rPr sz="1300" b="0" i="0">
-                <a:solidFill>
-                  <a:srgbClr val="2D2D2D"/>
-                </a:solidFill>
-              </a:rPr>
-              <a:t>W1: Exceptions</a:t>
-            </a:r>
-          </a:p>
-        </p:txBody>
-      </p:sp>
-      <p:sp>
-        <p:nvSpPr>
-          <p:cNvPr id="30" name="Rectangle 29"/>
-          <p:cNvSpPr/>
-          <p:nvPr/>
-        </p:nvSpPr>
-        <p:spPr>
-          <a:xfrm>
-            <a:off x="3017520" y="2377440"/>
-            <a:ext cx="1371600" cy="457200"/>
-          </a:xfrm>
-          <a:prstGeom prst="rect">
-            <a:avLst/>
-          </a:prstGeom>
-          <a:solidFill>
-            <a:srgbClr val="F2F4F7"/>
-          </a:solidFill>
-          <a:ln>
-            <a:noFill/>
-          </a:ln>
-        </p:spPr>
-        <p:style>
-          <a:lnRef idx="1">
-            <a:schemeClr val="accent1"/>
-          </a:lnRef>
-          <a:fillRef idx="3">
-            <a:schemeClr val="accent1"/>
-          </a:fillRef>
-          <a:effectRef idx="2">
-            <a:schemeClr val="accent1"/>
-          </a:effectRef>
-          <a:fontRef idx="minor">
-            <a:schemeClr val="lt1"/>
-          </a:fontRef>
-        </p:style>
-        <p:txBody>
-          <a:bodyPr rtlCol="0" anchor="ctr"/>
-          <a:lstStyle/>
-          <a:p>
             <a:pPr algn="ctr"/>
-          </a:p>
-        </p:txBody>
-      </p:sp>
-      <p:sp>
-        <p:nvSpPr>
-          <p:cNvPr id="31" name="TextBox 30"/>
+            <a:r>
+              <a:rPr sz="1600" b="1" i="0">
+                <a:solidFill>
+                  <a:srgbClr val="2E5FA3"/>
+                </a:solidFill>
+              </a:rPr>
+              <a:t>Total: 730 interactions/day consuming ~2,589 hours/month (74% of team capacity)</a:t>
+            </a:r>
+          </a:p>
+        </p:txBody>
+      </p:sp>
+      <p:sp>
+        <p:nvSpPr>
+          <p:cNvPr id="21" name="TextBox 20"/>
           <p:cNvSpPr txBox="1"/>
           <p:nvPr/>
         </p:nvSpPr>
         <p:spPr>
           <a:xfrm>
-            <a:off x="3108960" y="2468880"/>
-            <a:ext cx="1188720" cy="274320"/>
+            <a:off x="457200" y="4846320"/>
+            <a:ext cx="11247120" cy="365760"/>
           </a:xfrm>
           <a:prstGeom prst="rect">
             <a:avLst/>
@@ -4837,1336 +4490,14 @@
           </a:bodyPr>
           <a:lstStyle/>
           <a:p>
-            <a:pPr algn="l"/>
-            <a:r>
-              <a:rPr sz="1300" b="0" i="0">
-                <a:solidFill>
-                  <a:srgbClr val="2D2D2D"/>
-                </a:solidFill>
-              </a:rPr>
-              <a:t>180/day</a:t>
-            </a:r>
-          </a:p>
-        </p:txBody>
-      </p:sp>
-      <p:sp>
-        <p:nvSpPr>
-          <p:cNvPr id="32" name="Rectangle 31"/>
-          <p:cNvSpPr/>
-          <p:nvPr/>
-        </p:nvSpPr>
-        <p:spPr>
-          <a:xfrm>
-            <a:off x="4389120" y="2377440"/>
-            <a:ext cx="1371600" cy="457200"/>
-          </a:xfrm>
-          <a:prstGeom prst="rect">
-            <a:avLst/>
-          </a:prstGeom>
-          <a:solidFill>
-            <a:srgbClr val="F2F4F7"/>
-          </a:solidFill>
-          <a:ln>
-            <a:noFill/>
-          </a:ln>
-        </p:spPr>
-        <p:style>
-          <a:lnRef idx="1">
-            <a:schemeClr val="accent1"/>
-          </a:lnRef>
-          <a:fillRef idx="3">
-            <a:schemeClr val="accent1"/>
-          </a:fillRef>
-          <a:effectRef idx="2">
-            <a:schemeClr val="accent1"/>
-          </a:effectRef>
-          <a:fontRef idx="minor">
-            <a:schemeClr val="lt1"/>
-          </a:fontRef>
-        </p:style>
-        <p:txBody>
-          <a:bodyPr rtlCol="0" anchor="ctr"/>
-          <a:lstStyle/>
-          <a:p>
             <a:pPr algn="ctr"/>
-          </a:p>
-        </p:txBody>
-      </p:sp>
-      <p:sp>
-        <p:nvSpPr>
-          <p:cNvPr id="33" name="TextBox 32"/>
-          <p:cNvSpPr txBox="1"/>
-          <p:nvPr/>
-        </p:nvSpPr>
-        <p:spPr>
-          <a:xfrm>
-            <a:off x="4480560" y="2468880"/>
-            <a:ext cx="1188720" cy="274320"/>
-          </a:xfrm>
-          <a:prstGeom prst="rect">
-            <a:avLst/>
-          </a:prstGeom>
-          <a:noFill/>
-        </p:spPr>
-        <p:txBody>
-          <a:bodyPr wrap="square">
-            <a:spAutoFit/>
-          </a:bodyPr>
-          <a:lstStyle/>
-          <a:p>
-            <a:pPr algn="l"/>
-            <a:r>
-              <a:rPr sz="1300" b="0" i="0">
-                <a:solidFill>
-                  <a:srgbClr val="2D2D2D"/>
-                </a:solidFill>
-              </a:rPr>
-              <a:t>2.0 FTE</a:t>
-            </a:r>
-          </a:p>
-        </p:txBody>
-      </p:sp>
-      <p:sp>
-        <p:nvSpPr>
-          <p:cNvPr id="34" name="Rectangle 33"/>
-          <p:cNvSpPr/>
-          <p:nvPr/>
-        </p:nvSpPr>
-        <p:spPr>
-          <a:xfrm>
-            <a:off x="5760720" y="2377440"/>
-            <a:ext cx="1188720" cy="457200"/>
-          </a:xfrm>
-          <a:prstGeom prst="rect">
-            <a:avLst/>
-          </a:prstGeom>
-          <a:solidFill>
-            <a:srgbClr val="F2F4F7"/>
-          </a:solidFill>
-          <a:ln>
-            <a:noFill/>
-          </a:ln>
-        </p:spPr>
-        <p:style>
-          <a:lnRef idx="1">
-            <a:schemeClr val="accent1"/>
-          </a:lnRef>
-          <a:fillRef idx="3">
-            <a:schemeClr val="accent1"/>
-          </a:fillRef>
-          <a:effectRef idx="2">
-            <a:schemeClr val="accent1"/>
-          </a:effectRef>
-          <a:fontRef idx="minor">
-            <a:schemeClr val="lt1"/>
-          </a:fontRef>
-        </p:style>
-        <p:txBody>
-          <a:bodyPr rtlCol="0" anchor="ctr"/>
-          <a:lstStyle/>
-          <a:p>
-            <a:pPr algn="ctr"/>
-          </a:p>
-        </p:txBody>
-      </p:sp>
-      <p:sp>
-        <p:nvSpPr>
-          <p:cNvPr id="35" name="TextBox 34"/>
-          <p:cNvSpPr txBox="1"/>
-          <p:nvPr/>
-        </p:nvSpPr>
-        <p:spPr>
-          <a:xfrm>
-            <a:off x="5852160" y="2468880"/>
-            <a:ext cx="1005840" cy="274320"/>
-          </a:xfrm>
-          <a:prstGeom prst="rect">
-            <a:avLst/>
-          </a:prstGeom>
-          <a:noFill/>
-        </p:spPr>
-        <p:txBody>
-          <a:bodyPr wrap="square">
-            <a:spAutoFit/>
-          </a:bodyPr>
-          <a:lstStyle/>
-          <a:p>
-            <a:pPr algn="l"/>
-            <a:r>
-              <a:rPr sz="1300" b="0" i="0">
-                <a:solidFill>
-                  <a:srgbClr val="CC8400"/>
-                </a:solidFill>
-              </a:rPr>
-              <a:t>MED</a:t>
-            </a:r>
-          </a:p>
-        </p:txBody>
-      </p:sp>
-      <p:sp>
-        <p:nvSpPr>
-          <p:cNvPr id="36" name="Rectangle 35"/>
-          <p:cNvSpPr/>
-          <p:nvPr/>
-        </p:nvSpPr>
-        <p:spPr>
-          <a:xfrm>
-            <a:off x="6949440" y="2377440"/>
-            <a:ext cx="1463040" cy="457200"/>
-          </a:xfrm>
-          <a:prstGeom prst="rect">
-            <a:avLst/>
-          </a:prstGeom>
-          <a:solidFill>
-            <a:srgbClr val="F2F4F7"/>
-          </a:solidFill>
-          <a:ln>
-            <a:noFill/>
-          </a:ln>
-        </p:spPr>
-        <p:style>
-          <a:lnRef idx="1">
-            <a:schemeClr val="accent1"/>
-          </a:lnRef>
-          <a:fillRef idx="3">
-            <a:schemeClr val="accent1"/>
-          </a:fillRef>
-          <a:effectRef idx="2">
-            <a:schemeClr val="accent1"/>
-          </a:effectRef>
-          <a:fontRef idx="minor">
-            <a:schemeClr val="lt1"/>
-          </a:fontRef>
-        </p:style>
-        <p:txBody>
-          <a:bodyPr rtlCol="0" anchor="ctr"/>
-          <a:lstStyle/>
-          <a:p>
-            <a:pPr algn="ctr"/>
-          </a:p>
-        </p:txBody>
-      </p:sp>
-      <p:sp>
-        <p:nvSpPr>
-          <p:cNvPr id="37" name="TextBox 36"/>
-          <p:cNvSpPr txBox="1"/>
-          <p:nvPr/>
-        </p:nvSpPr>
-        <p:spPr>
-          <a:xfrm>
-            <a:off x="7040880" y="2468880"/>
-            <a:ext cx="1280160" cy="274320"/>
-          </a:xfrm>
-          <a:prstGeom prst="rect">
-            <a:avLst/>
-          </a:prstGeom>
-          <a:noFill/>
-        </p:spPr>
-        <p:txBody>
-          <a:bodyPr wrap="square">
-            <a:spAutoFit/>
-          </a:bodyPr>
-          <a:lstStyle/>
-          <a:p>
-            <a:pPr algn="l"/>
-            <a:r>
-              <a:rPr sz="1300" b="0" i="0">
-                <a:solidFill>
-                  <a:srgbClr val="2D2D2D"/>
-                </a:solidFill>
-              </a:rPr>
-              <a:t>6-12 mo</a:t>
-            </a:r>
-          </a:p>
-        </p:txBody>
-      </p:sp>
-      <p:sp>
-        <p:nvSpPr>
-          <p:cNvPr id="38" name="Rectangle 37"/>
-          <p:cNvSpPr/>
-          <p:nvPr/>
-        </p:nvSpPr>
-        <p:spPr>
-          <a:xfrm>
-            <a:off x="8412480" y="2377440"/>
-            <a:ext cx="1828800" cy="457200"/>
-          </a:xfrm>
-          <a:prstGeom prst="rect">
-            <a:avLst/>
-          </a:prstGeom>
-          <a:solidFill>
-            <a:srgbClr val="F2F4F7"/>
-          </a:solidFill>
-          <a:ln>
-            <a:noFill/>
-          </a:ln>
-        </p:spPr>
-        <p:style>
-          <a:lnRef idx="1">
-            <a:schemeClr val="accent1"/>
-          </a:lnRef>
-          <a:fillRef idx="3">
-            <a:schemeClr val="accent1"/>
-          </a:fillRef>
-          <a:effectRef idx="2">
-            <a:schemeClr val="accent1"/>
-          </a:effectRef>
-          <a:fontRef idx="minor">
-            <a:schemeClr val="lt1"/>
-          </a:fontRef>
-        </p:style>
-        <p:txBody>
-          <a:bodyPr rtlCol="0" anchor="ctr"/>
-          <a:lstStyle/>
-          <a:p>
-            <a:pPr algn="ctr"/>
-          </a:p>
-        </p:txBody>
-      </p:sp>
-      <p:sp>
-        <p:nvSpPr>
-          <p:cNvPr id="39" name="TextBox 38"/>
-          <p:cNvSpPr txBox="1"/>
-          <p:nvPr/>
-        </p:nvSpPr>
-        <p:spPr>
-          <a:xfrm>
-            <a:off x="8503920" y="2468880"/>
-            <a:ext cx="1645920" cy="274320"/>
-          </a:xfrm>
-          <a:prstGeom prst="rect">
-            <a:avLst/>
-          </a:prstGeom>
-          <a:noFill/>
-        </p:spPr>
-        <p:txBody>
-          <a:bodyPr wrap="square">
-            <a:spAutoFit/>
-          </a:bodyPr>
-          <a:lstStyle/>
-          <a:p>
-            <a:pPr algn="l"/>
-            <a:r>
-              <a:rPr sz="1300" b="0" i="0">
+            <a:r>
+              <a:rPr sz="1500" b="0" i="1">
                 <a:solidFill>
                   <a:srgbClr val="606060"/>
                 </a:solidFill>
               </a:rPr>
-              <a:t>Defer</a:t>
-            </a:r>
-          </a:p>
-        </p:txBody>
-      </p:sp>
-      <p:sp>
-        <p:nvSpPr>
-          <p:cNvPr id="40" name="Rectangle 39"/>
-          <p:cNvSpPr/>
-          <p:nvPr/>
-        </p:nvSpPr>
-        <p:spPr>
-          <a:xfrm>
-            <a:off x="457200" y="2834640"/>
-            <a:ext cx="2560320" cy="457200"/>
-          </a:xfrm>
-          <a:prstGeom prst="rect">
-            <a:avLst/>
-          </a:prstGeom>
-          <a:solidFill>
-            <a:srgbClr val="F2F4F7"/>
-          </a:solidFill>
-          <a:ln>
-            <a:noFill/>
-          </a:ln>
-        </p:spPr>
-        <p:style>
-          <a:lnRef idx="1">
-            <a:schemeClr val="accent1"/>
-          </a:lnRef>
-          <a:fillRef idx="3">
-            <a:schemeClr val="accent1"/>
-          </a:fillRef>
-          <a:effectRef idx="2">
-            <a:schemeClr val="accent1"/>
-          </a:effectRef>
-          <a:fontRef idx="minor">
-            <a:schemeClr val="lt1"/>
-          </a:fontRef>
-        </p:style>
-        <p:txBody>
-          <a:bodyPr rtlCol="0" anchor="ctr"/>
-          <a:lstStyle/>
-          <a:p>
-            <a:pPr algn="ctr"/>
-          </a:p>
-        </p:txBody>
-      </p:sp>
-      <p:sp>
-        <p:nvSpPr>
-          <p:cNvPr id="41" name="TextBox 40"/>
-          <p:cNvSpPr txBox="1"/>
-          <p:nvPr/>
-        </p:nvSpPr>
-        <p:spPr>
-          <a:xfrm>
-            <a:off x="548640" y="2926080"/>
-            <a:ext cx="2377440" cy="274320"/>
-          </a:xfrm>
-          <a:prstGeom prst="rect">
-            <a:avLst/>
-          </a:prstGeom>
-          <a:noFill/>
-        </p:spPr>
-        <p:txBody>
-          <a:bodyPr wrap="square">
-            <a:spAutoFit/>
-          </a:bodyPr>
-          <a:lstStyle/>
-          <a:p>
-            <a:pPr algn="l"/>
-            <a:r>
-              <a:rPr sz="1300" b="0" i="0">
-                <a:solidFill>
-                  <a:srgbClr val="2D2D2D"/>
-                </a:solidFill>
-              </a:rPr>
-              <a:t>W4: Billing</a:t>
-            </a:r>
-          </a:p>
-        </p:txBody>
-      </p:sp>
-      <p:sp>
-        <p:nvSpPr>
-          <p:cNvPr id="42" name="Rectangle 41"/>
-          <p:cNvSpPr/>
-          <p:nvPr/>
-        </p:nvSpPr>
-        <p:spPr>
-          <a:xfrm>
-            <a:off x="3017520" y="2834640"/>
-            <a:ext cx="1371600" cy="457200"/>
-          </a:xfrm>
-          <a:prstGeom prst="rect">
-            <a:avLst/>
-          </a:prstGeom>
-          <a:solidFill>
-            <a:srgbClr val="F2F4F7"/>
-          </a:solidFill>
-          <a:ln>
-            <a:noFill/>
-          </a:ln>
-        </p:spPr>
-        <p:style>
-          <a:lnRef idx="1">
-            <a:schemeClr val="accent1"/>
-          </a:lnRef>
-          <a:fillRef idx="3">
-            <a:schemeClr val="accent1"/>
-          </a:fillRef>
-          <a:effectRef idx="2">
-            <a:schemeClr val="accent1"/>
-          </a:effectRef>
-          <a:fontRef idx="minor">
-            <a:schemeClr val="lt1"/>
-          </a:fontRef>
-        </p:style>
-        <p:txBody>
-          <a:bodyPr rtlCol="0" anchor="ctr"/>
-          <a:lstStyle/>
-          <a:p>
-            <a:pPr algn="ctr"/>
-          </a:p>
-        </p:txBody>
-      </p:sp>
-      <p:sp>
-        <p:nvSpPr>
-          <p:cNvPr id="43" name="TextBox 42"/>
-          <p:cNvSpPr txBox="1"/>
-          <p:nvPr/>
-        </p:nvSpPr>
-        <p:spPr>
-          <a:xfrm>
-            <a:off x="3108960" y="2926080"/>
-            <a:ext cx="1188720" cy="274320"/>
-          </a:xfrm>
-          <a:prstGeom prst="rect">
-            <a:avLst/>
-          </a:prstGeom>
-          <a:noFill/>
-        </p:spPr>
-        <p:txBody>
-          <a:bodyPr wrap="square">
-            <a:spAutoFit/>
-          </a:bodyPr>
-          <a:lstStyle/>
-          <a:p>
-            <a:pPr algn="l"/>
-            <a:r>
-              <a:rPr sz="1300" b="0" i="0">
-                <a:solidFill>
-                  <a:srgbClr val="2D2D2D"/>
-                </a:solidFill>
-              </a:rPr>
-              <a:t>60/day</a:t>
-            </a:r>
-          </a:p>
-        </p:txBody>
-      </p:sp>
-      <p:sp>
-        <p:nvSpPr>
-          <p:cNvPr id="44" name="Rectangle 43"/>
-          <p:cNvSpPr/>
-          <p:nvPr/>
-        </p:nvSpPr>
-        <p:spPr>
-          <a:xfrm>
-            <a:off x="4389120" y="2834640"/>
-            <a:ext cx="1371600" cy="457200"/>
-          </a:xfrm>
-          <a:prstGeom prst="rect">
-            <a:avLst/>
-          </a:prstGeom>
-          <a:solidFill>
-            <a:srgbClr val="F2F4F7"/>
-          </a:solidFill>
-          <a:ln>
-            <a:noFill/>
-          </a:ln>
-        </p:spPr>
-        <p:style>
-          <a:lnRef idx="1">
-            <a:schemeClr val="accent1"/>
-          </a:lnRef>
-          <a:fillRef idx="3">
-            <a:schemeClr val="accent1"/>
-          </a:fillRef>
-          <a:effectRef idx="2">
-            <a:schemeClr val="accent1"/>
-          </a:effectRef>
-          <a:fontRef idx="minor">
-            <a:schemeClr val="lt1"/>
-          </a:fontRef>
-        </p:style>
-        <p:txBody>
-          <a:bodyPr rtlCol="0" anchor="ctr"/>
-          <a:lstStyle/>
-          <a:p>
-            <a:pPr algn="ctr"/>
-          </a:p>
-        </p:txBody>
-      </p:sp>
-      <p:sp>
-        <p:nvSpPr>
-          <p:cNvPr id="45" name="TextBox 44"/>
-          <p:cNvSpPr txBox="1"/>
-          <p:nvPr/>
-        </p:nvSpPr>
-        <p:spPr>
-          <a:xfrm>
-            <a:off x="4480560" y="2926080"/>
-            <a:ext cx="1188720" cy="274320"/>
-          </a:xfrm>
-          <a:prstGeom prst="rect">
-            <a:avLst/>
-          </a:prstGeom>
-          <a:noFill/>
-        </p:spPr>
-        <p:txBody>
-          <a:bodyPr wrap="square">
-            <a:spAutoFit/>
-          </a:bodyPr>
-          <a:lstStyle/>
-          <a:p>
-            <a:pPr algn="l"/>
-            <a:r>
-              <a:rPr sz="1300" b="0" i="0">
-                <a:solidFill>
-                  <a:srgbClr val="2D2D2D"/>
-                </a:solidFill>
-              </a:rPr>
-              <a:t>1.5 FTE</a:t>
-            </a:r>
-          </a:p>
-        </p:txBody>
-      </p:sp>
-      <p:sp>
-        <p:nvSpPr>
-          <p:cNvPr id="46" name="Rectangle 45"/>
-          <p:cNvSpPr/>
-          <p:nvPr/>
-        </p:nvSpPr>
-        <p:spPr>
-          <a:xfrm>
-            <a:off x="5760720" y="2834640"/>
-            <a:ext cx="1188720" cy="457200"/>
-          </a:xfrm>
-          <a:prstGeom prst="rect">
-            <a:avLst/>
-          </a:prstGeom>
-          <a:solidFill>
-            <a:srgbClr val="F2F4F7"/>
-          </a:solidFill>
-          <a:ln>
-            <a:noFill/>
-          </a:ln>
-        </p:spPr>
-        <p:style>
-          <a:lnRef idx="1">
-            <a:schemeClr val="accent1"/>
-          </a:lnRef>
-          <a:fillRef idx="3">
-            <a:schemeClr val="accent1"/>
-          </a:fillRef>
-          <a:effectRef idx="2">
-            <a:schemeClr val="accent1"/>
-          </a:effectRef>
-          <a:fontRef idx="minor">
-            <a:schemeClr val="lt1"/>
-          </a:fontRef>
-        </p:style>
-        <p:txBody>
-          <a:bodyPr rtlCol="0" anchor="ctr"/>
-          <a:lstStyle/>
-          <a:p>
-            <a:pPr algn="ctr"/>
-          </a:p>
-        </p:txBody>
-      </p:sp>
-      <p:sp>
-        <p:nvSpPr>
-          <p:cNvPr id="47" name="TextBox 46"/>
-          <p:cNvSpPr txBox="1"/>
-          <p:nvPr/>
-        </p:nvSpPr>
-        <p:spPr>
-          <a:xfrm>
-            <a:off x="5852160" y="2926080"/>
-            <a:ext cx="1005840" cy="274320"/>
-          </a:xfrm>
-          <a:prstGeom prst="rect">
-            <a:avLst/>
-          </a:prstGeom>
-          <a:noFill/>
-        </p:spPr>
-        <p:txBody>
-          <a:bodyPr wrap="square">
-            <a:spAutoFit/>
-          </a:bodyPr>
-          <a:lstStyle/>
-          <a:p>
-            <a:pPr algn="l"/>
-            <a:r>
-              <a:rPr sz="1300" b="1" i="0">
-                <a:solidFill>
-                  <a:srgbClr val="BF352A"/>
-                </a:solidFill>
-              </a:rPr>
-              <a:t>HIGH</a:t>
-            </a:r>
-          </a:p>
-        </p:txBody>
-      </p:sp>
-      <p:sp>
-        <p:nvSpPr>
-          <p:cNvPr id="48" name="Rectangle 47"/>
-          <p:cNvSpPr/>
-          <p:nvPr/>
-        </p:nvSpPr>
-        <p:spPr>
-          <a:xfrm>
-            <a:off x="6949440" y="2834640"/>
-            <a:ext cx="1463040" cy="457200"/>
-          </a:xfrm>
-          <a:prstGeom prst="rect">
-            <a:avLst/>
-          </a:prstGeom>
-          <a:solidFill>
-            <a:srgbClr val="F2F4F7"/>
-          </a:solidFill>
-          <a:ln>
-            <a:noFill/>
-          </a:ln>
-        </p:spPr>
-        <p:style>
-          <a:lnRef idx="1">
-            <a:schemeClr val="accent1"/>
-          </a:lnRef>
-          <a:fillRef idx="3">
-            <a:schemeClr val="accent1"/>
-          </a:fillRef>
-          <a:effectRef idx="2">
-            <a:schemeClr val="accent1"/>
-          </a:effectRef>
-          <a:fontRef idx="minor">
-            <a:schemeClr val="lt1"/>
-          </a:fontRef>
-        </p:style>
-        <p:txBody>
-          <a:bodyPr rtlCol="0" anchor="ctr"/>
-          <a:lstStyle/>
-          <a:p>
-            <a:pPr algn="ctr"/>
-          </a:p>
-        </p:txBody>
-      </p:sp>
-      <p:sp>
-        <p:nvSpPr>
-          <p:cNvPr id="49" name="TextBox 48"/>
-          <p:cNvSpPr txBox="1"/>
-          <p:nvPr/>
-        </p:nvSpPr>
-        <p:spPr>
-          <a:xfrm>
-            <a:off x="7040880" y="2926080"/>
-            <a:ext cx="1280160" cy="274320"/>
-          </a:xfrm>
-          <a:prstGeom prst="rect">
-            <a:avLst/>
-          </a:prstGeom>
-          <a:noFill/>
-        </p:spPr>
-        <p:txBody>
-          <a:bodyPr wrap="square">
-            <a:spAutoFit/>
-          </a:bodyPr>
-          <a:lstStyle/>
-          <a:p>
-            <a:pPr algn="l"/>
-            <a:r>
-              <a:rPr sz="1300" b="0" i="0">
-                <a:solidFill>
-                  <a:srgbClr val="2D2D2D"/>
-                </a:solidFill>
-              </a:rPr>
-              <a:t>3-6 mo</a:t>
-            </a:r>
-          </a:p>
-        </p:txBody>
-      </p:sp>
-      <p:sp>
-        <p:nvSpPr>
-          <p:cNvPr id="50" name="Rectangle 49"/>
-          <p:cNvSpPr/>
-          <p:nvPr/>
-        </p:nvSpPr>
-        <p:spPr>
-          <a:xfrm>
-            <a:off x="8412480" y="2834640"/>
-            <a:ext cx="1828800" cy="457200"/>
-          </a:xfrm>
-          <a:prstGeom prst="rect">
-            <a:avLst/>
-          </a:prstGeom>
-          <a:solidFill>
-            <a:srgbClr val="CC8400"/>
-          </a:solidFill>
-          <a:ln>
-            <a:noFill/>
-          </a:ln>
-        </p:spPr>
-        <p:style>
-          <a:lnRef idx="1">
-            <a:schemeClr val="accent1"/>
-          </a:lnRef>
-          <a:fillRef idx="3">
-            <a:schemeClr val="accent1"/>
-          </a:fillRef>
-          <a:effectRef idx="2">
-            <a:schemeClr val="accent1"/>
-          </a:effectRef>
-          <a:fontRef idx="minor">
-            <a:schemeClr val="lt1"/>
-          </a:fontRef>
-        </p:style>
-        <p:txBody>
-          <a:bodyPr rtlCol="0" anchor="ctr"/>
-          <a:lstStyle/>
-          <a:p>
-            <a:pPr algn="ctr"/>
-          </a:p>
-        </p:txBody>
-      </p:sp>
-      <p:sp>
-        <p:nvSpPr>
-          <p:cNvPr id="51" name="TextBox 50"/>
-          <p:cNvSpPr txBox="1"/>
-          <p:nvPr/>
-        </p:nvSpPr>
-        <p:spPr>
-          <a:xfrm>
-            <a:off x="8503920" y="2926080"/>
-            <a:ext cx="1645920" cy="274320"/>
-          </a:xfrm>
-          <a:prstGeom prst="rect">
-            <a:avLst/>
-          </a:prstGeom>
-          <a:noFill/>
-        </p:spPr>
-        <p:txBody>
-          <a:bodyPr wrap="square">
-            <a:spAutoFit/>
-          </a:bodyPr>
-          <a:lstStyle/>
-          <a:p>
-            <a:pPr algn="l"/>
-            <a:r>
-              <a:rPr sz="1300" b="1" i="0">
-                <a:solidFill>
-                  <a:srgbClr val="FFFFFF"/>
-                </a:solidFill>
-              </a:rPr>
-              <a:t>Phase 2</a:t>
-            </a:r>
-          </a:p>
-        </p:txBody>
-      </p:sp>
-      <p:sp>
-        <p:nvSpPr>
-          <p:cNvPr id="52" name="Rectangle 51"/>
-          <p:cNvSpPr/>
-          <p:nvPr/>
-        </p:nvSpPr>
-        <p:spPr>
-          <a:xfrm>
-            <a:off x="457200" y="3291840"/>
-            <a:ext cx="2560320" cy="457200"/>
-          </a:xfrm>
-          <a:prstGeom prst="rect">
-            <a:avLst/>
-          </a:prstGeom>
-          <a:solidFill>
-            <a:srgbClr val="F2F4F7"/>
-          </a:solidFill>
-          <a:ln>
-            <a:noFill/>
-          </a:ln>
-        </p:spPr>
-        <p:style>
-          <a:lnRef idx="1">
-            <a:schemeClr val="accent1"/>
-          </a:lnRef>
-          <a:fillRef idx="3">
-            <a:schemeClr val="accent1"/>
-          </a:fillRef>
-          <a:effectRef idx="2">
-            <a:schemeClr val="accent1"/>
-          </a:effectRef>
-          <a:fontRef idx="minor">
-            <a:schemeClr val="lt1"/>
-          </a:fontRef>
-        </p:style>
-        <p:txBody>
-          <a:bodyPr rtlCol="0" anchor="ctr"/>
-          <a:lstStyle/>
-          <a:p>
-            <a:pPr algn="ctr"/>
-          </a:p>
-        </p:txBody>
-      </p:sp>
-      <p:sp>
-        <p:nvSpPr>
-          <p:cNvPr id="53" name="TextBox 52"/>
-          <p:cNvSpPr txBox="1"/>
-          <p:nvPr/>
-        </p:nvSpPr>
-        <p:spPr>
-          <a:xfrm>
-            <a:off x="548640" y="3383280"/>
-            <a:ext cx="2377440" cy="274320"/>
-          </a:xfrm>
-          <a:prstGeom prst="rect">
-            <a:avLst/>
-          </a:prstGeom>
-          <a:noFill/>
-        </p:spPr>
-        <p:txBody>
-          <a:bodyPr wrap="square">
-            <a:spAutoFit/>
-          </a:bodyPr>
-          <a:lstStyle/>
-          <a:p>
-            <a:pPr algn="l"/>
-            <a:r>
-              <a:rPr sz="1300" b="0" i="0">
-                <a:solidFill>
-                  <a:srgbClr val="2D2D2D"/>
-                </a:solidFill>
-              </a:rPr>
-              <a:t>W3: Route Changes</a:t>
-            </a:r>
-          </a:p>
-        </p:txBody>
-      </p:sp>
-      <p:sp>
-        <p:nvSpPr>
-          <p:cNvPr id="54" name="Rectangle 53"/>
-          <p:cNvSpPr/>
-          <p:nvPr/>
-        </p:nvSpPr>
-        <p:spPr>
-          <a:xfrm>
-            <a:off x="3017520" y="3291840"/>
-            <a:ext cx="1371600" cy="457200"/>
-          </a:xfrm>
-          <a:prstGeom prst="rect">
-            <a:avLst/>
-          </a:prstGeom>
-          <a:solidFill>
-            <a:srgbClr val="F2F4F7"/>
-          </a:solidFill>
-          <a:ln>
-            <a:noFill/>
-          </a:ln>
-        </p:spPr>
-        <p:style>
-          <a:lnRef idx="1">
-            <a:schemeClr val="accent1"/>
-          </a:lnRef>
-          <a:fillRef idx="3">
-            <a:schemeClr val="accent1"/>
-          </a:fillRef>
-          <a:effectRef idx="2">
-            <a:schemeClr val="accent1"/>
-          </a:effectRef>
-          <a:fontRef idx="minor">
-            <a:schemeClr val="lt1"/>
-          </a:fontRef>
-        </p:style>
-        <p:txBody>
-          <a:bodyPr rtlCol="0" anchor="ctr"/>
-          <a:lstStyle/>
-          <a:p>
-            <a:pPr algn="ctr"/>
-          </a:p>
-        </p:txBody>
-      </p:sp>
-      <p:sp>
-        <p:nvSpPr>
-          <p:cNvPr id="55" name="TextBox 54"/>
-          <p:cNvSpPr txBox="1"/>
-          <p:nvPr/>
-        </p:nvSpPr>
-        <p:spPr>
-          <a:xfrm>
-            <a:off x="3108960" y="3383280"/>
-            <a:ext cx="1188720" cy="274320"/>
-          </a:xfrm>
-          <a:prstGeom prst="rect">
-            <a:avLst/>
-          </a:prstGeom>
-          <a:noFill/>
-        </p:spPr>
-        <p:txBody>
-          <a:bodyPr wrap="square">
-            <a:spAutoFit/>
-          </a:bodyPr>
-          <a:lstStyle/>
-          <a:p>
-            <a:pPr algn="l"/>
-            <a:r>
-              <a:rPr sz="1300" b="0" i="0">
-                <a:solidFill>
-                  <a:srgbClr val="2D2D2D"/>
-                </a:solidFill>
-              </a:rPr>
-              <a:t>90/day</a:t>
-            </a:r>
-          </a:p>
-        </p:txBody>
-      </p:sp>
-      <p:sp>
-        <p:nvSpPr>
-          <p:cNvPr id="56" name="Rectangle 55"/>
-          <p:cNvSpPr/>
-          <p:nvPr/>
-        </p:nvSpPr>
-        <p:spPr>
-          <a:xfrm>
-            <a:off x="4389120" y="3291840"/>
-            <a:ext cx="1371600" cy="457200"/>
-          </a:xfrm>
-          <a:prstGeom prst="rect">
-            <a:avLst/>
-          </a:prstGeom>
-          <a:solidFill>
-            <a:srgbClr val="F2F4F7"/>
-          </a:solidFill>
-          <a:ln>
-            <a:noFill/>
-          </a:ln>
-        </p:spPr>
-        <p:style>
-          <a:lnRef idx="1">
-            <a:schemeClr val="accent1"/>
-          </a:lnRef>
-          <a:fillRef idx="3">
-            <a:schemeClr val="accent1"/>
-          </a:fillRef>
-          <a:effectRef idx="2">
-            <a:schemeClr val="accent1"/>
-          </a:effectRef>
-          <a:fontRef idx="minor">
-            <a:schemeClr val="lt1"/>
-          </a:fontRef>
-        </p:style>
-        <p:txBody>
-          <a:bodyPr rtlCol="0" anchor="ctr"/>
-          <a:lstStyle/>
-          <a:p>
-            <a:pPr algn="ctr"/>
-          </a:p>
-        </p:txBody>
-      </p:sp>
-      <p:sp>
-        <p:nvSpPr>
-          <p:cNvPr id="57" name="TextBox 56"/>
-          <p:cNvSpPr txBox="1"/>
-          <p:nvPr/>
-        </p:nvSpPr>
-        <p:spPr>
-          <a:xfrm>
-            <a:off x="4480560" y="3383280"/>
-            <a:ext cx="1188720" cy="274320"/>
-          </a:xfrm>
-          <a:prstGeom prst="rect">
-            <a:avLst/>
-          </a:prstGeom>
-          <a:noFill/>
-        </p:spPr>
-        <p:txBody>
-          <a:bodyPr wrap="square">
-            <a:spAutoFit/>
-          </a:bodyPr>
-          <a:lstStyle/>
-          <a:p>
-            <a:pPr algn="l"/>
-            <a:r>
-              <a:rPr sz="1300" b="0" i="0">
-                <a:solidFill>
-                  <a:srgbClr val="2D2D2D"/>
-                </a:solidFill>
-              </a:rPr>
-              <a:t>0.9 FTE</a:t>
-            </a:r>
-          </a:p>
-        </p:txBody>
-      </p:sp>
-      <p:sp>
-        <p:nvSpPr>
-          <p:cNvPr id="58" name="Rectangle 57"/>
-          <p:cNvSpPr/>
-          <p:nvPr/>
-        </p:nvSpPr>
-        <p:spPr>
-          <a:xfrm>
-            <a:off x="5760720" y="3291840"/>
-            <a:ext cx="1188720" cy="457200"/>
-          </a:xfrm>
-          <a:prstGeom prst="rect">
-            <a:avLst/>
-          </a:prstGeom>
-          <a:solidFill>
-            <a:srgbClr val="F2F4F7"/>
-          </a:solidFill>
-          <a:ln>
-            <a:noFill/>
-          </a:ln>
-        </p:spPr>
-        <p:style>
-          <a:lnRef idx="1">
-            <a:schemeClr val="accent1"/>
-          </a:lnRef>
-          <a:fillRef idx="3">
-            <a:schemeClr val="accent1"/>
-          </a:fillRef>
-          <a:effectRef idx="2">
-            <a:schemeClr val="accent1"/>
-          </a:effectRef>
-          <a:fontRef idx="minor">
-            <a:schemeClr val="lt1"/>
-          </a:fontRef>
-        </p:style>
-        <p:txBody>
-          <a:bodyPr rtlCol="0" anchor="ctr"/>
-          <a:lstStyle/>
-          <a:p>
-            <a:pPr algn="ctr"/>
-          </a:p>
-        </p:txBody>
-      </p:sp>
-      <p:sp>
-        <p:nvSpPr>
-          <p:cNvPr id="59" name="TextBox 58"/>
-          <p:cNvSpPr txBox="1"/>
-          <p:nvPr/>
-        </p:nvSpPr>
-        <p:spPr>
-          <a:xfrm>
-            <a:off x="5852160" y="3383280"/>
-            <a:ext cx="1005840" cy="274320"/>
-          </a:xfrm>
-          <a:prstGeom prst="rect">
-            <a:avLst/>
-          </a:prstGeom>
-          <a:noFill/>
-        </p:spPr>
-        <p:txBody>
-          <a:bodyPr wrap="square">
-            <a:spAutoFit/>
-          </a:bodyPr>
-          <a:lstStyle/>
-          <a:p>
-            <a:pPr algn="l"/>
-            <a:r>
-              <a:rPr sz="1300" b="1" i="0">
-                <a:solidFill>
-                  <a:srgbClr val="BF352A"/>
-                </a:solidFill>
-              </a:rPr>
-              <a:t>HIGH</a:t>
-            </a:r>
-          </a:p>
-        </p:txBody>
-      </p:sp>
-      <p:sp>
-        <p:nvSpPr>
-          <p:cNvPr id="60" name="Rectangle 59"/>
-          <p:cNvSpPr/>
-          <p:nvPr/>
-        </p:nvSpPr>
-        <p:spPr>
-          <a:xfrm>
-            <a:off x="6949440" y="3291840"/>
-            <a:ext cx="1463040" cy="457200"/>
-          </a:xfrm>
-          <a:prstGeom prst="rect">
-            <a:avLst/>
-          </a:prstGeom>
-          <a:solidFill>
-            <a:srgbClr val="F2F4F7"/>
-          </a:solidFill>
-          <a:ln>
-            <a:noFill/>
-          </a:ln>
-        </p:spPr>
-        <p:style>
-          <a:lnRef idx="1">
-            <a:schemeClr val="accent1"/>
-          </a:lnRef>
-          <a:fillRef idx="3">
-            <a:schemeClr val="accent1"/>
-          </a:fillRef>
-          <a:effectRef idx="2">
-            <a:schemeClr val="accent1"/>
-          </a:effectRef>
-          <a:fontRef idx="minor">
-            <a:schemeClr val="lt1"/>
-          </a:fontRef>
-        </p:style>
-        <p:txBody>
-          <a:bodyPr rtlCol="0" anchor="ctr"/>
-          <a:lstStyle/>
-          <a:p>
-            <a:pPr algn="ctr"/>
-          </a:p>
-        </p:txBody>
-      </p:sp>
-      <p:sp>
-        <p:nvSpPr>
-          <p:cNvPr id="61" name="TextBox 60"/>
-          <p:cNvSpPr txBox="1"/>
-          <p:nvPr/>
-        </p:nvSpPr>
-        <p:spPr>
-          <a:xfrm>
-            <a:off x="7040880" y="3383280"/>
-            <a:ext cx="1280160" cy="274320"/>
-          </a:xfrm>
-          <a:prstGeom prst="rect">
-            <a:avLst/>
-          </a:prstGeom>
-          <a:noFill/>
-        </p:spPr>
-        <p:txBody>
-          <a:bodyPr wrap="square">
-            <a:spAutoFit/>
-          </a:bodyPr>
-          <a:lstStyle/>
-          <a:p>
-            <a:pPr algn="l"/>
-            <a:r>
-              <a:rPr sz="1300" b="0" i="0">
-                <a:solidFill>
-                  <a:srgbClr val="2D2D2D"/>
-                </a:solidFill>
-              </a:rPr>
-              <a:t>12-18 mo</a:t>
-            </a:r>
-          </a:p>
-        </p:txBody>
-      </p:sp>
-      <p:sp>
-        <p:nvSpPr>
-          <p:cNvPr id="62" name="Rectangle 61"/>
-          <p:cNvSpPr/>
-          <p:nvPr/>
-        </p:nvSpPr>
-        <p:spPr>
-          <a:xfrm>
-            <a:off x="8412480" y="3291840"/>
-            <a:ext cx="1828800" cy="457200"/>
-          </a:xfrm>
-          <a:prstGeom prst="rect">
-            <a:avLst/>
-          </a:prstGeom>
-          <a:solidFill>
-            <a:srgbClr val="F2F4F7"/>
-          </a:solidFill>
-          <a:ln>
-            <a:noFill/>
-          </a:ln>
-        </p:spPr>
-        <p:style>
-          <a:lnRef idx="1">
-            <a:schemeClr val="accent1"/>
-          </a:lnRef>
-          <a:fillRef idx="3">
-            <a:schemeClr val="accent1"/>
-          </a:fillRef>
-          <a:effectRef idx="2">
-            <a:schemeClr val="accent1"/>
-          </a:effectRef>
-          <a:fontRef idx="minor">
-            <a:schemeClr val="lt1"/>
-          </a:fontRef>
-        </p:style>
-        <p:txBody>
-          <a:bodyPr rtlCol="0" anchor="ctr"/>
-          <a:lstStyle/>
-          <a:p>
-            <a:pPr algn="ctr"/>
-          </a:p>
-        </p:txBody>
-      </p:sp>
-      <p:sp>
-        <p:nvSpPr>
-          <p:cNvPr id="63" name="TextBox 62"/>
-          <p:cNvSpPr txBox="1"/>
-          <p:nvPr/>
-        </p:nvSpPr>
-        <p:spPr>
-          <a:xfrm>
-            <a:off x="8503920" y="3383280"/>
-            <a:ext cx="1645920" cy="274320"/>
-          </a:xfrm>
-          <a:prstGeom prst="rect">
-            <a:avLst/>
-          </a:prstGeom>
-          <a:noFill/>
-        </p:spPr>
-        <p:txBody>
-          <a:bodyPr wrap="square">
-            <a:spAutoFit/>
-          </a:bodyPr>
-          <a:lstStyle/>
-          <a:p>
-            <a:pPr algn="l"/>
-            <a:r>
-              <a:rPr sz="1300" b="0" i="0">
-                <a:solidFill>
-                  <a:srgbClr val="BF352A"/>
-                </a:solidFill>
-              </a:rPr>
-              <a:t>Out of scope</a:t>
-            </a:r>
-          </a:p>
-        </p:txBody>
-      </p:sp>
-      <p:sp>
-        <p:nvSpPr>
-          <p:cNvPr id="64" name="TextBox 63"/>
-          <p:cNvSpPr txBox="1"/>
-          <p:nvPr/>
-        </p:nvSpPr>
-        <p:spPr>
-          <a:xfrm>
-            <a:off x="731520" y="4114800"/>
-            <a:ext cx="10698480" cy="274320"/>
-          </a:xfrm>
-          <a:prstGeom prst="rect">
-            <a:avLst/>
-          </a:prstGeom>
-          <a:noFill/>
-        </p:spPr>
-        <p:txBody>
-          <a:bodyPr wrap="square">
-            <a:spAutoFit/>
-          </a:bodyPr>
-          <a:lstStyle/>
-          <a:p>
-            <a:pPr algn="l"/>
-            <a:r>
-              <a:rPr sz="1600" b="1" i="0">
-                <a:solidFill>
-                  <a:srgbClr val="1B3A6B"/>
-                </a:solidFill>
-              </a:rPr>
-              <a:t>Why not W1, W3, W4?</a:t>
-            </a:r>
-          </a:p>
-        </p:txBody>
-      </p:sp>
-      <p:sp>
-        <p:nvSpPr>
-          <p:cNvPr id="65" name="TextBox 64"/>
-          <p:cNvSpPr txBox="1"/>
-          <p:nvPr/>
-        </p:nvSpPr>
-        <p:spPr>
-          <a:xfrm>
-            <a:off x="914400" y="4480560"/>
-            <a:ext cx="10332720" cy="1371600"/>
-          </a:xfrm>
-          <a:prstGeom prst="rect">
-            <a:avLst/>
-          </a:prstGeom>
-          <a:noFill/>
-        </p:spPr>
-        <p:txBody>
-          <a:bodyPr wrap="square">
-            <a:spAutoFit/>
-          </a:bodyPr>
-          <a:lstStyle/>
-          <a:p>
-            <a:pPr/>
-            <a:r>
-              <a:rPr sz="1400">
-                <a:solidFill>
-                  <a:srgbClr val="2D2D2D"/>
-                </a:solidFill>
-              </a:rPr>
-              <a:t>W1: Dispatch console API limited - MEDIUM risk</a:t>
-            </a:r>
-          </a:p>
-          <a:p>
-            <a:pPr/>
-            <a:r>
-              <a:rPr sz="1400">
-                <a:solidFill>
-                  <a:srgbClr val="2D2D2D"/>
-                </a:solidFill>
-              </a:rPr>
-              <a:t>W4: Legacy Aurum billing has NO API, 24h lag - HIGH risk, defer to Phase 2</a:t>
-            </a:r>
-          </a:p>
-          <a:p>
-            <a:pPr/>
-            <a:r>
-              <a:rPr sz="1400">
-                <a:solidFill>
-                  <a:srgbClr val="2D2D2D"/>
-                </a:solidFill>
-              </a:rPr>
-              <a:t>W3: Route optimization complex, needs judgment - OUT OF SCOPE</a:t>
+              <a:t>Analysis Question: Which workstream offers highest volume + lowest risk + fastest ROI?</a:t>
             </a:r>
           </a:p>
         </p:txBody>
@@ -6204,7 +4535,7 @@
             <a:avLst/>
           </a:prstGeom>
           <a:solidFill>
-            <a:srgbClr val="BF352A"/>
+            <a:srgbClr val="1B3A6B"/>
           </a:solidFill>
           <a:ln>
             <a:noFill/>
@@ -6261,61 +4592,27 @@
                   <a:srgbClr val="FFFFFF"/>
                 </a:solidFill>
               </a:rPr>
-              <a:t>3 Critical Questions for Sarah</a:t>
-            </a:r>
-          </a:p>
-        </p:txBody>
-      </p:sp>
-      <p:sp>
-        <p:nvSpPr>
-          <p:cNvPr id="4" name="TextBox 3"/>
-          <p:cNvSpPr txBox="1"/>
-          <p:nvPr/>
-        </p:nvSpPr>
-        <p:spPr>
-          <a:xfrm>
-            <a:off x="457200" y="1097280"/>
-            <a:ext cx="10972800" cy="274320"/>
-          </a:xfrm>
-          <a:prstGeom prst="rect">
-            <a:avLst/>
-          </a:prstGeom>
-          <a:noFill/>
-        </p:spPr>
-        <p:txBody>
-          <a:bodyPr wrap="square">
-            <a:spAutoFit/>
-          </a:bodyPr>
-          <a:lstStyle/>
-          <a:p>
-            <a:pPr algn="ctr"/>
-            <a:r>
-              <a:rPr sz="1600" b="0" i="1">
-                <a:solidFill>
-                  <a:srgbClr val="606060"/>
-                </a:solidFill>
-              </a:rPr>
-              <a:t>Answers will change the agent design</a:t>
-            </a:r>
-          </a:p>
-        </p:txBody>
-      </p:sp>
-      <p:sp>
-        <p:nvSpPr>
-          <p:cNvPr id="5" name="Rectangle 4"/>
+              <a:t>Decision Matrix: All 4 Workstreams Compared</a:t>
+            </a:r>
+          </a:p>
+        </p:txBody>
+      </p:sp>
+      <p:sp>
+        <p:nvSpPr>
+          <p:cNvPr id="4" name="Rectangle 3"/>
           <p:cNvSpPr/>
           <p:nvPr/>
         </p:nvSpPr>
         <p:spPr>
           <a:xfrm>
-            <a:off x="457200" y="1645920"/>
-            <a:ext cx="11247120" cy="1188720"/>
+            <a:off x="457200" y="1371600"/>
+            <a:ext cx="2560320" cy="457200"/>
           </a:xfrm>
           <a:prstGeom prst="rect">
             <a:avLst/>
           </a:prstGeom>
           <a:solidFill>
-            <a:srgbClr val="FDF0D5"/>
+            <a:srgbClr val="2E5FA3"/>
           </a:solidFill>
           <a:ln>
             <a:noFill/>
@@ -6345,14 +4642,14 @@
       </p:sp>
       <p:sp>
         <p:nvSpPr>
-          <p:cNvPr id="6" name="TextBox 5"/>
+          <p:cNvPr id="5" name="TextBox 4"/>
           <p:cNvSpPr txBox="1"/>
           <p:nvPr/>
         </p:nvSpPr>
         <p:spPr>
           <a:xfrm>
-            <a:off x="640080" y="1828800"/>
-            <a:ext cx="10789920" cy="274320"/>
+            <a:off x="548640" y="1463040"/>
+            <a:ext cx="2377439" cy="274320"/>
           </a:xfrm>
           <a:prstGeom prst="rect">
             <a:avLst/>
@@ -6367,66 +4664,32 @@
           <a:p>
             <a:pPr algn="l"/>
             <a:r>
-              <a:rPr sz="1500" b="1" i="0">
-                <a:solidFill>
-                  <a:srgbClr val="CC8400"/>
-                </a:solidFill>
-              </a:rPr>
-              <a:t>Q1: Driver App API - GPS Query or Message-Only?</a:t>
-            </a:r>
-          </a:p>
-        </p:txBody>
-      </p:sp>
-      <p:sp>
-        <p:nvSpPr>
-          <p:cNvPr id="7" name="TextBox 6"/>
-          <p:cNvSpPr txBox="1"/>
-          <p:nvPr/>
-        </p:nvSpPr>
-        <p:spPr>
-          <a:xfrm>
-            <a:off x="640080" y="2194560"/>
-            <a:ext cx="10789920" cy="640080"/>
-          </a:xfrm>
-          <a:prstGeom prst="rect">
-            <a:avLst/>
-          </a:prstGeom>
-          <a:noFill/>
-        </p:spPr>
-        <p:txBody>
-          <a:bodyPr wrap="square">
-            <a:spAutoFit/>
-          </a:bodyPr>
-          <a:lstStyle/>
-          <a:p>
-            <a:pPr algn="l"/>
-            <a:r>
-              <a:rPr sz="1300" b="0" i="0">
-                <a:solidFill>
-                  <a:srgbClr val="2D2D2D"/>
-                </a:solidFill>
-              </a:rPr>
-              <a:t>Can agent query GPS directly, or must it message driver and wait 2 min? If no API, agent is lookup-only.</a:t>
-            </a:r>
-          </a:p>
-        </p:txBody>
-      </p:sp>
-      <p:sp>
-        <p:nvSpPr>
-          <p:cNvPr id="8" name="Rectangle 7"/>
+              <a:rPr sz="1400" b="1" i="0">
+                <a:solidFill>
+                  <a:srgbClr val="FFFFFF"/>
+                </a:solidFill>
+              </a:rPr>
+              <a:t>Workstream</a:t>
+            </a:r>
+          </a:p>
+        </p:txBody>
+      </p:sp>
+      <p:sp>
+        <p:nvSpPr>
+          <p:cNvPr id="6" name="Rectangle 5"/>
           <p:cNvSpPr/>
           <p:nvPr/>
         </p:nvSpPr>
         <p:spPr>
           <a:xfrm>
-            <a:off x="457200" y="3017520"/>
-            <a:ext cx="11247120" cy="1188720"/>
+            <a:off x="3017520" y="1371600"/>
+            <a:ext cx="1371600" cy="457200"/>
           </a:xfrm>
           <a:prstGeom prst="rect">
             <a:avLst/>
           </a:prstGeom>
           <a:solidFill>
-            <a:srgbClr val="FDF0D5"/>
+            <a:srgbClr val="2E5FA3"/>
           </a:solidFill>
           <a:ln>
             <a:noFill/>
@@ -6456,14 +4719,14 @@
       </p:sp>
       <p:sp>
         <p:nvSpPr>
-          <p:cNvPr id="9" name="TextBox 8"/>
+          <p:cNvPr id="7" name="TextBox 6"/>
           <p:cNvSpPr txBox="1"/>
           <p:nvPr/>
         </p:nvSpPr>
         <p:spPr>
           <a:xfrm>
-            <a:off x="640080" y="3200400"/>
-            <a:ext cx="10789920" cy="274320"/>
+            <a:off x="3108960" y="1463040"/>
+            <a:ext cx="1188720" cy="274320"/>
           </a:xfrm>
           <a:prstGeom prst="rect">
             <a:avLst/>
@@ -6478,66 +4741,32 @@
           <a:p>
             <a:pPr algn="l"/>
             <a:r>
-              <a:rPr sz="1500" b="1" i="0">
-                <a:solidFill>
-                  <a:srgbClr val="CC8400"/>
-                </a:solidFill>
-              </a:rPr>
-              <a:t>Q2: CRM Status Freshness - Real-time or Batch?</a:t>
-            </a:r>
-          </a:p>
-        </p:txBody>
-      </p:sp>
-      <p:sp>
-        <p:nvSpPr>
-          <p:cNvPr id="10" name="TextBox 9"/>
-          <p:cNvSpPr txBox="1"/>
-          <p:nvPr/>
-        </p:nvSpPr>
-        <p:spPr>
-          <a:xfrm>
-            <a:off x="640080" y="3566160"/>
-            <a:ext cx="10789920" cy="640080"/>
-          </a:xfrm>
-          <a:prstGeom prst="rect">
-            <a:avLst/>
-          </a:prstGeom>
-          <a:noFill/>
-        </p:spPr>
-        <p:txBody>
-          <a:bodyPr wrap="square">
-            <a:spAutoFit/>
-          </a:bodyPr>
-          <a:lstStyle/>
-          <a:p>
-            <a:pPr algn="l"/>
-            <a:r>
-              <a:rPr sz="1300" b="0" i="0">
-                <a:solidFill>
-                  <a:srgbClr val="2D2D2D"/>
-                </a:solidFill>
-              </a:rPr>
-              <a:t>How long after driver scan does status appear in Salesforce? If end-of-day batch, ETA logic breaks.</a:t>
-            </a:r>
-          </a:p>
-        </p:txBody>
-      </p:sp>
-      <p:sp>
-        <p:nvSpPr>
-          <p:cNvPr id="11" name="Rectangle 10"/>
+              <a:rPr sz="1400" b="1" i="0">
+                <a:solidFill>
+                  <a:srgbClr val="FFFFFF"/>
+                </a:solidFill>
+              </a:rPr>
+              <a:t>Volume</a:t>
+            </a:r>
+          </a:p>
+        </p:txBody>
+      </p:sp>
+      <p:sp>
+        <p:nvSpPr>
+          <p:cNvPr id="8" name="Rectangle 7"/>
           <p:cNvSpPr/>
           <p:nvPr/>
         </p:nvSpPr>
         <p:spPr>
           <a:xfrm>
-            <a:off x="457200" y="4389120"/>
-            <a:ext cx="11247120" cy="1188720"/>
+            <a:off x="4389120" y="1371600"/>
+            <a:ext cx="1371600" cy="457200"/>
           </a:xfrm>
           <a:prstGeom prst="rect">
             <a:avLst/>
           </a:prstGeom>
           <a:solidFill>
-            <a:srgbClr val="FDF0D5"/>
+            <a:srgbClr val="2E5FA3"/>
           </a:solidFill>
           <a:ln>
             <a:noFill/>
@@ -6567,14 +4796,14 @@
       </p:sp>
       <p:sp>
         <p:nvSpPr>
-          <p:cNvPr id="12" name="TextBox 11"/>
+          <p:cNvPr id="9" name="TextBox 8"/>
           <p:cNvSpPr txBox="1"/>
           <p:nvPr/>
         </p:nvSpPr>
         <p:spPr>
           <a:xfrm>
-            <a:off x="640080" y="4572000"/>
-            <a:ext cx="10789920" cy="274320"/>
+            <a:off x="4480559" y="1463040"/>
+            <a:ext cx="1188720" cy="274320"/>
           </a:xfrm>
           <a:prstGeom prst="rect">
             <a:avLst/>
@@ -6589,13 +4818,133 @@
           <a:p>
             <a:pPr algn="l"/>
             <a:r>
-              <a:rPr sz="1500" b="1" i="0">
-                <a:solidFill>
-                  <a:srgbClr val="CC8400"/>
-                </a:solidFill>
-              </a:rPr>
-              <a:t>Q3: Sandra Credit Audit Gap - Known Issue?</a:t>
-            </a:r>
+              <a:rPr sz="1400" b="1" i="0">
+                <a:solidFill>
+                  <a:srgbClr val="FFFFFF"/>
+                </a:solidFill>
+              </a:rPr>
+              <a:t>Savings</a:t>
+            </a:r>
+          </a:p>
+        </p:txBody>
+      </p:sp>
+      <p:sp>
+        <p:nvSpPr>
+          <p:cNvPr id="10" name="Rectangle 9"/>
+          <p:cNvSpPr/>
+          <p:nvPr/>
+        </p:nvSpPr>
+        <p:spPr>
+          <a:xfrm>
+            <a:off x="5760720" y="1371600"/>
+            <a:ext cx="1188720" cy="457200"/>
+          </a:xfrm>
+          <a:prstGeom prst="rect">
+            <a:avLst/>
+          </a:prstGeom>
+          <a:solidFill>
+            <a:srgbClr val="2E5FA3"/>
+          </a:solidFill>
+          <a:ln>
+            <a:noFill/>
+          </a:ln>
+        </p:spPr>
+        <p:style>
+          <a:lnRef idx="1">
+            <a:schemeClr val="accent1"/>
+          </a:lnRef>
+          <a:fillRef idx="3">
+            <a:schemeClr val="accent1"/>
+          </a:fillRef>
+          <a:effectRef idx="2">
+            <a:schemeClr val="accent1"/>
+          </a:effectRef>
+          <a:fontRef idx="minor">
+            <a:schemeClr val="lt1"/>
+          </a:fontRef>
+        </p:style>
+        <p:txBody>
+          <a:bodyPr rtlCol="0" anchor="ctr"/>
+          <a:lstStyle/>
+          <a:p>
+            <a:pPr algn="ctr"/>
+          </a:p>
+        </p:txBody>
+      </p:sp>
+      <p:sp>
+        <p:nvSpPr>
+          <p:cNvPr id="11" name="TextBox 10"/>
+          <p:cNvSpPr txBox="1"/>
+          <p:nvPr/>
+        </p:nvSpPr>
+        <p:spPr>
+          <a:xfrm>
+            <a:off x="5852159" y="1463040"/>
+            <a:ext cx="1005840" cy="274320"/>
+          </a:xfrm>
+          <a:prstGeom prst="rect">
+            <a:avLst/>
+          </a:prstGeom>
+          <a:noFill/>
+        </p:spPr>
+        <p:txBody>
+          <a:bodyPr wrap="square">
+            <a:spAutoFit/>
+          </a:bodyPr>
+          <a:lstStyle/>
+          <a:p>
+            <a:pPr algn="l"/>
+            <a:r>
+              <a:rPr sz="1400" b="1" i="0">
+                <a:solidFill>
+                  <a:srgbClr val="FFFFFF"/>
+                </a:solidFill>
+              </a:rPr>
+              <a:t>Risk</a:t>
+            </a:r>
+          </a:p>
+        </p:txBody>
+      </p:sp>
+      <p:sp>
+        <p:nvSpPr>
+          <p:cNvPr id="12" name="Rectangle 11"/>
+          <p:cNvSpPr/>
+          <p:nvPr/>
+        </p:nvSpPr>
+        <p:spPr>
+          <a:xfrm>
+            <a:off x="6949440" y="1371600"/>
+            <a:ext cx="1463040" cy="457200"/>
+          </a:xfrm>
+          <a:prstGeom prst="rect">
+            <a:avLst/>
+          </a:prstGeom>
+          <a:solidFill>
+            <a:srgbClr val="2E5FA3"/>
+          </a:solidFill>
+          <a:ln>
+            <a:noFill/>
+          </a:ln>
+        </p:spPr>
+        <p:style>
+          <a:lnRef idx="1">
+            <a:schemeClr val="accent1"/>
+          </a:lnRef>
+          <a:fillRef idx="3">
+            <a:schemeClr val="accent1"/>
+          </a:fillRef>
+          <a:effectRef idx="2">
+            <a:schemeClr val="accent1"/>
+          </a:effectRef>
+          <a:fontRef idx="minor">
+            <a:schemeClr val="lt1"/>
+          </a:fontRef>
+        </p:style>
+        <p:txBody>
+          <a:bodyPr rtlCol="0" anchor="ctr"/>
+          <a:lstStyle/>
+          <a:p>
+            <a:pPr algn="ctr"/>
           </a:p>
         </p:txBody>
       </p:sp>
@@ -6607,8 +4956,8 @@
         </p:nvSpPr>
         <p:spPr>
           <a:xfrm>
-            <a:off x="640080" y="4937760"/>
-            <a:ext cx="10789920" cy="640080"/>
+            <a:off x="7040879" y="1463040"/>
+            <a:ext cx="1280160" cy="274320"/>
           </a:xfrm>
           <a:prstGeom prst="rect">
             <a:avLst/>
@@ -6623,12 +4972,1971 @@
           <a:p>
             <a:pPr algn="l"/>
             <a:r>
+              <a:rPr sz="1400" b="1" i="0">
+                <a:solidFill>
+                  <a:srgbClr val="FFFFFF"/>
+                </a:solidFill>
+              </a:rPr>
+              <a:t>ROI</a:t>
+            </a:r>
+          </a:p>
+        </p:txBody>
+      </p:sp>
+      <p:sp>
+        <p:nvSpPr>
+          <p:cNvPr id="14" name="Rectangle 13"/>
+          <p:cNvSpPr/>
+          <p:nvPr/>
+        </p:nvSpPr>
+        <p:spPr>
+          <a:xfrm>
+            <a:off x="8412480" y="1371600"/>
+            <a:ext cx="1828800" cy="457200"/>
+          </a:xfrm>
+          <a:prstGeom prst="rect">
+            <a:avLst/>
+          </a:prstGeom>
+          <a:solidFill>
+            <a:srgbClr val="2E5FA3"/>
+          </a:solidFill>
+          <a:ln>
+            <a:noFill/>
+          </a:ln>
+        </p:spPr>
+        <p:style>
+          <a:lnRef idx="1">
+            <a:schemeClr val="accent1"/>
+          </a:lnRef>
+          <a:fillRef idx="3">
+            <a:schemeClr val="accent1"/>
+          </a:fillRef>
+          <a:effectRef idx="2">
+            <a:schemeClr val="accent1"/>
+          </a:effectRef>
+          <a:fontRef idx="minor">
+            <a:schemeClr val="lt1"/>
+          </a:fontRef>
+        </p:style>
+        <p:txBody>
+          <a:bodyPr rtlCol="0" anchor="ctr"/>
+          <a:lstStyle/>
+          <a:p>
+            <a:pPr algn="ctr"/>
+          </a:p>
+        </p:txBody>
+      </p:sp>
+      <p:sp>
+        <p:nvSpPr>
+          <p:cNvPr id="15" name="TextBox 14"/>
+          <p:cNvSpPr txBox="1"/>
+          <p:nvPr/>
+        </p:nvSpPr>
+        <p:spPr>
+          <a:xfrm>
+            <a:off x="8503919" y="1463040"/>
+            <a:ext cx="1645920" cy="274320"/>
+          </a:xfrm>
+          <a:prstGeom prst="rect">
+            <a:avLst/>
+          </a:prstGeom>
+          <a:noFill/>
+        </p:spPr>
+        <p:txBody>
+          <a:bodyPr wrap="square">
+            <a:spAutoFit/>
+          </a:bodyPr>
+          <a:lstStyle/>
+          <a:p>
+            <a:pPr algn="l"/>
+            <a:r>
+              <a:rPr sz="1400" b="1" i="0">
+                <a:solidFill>
+                  <a:srgbClr val="FFFFFF"/>
+                </a:solidFill>
+              </a:rPr>
+              <a:t>Decision</a:t>
+            </a:r>
+          </a:p>
+        </p:txBody>
+      </p:sp>
+      <p:sp>
+        <p:nvSpPr>
+          <p:cNvPr id="16" name="Rectangle 15"/>
+          <p:cNvSpPr/>
+          <p:nvPr/>
+        </p:nvSpPr>
+        <p:spPr>
+          <a:xfrm>
+            <a:off x="457200" y="1828800"/>
+            <a:ext cx="2560320" cy="548640"/>
+          </a:xfrm>
+          <a:prstGeom prst="rect">
+            <a:avLst/>
+          </a:prstGeom>
+          <a:solidFill>
+            <a:srgbClr val="1A7A3C"/>
+          </a:solidFill>
+          <a:ln>
+            <a:noFill/>
+          </a:ln>
+        </p:spPr>
+        <p:style>
+          <a:lnRef idx="1">
+            <a:schemeClr val="accent1"/>
+          </a:lnRef>
+          <a:fillRef idx="3">
+            <a:schemeClr val="accent1"/>
+          </a:fillRef>
+          <a:effectRef idx="2">
+            <a:schemeClr val="accent1"/>
+          </a:effectRef>
+          <a:fontRef idx="minor">
+            <a:schemeClr val="lt1"/>
+          </a:fontRef>
+        </p:style>
+        <p:txBody>
+          <a:bodyPr rtlCol="0" anchor="ctr"/>
+          <a:lstStyle/>
+          <a:p>
+            <a:pPr algn="ctr"/>
+          </a:p>
+        </p:txBody>
+      </p:sp>
+      <p:sp>
+        <p:nvSpPr>
+          <p:cNvPr id="17" name="TextBox 16"/>
+          <p:cNvSpPr txBox="1"/>
+          <p:nvPr/>
+        </p:nvSpPr>
+        <p:spPr>
+          <a:xfrm>
+            <a:off x="548640" y="1965960"/>
+            <a:ext cx="2377440" cy="274320"/>
+          </a:xfrm>
+          <a:prstGeom prst="rect">
+            <a:avLst/>
+          </a:prstGeom>
+          <a:noFill/>
+        </p:spPr>
+        <p:txBody>
+          <a:bodyPr wrap="square">
+            <a:spAutoFit/>
+          </a:bodyPr>
+          <a:lstStyle/>
+          <a:p>
+            <a:pPr algn="l"/>
+            <a:r>
+              <a:rPr sz="1400" b="1" i="0">
+                <a:solidFill>
+                  <a:srgbClr val="FFFFFF"/>
+                </a:solidFill>
+              </a:rPr>
+              <a:t>W2: ETA Inquiries</a:t>
+            </a:r>
+          </a:p>
+        </p:txBody>
+      </p:sp>
+      <p:sp>
+        <p:nvSpPr>
+          <p:cNvPr id="18" name="Rectangle 17"/>
+          <p:cNvSpPr/>
+          <p:nvPr/>
+        </p:nvSpPr>
+        <p:spPr>
+          <a:xfrm>
+            <a:off x="3017520" y="1828800"/>
+            <a:ext cx="1371600" cy="548640"/>
+          </a:xfrm>
+          <a:prstGeom prst="rect">
+            <a:avLst/>
+          </a:prstGeom>
+          <a:solidFill>
+            <a:srgbClr val="F2F4F7"/>
+          </a:solidFill>
+          <a:ln>
+            <a:noFill/>
+          </a:ln>
+        </p:spPr>
+        <p:style>
+          <a:lnRef idx="1">
+            <a:schemeClr val="accent1"/>
+          </a:lnRef>
+          <a:fillRef idx="3">
+            <a:schemeClr val="accent1"/>
+          </a:fillRef>
+          <a:effectRef idx="2">
+            <a:schemeClr val="accent1"/>
+          </a:effectRef>
+          <a:fontRef idx="minor">
+            <a:schemeClr val="lt1"/>
+          </a:fontRef>
+        </p:style>
+        <p:txBody>
+          <a:bodyPr rtlCol="0" anchor="ctr"/>
+          <a:lstStyle/>
+          <a:p>
+            <a:pPr algn="ctr"/>
+          </a:p>
+        </p:txBody>
+      </p:sp>
+      <p:sp>
+        <p:nvSpPr>
+          <p:cNvPr id="19" name="TextBox 18"/>
+          <p:cNvSpPr txBox="1"/>
+          <p:nvPr/>
+        </p:nvSpPr>
+        <p:spPr>
+          <a:xfrm>
+            <a:off x="3108960" y="1965960"/>
+            <a:ext cx="1188720" cy="274320"/>
+          </a:xfrm>
+          <a:prstGeom prst="rect">
+            <a:avLst/>
+          </a:prstGeom>
+          <a:noFill/>
+        </p:spPr>
+        <p:txBody>
+          <a:bodyPr wrap="square">
+            <a:spAutoFit/>
+          </a:bodyPr>
+          <a:lstStyle/>
+          <a:p>
+            <a:pPr algn="l"/>
+            <a:r>
+              <a:rPr sz="1400" b="0" i="0">
+                <a:solidFill>
+                  <a:srgbClr val="2D2D2D"/>
+                </a:solidFill>
+              </a:rPr>
+              <a:t>400/day</a:t>
+            </a:r>
+          </a:p>
+        </p:txBody>
+      </p:sp>
+      <p:sp>
+        <p:nvSpPr>
+          <p:cNvPr id="20" name="Rectangle 19"/>
+          <p:cNvSpPr/>
+          <p:nvPr/>
+        </p:nvSpPr>
+        <p:spPr>
+          <a:xfrm>
+            <a:off x="4389120" y="1828800"/>
+            <a:ext cx="1371600" cy="548640"/>
+          </a:xfrm>
+          <a:prstGeom prst="rect">
+            <a:avLst/>
+          </a:prstGeom>
+          <a:solidFill>
+            <a:srgbClr val="F2F4F7"/>
+          </a:solidFill>
+          <a:ln>
+            <a:noFill/>
+          </a:ln>
+        </p:spPr>
+        <p:style>
+          <a:lnRef idx="1">
+            <a:schemeClr val="accent1"/>
+          </a:lnRef>
+          <a:fillRef idx="3">
+            <a:schemeClr val="accent1"/>
+          </a:fillRef>
+          <a:effectRef idx="2">
+            <a:schemeClr val="accent1"/>
+          </a:effectRef>
+          <a:fontRef idx="minor">
+            <a:schemeClr val="lt1"/>
+          </a:fontRef>
+        </p:style>
+        <p:txBody>
+          <a:bodyPr rtlCol="0" anchor="ctr"/>
+          <a:lstStyle/>
+          <a:p>
+            <a:pPr algn="ctr"/>
+          </a:p>
+        </p:txBody>
+      </p:sp>
+      <p:sp>
+        <p:nvSpPr>
+          <p:cNvPr id="21" name="TextBox 20"/>
+          <p:cNvSpPr txBox="1"/>
+          <p:nvPr/>
+        </p:nvSpPr>
+        <p:spPr>
+          <a:xfrm>
+            <a:off x="4480560" y="1965960"/>
+            <a:ext cx="1188720" cy="274320"/>
+          </a:xfrm>
+          <a:prstGeom prst="rect">
+            <a:avLst/>
+          </a:prstGeom>
+          <a:noFill/>
+        </p:spPr>
+        <p:txBody>
+          <a:bodyPr wrap="square">
+            <a:spAutoFit/>
+          </a:bodyPr>
+          <a:lstStyle/>
+          <a:p>
+            <a:pPr algn="l"/>
+            <a:r>
+              <a:rPr sz="1400" b="0" i="0">
+                <a:solidFill>
+                  <a:srgbClr val="2D2D2D"/>
+                </a:solidFill>
+              </a:rPr>
+              <a:t>2.8 FTE</a:t>
+            </a:r>
+          </a:p>
+        </p:txBody>
+      </p:sp>
+      <p:sp>
+        <p:nvSpPr>
+          <p:cNvPr id="22" name="Rectangle 21"/>
+          <p:cNvSpPr/>
+          <p:nvPr/>
+        </p:nvSpPr>
+        <p:spPr>
+          <a:xfrm>
+            <a:off x="5760720" y="1828800"/>
+            <a:ext cx="1188720" cy="548640"/>
+          </a:xfrm>
+          <a:prstGeom prst="rect">
+            <a:avLst/>
+          </a:prstGeom>
+          <a:solidFill>
+            <a:srgbClr val="F2F4F7"/>
+          </a:solidFill>
+          <a:ln>
+            <a:noFill/>
+          </a:ln>
+        </p:spPr>
+        <p:style>
+          <a:lnRef idx="1">
+            <a:schemeClr val="accent1"/>
+          </a:lnRef>
+          <a:fillRef idx="3">
+            <a:schemeClr val="accent1"/>
+          </a:fillRef>
+          <a:effectRef idx="2">
+            <a:schemeClr val="accent1"/>
+          </a:effectRef>
+          <a:fontRef idx="minor">
+            <a:schemeClr val="lt1"/>
+          </a:fontRef>
+        </p:style>
+        <p:txBody>
+          <a:bodyPr rtlCol="0" anchor="ctr"/>
+          <a:lstStyle/>
+          <a:p>
+            <a:pPr algn="ctr"/>
+          </a:p>
+        </p:txBody>
+      </p:sp>
+      <p:sp>
+        <p:nvSpPr>
+          <p:cNvPr id="23" name="TextBox 22"/>
+          <p:cNvSpPr txBox="1"/>
+          <p:nvPr/>
+        </p:nvSpPr>
+        <p:spPr>
+          <a:xfrm>
+            <a:off x="5852160" y="1965960"/>
+            <a:ext cx="1005840" cy="274320"/>
+          </a:xfrm>
+          <a:prstGeom prst="rect">
+            <a:avLst/>
+          </a:prstGeom>
+          <a:noFill/>
+        </p:spPr>
+        <p:txBody>
+          <a:bodyPr wrap="square">
+            <a:spAutoFit/>
+          </a:bodyPr>
+          <a:lstStyle/>
+          <a:p>
+            <a:pPr algn="l"/>
+            <a:r>
+              <a:rPr sz="1400" b="1" i="0">
+                <a:solidFill>
+                  <a:srgbClr val="1A7A3C"/>
+                </a:solidFill>
+              </a:rPr>
+              <a:t>LOW</a:t>
+            </a:r>
+          </a:p>
+        </p:txBody>
+      </p:sp>
+      <p:sp>
+        <p:nvSpPr>
+          <p:cNvPr id="24" name="Rectangle 23"/>
+          <p:cNvSpPr/>
+          <p:nvPr/>
+        </p:nvSpPr>
+        <p:spPr>
+          <a:xfrm>
+            <a:off x="6949440" y="1828800"/>
+            <a:ext cx="1463040" cy="548640"/>
+          </a:xfrm>
+          <a:prstGeom prst="rect">
+            <a:avLst/>
+          </a:prstGeom>
+          <a:solidFill>
+            <a:srgbClr val="F2F4F7"/>
+          </a:solidFill>
+          <a:ln>
+            <a:noFill/>
+          </a:ln>
+        </p:spPr>
+        <p:style>
+          <a:lnRef idx="1">
+            <a:schemeClr val="accent1"/>
+          </a:lnRef>
+          <a:fillRef idx="3">
+            <a:schemeClr val="accent1"/>
+          </a:fillRef>
+          <a:effectRef idx="2">
+            <a:schemeClr val="accent1"/>
+          </a:effectRef>
+          <a:fontRef idx="minor">
+            <a:schemeClr val="lt1"/>
+          </a:fontRef>
+        </p:style>
+        <p:txBody>
+          <a:bodyPr rtlCol="0" anchor="ctr"/>
+          <a:lstStyle/>
+          <a:p>
+            <a:pPr algn="ctr"/>
+          </a:p>
+        </p:txBody>
+      </p:sp>
+      <p:sp>
+        <p:nvSpPr>
+          <p:cNvPr id="25" name="TextBox 24"/>
+          <p:cNvSpPr txBox="1"/>
+          <p:nvPr/>
+        </p:nvSpPr>
+        <p:spPr>
+          <a:xfrm>
+            <a:off x="7040880" y="1965960"/>
+            <a:ext cx="1280160" cy="274320"/>
+          </a:xfrm>
+          <a:prstGeom prst="rect">
+            <a:avLst/>
+          </a:prstGeom>
+          <a:noFill/>
+        </p:spPr>
+        <p:txBody>
+          <a:bodyPr wrap="square">
+            <a:spAutoFit/>
+          </a:bodyPr>
+          <a:lstStyle/>
+          <a:p>
+            <a:pPr algn="l"/>
+            <a:r>
+              <a:rPr sz="1400" b="1" i="0">
+                <a:solidFill>
+                  <a:srgbClr val="1A7A3C"/>
+                </a:solidFill>
+              </a:rPr>
+              <a:t>1-2 mo</a:t>
+            </a:r>
+          </a:p>
+        </p:txBody>
+      </p:sp>
+      <p:sp>
+        <p:nvSpPr>
+          <p:cNvPr id="26" name="Rectangle 25"/>
+          <p:cNvSpPr/>
+          <p:nvPr/>
+        </p:nvSpPr>
+        <p:spPr>
+          <a:xfrm>
+            <a:off x="8412480" y="1828800"/>
+            <a:ext cx="1828800" cy="548640"/>
+          </a:xfrm>
+          <a:prstGeom prst="rect">
+            <a:avLst/>
+          </a:prstGeom>
+          <a:solidFill>
+            <a:srgbClr val="1A7A3C"/>
+          </a:solidFill>
+          <a:ln>
+            <a:noFill/>
+          </a:ln>
+        </p:spPr>
+        <p:style>
+          <a:lnRef idx="1">
+            <a:schemeClr val="accent1"/>
+          </a:lnRef>
+          <a:fillRef idx="3">
+            <a:schemeClr val="accent1"/>
+          </a:fillRef>
+          <a:effectRef idx="2">
+            <a:schemeClr val="accent1"/>
+          </a:effectRef>
+          <a:fontRef idx="minor">
+            <a:schemeClr val="lt1"/>
+          </a:fontRef>
+        </p:style>
+        <p:txBody>
+          <a:bodyPr rtlCol="0" anchor="ctr"/>
+          <a:lstStyle/>
+          <a:p>
+            <a:pPr algn="ctr"/>
+          </a:p>
+        </p:txBody>
+      </p:sp>
+      <p:sp>
+        <p:nvSpPr>
+          <p:cNvPr id="27" name="TextBox 26"/>
+          <p:cNvSpPr txBox="1"/>
+          <p:nvPr/>
+        </p:nvSpPr>
+        <p:spPr>
+          <a:xfrm>
+            <a:off x="8503920" y="1965960"/>
+            <a:ext cx="1645920" cy="274320"/>
+          </a:xfrm>
+          <a:prstGeom prst="rect">
+            <a:avLst/>
+          </a:prstGeom>
+          <a:noFill/>
+        </p:spPr>
+        <p:txBody>
+          <a:bodyPr wrap="square">
+            <a:spAutoFit/>
+          </a:bodyPr>
+          <a:lstStyle/>
+          <a:p>
+            <a:pPr algn="l"/>
+            <a:r>
+              <a:rPr sz="1400" b="1" i="0">
+                <a:solidFill>
+                  <a:srgbClr val="FFFFFF"/>
+                </a:solidFill>
+              </a:rPr>
+              <a:t>PHASE 1</a:t>
+            </a:r>
+          </a:p>
+        </p:txBody>
+      </p:sp>
+      <p:sp>
+        <p:nvSpPr>
+          <p:cNvPr id="28" name="Rectangle 27"/>
+          <p:cNvSpPr/>
+          <p:nvPr/>
+        </p:nvSpPr>
+        <p:spPr>
+          <a:xfrm>
+            <a:off x="457200" y="2377440"/>
+            <a:ext cx="2560320" cy="457200"/>
+          </a:xfrm>
+          <a:prstGeom prst="rect">
+            <a:avLst/>
+          </a:prstGeom>
+          <a:solidFill>
+            <a:srgbClr val="F2F4F7"/>
+          </a:solidFill>
+          <a:ln>
+            <a:noFill/>
+          </a:ln>
+        </p:spPr>
+        <p:style>
+          <a:lnRef idx="1">
+            <a:schemeClr val="accent1"/>
+          </a:lnRef>
+          <a:fillRef idx="3">
+            <a:schemeClr val="accent1"/>
+          </a:fillRef>
+          <a:effectRef idx="2">
+            <a:schemeClr val="accent1"/>
+          </a:effectRef>
+          <a:fontRef idx="minor">
+            <a:schemeClr val="lt1"/>
+          </a:fontRef>
+        </p:style>
+        <p:txBody>
+          <a:bodyPr rtlCol="0" anchor="ctr"/>
+          <a:lstStyle/>
+          <a:p>
+            <a:pPr algn="ctr"/>
+          </a:p>
+        </p:txBody>
+      </p:sp>
+      <p:sp>
+        <p:nvSpPr>
+          <p:cNvPr id="29" name="TextBox 28"/>
+          <p:cNvSpPr txBox="1"/>
+          <p:nvPr/>
+        </p:nvSpPr>
+        <p:spPr>
+          <a:xfrm>
+            <a:off x="548640" y="2468880"/>
+            <a:ext cx="2377440" cy="274320"/>
+          </a:xfrm>
+          <a:prstGeom prst="rect">
+            <a:avLst/>
+          </a:prstGeom>
+          <a:noFill/>
+        </p:spPr>
+        <p:txBody>
+          <a:bodyPr wrap="square">
+            <a:spAutoFit/>
+          </a:bodyPr>
+          <a:lstStyle/>
+          <a:p>
+            <a:pPr algn="l"/>
+            <a:r>
               <a:rPr sz="1300" b="0" i="0">
                 <a:solidFill>
                   <a:srgbClr val="2D2D2D"/>
                 </a:solidFill>
               </a:rPr>
-              <a:t>£170 credit has no audit log. If exports are incomplete, Phase 2 billing agent will fail. Compliance risk.</a:t>
+              <a:t>W1: Exceptions</a:t>
+            </a:r>
+          </a:p>
+        </p:txBody>
+      </p:sp>
+      <p:sp>
+        <p:nvSpPr>
+          <p:cNvPr id="30" name="Rectangle 29"/>
+          <p:cNvSpPr/>
+          <p:nvPr/>
+        </p:nvSpPr>
+        <p:spPr>
+          <a:xfrm>
+            <a:off x="3017520" y="2377440"/>
+            <a:ext cx="1371600" cy="457200"/>
+          </a:xfrm>
+          <a:prstGeom prst="rect">
+            <a:avLst/>
+          </a:prstGeom>
+          <a:solidFill>
+            <a:srgbClr val="F2F4F7"/>
+          </a:solidFill>
+          <a:ln>
+            <a:noFill/>
+          </a:ln>
+        </p:spPr>
+        <p:style>
+          <a:lnRef idx="1">
+            <a:schemeClr val="accent1"/>
+          </a:lnRef>
+          <a:fillRef idx="3">
+            <a:schemeClr val="accent1"/>
+          </a:fillRef>
+          <a:effectRef idx="2">
+            <a:schemeClr val="accent1"/>
+          </a:effectRef>
+          <a:fontRef idx="minor">
+            <a:schemeClr val="lt1"/>
+          </a:fontRef>
+        </p:style>
+        <p:txBody>
+          <a:bodyPr rtlCol="0" anchor="ctr"/>
+          <a:lstStyle/>
+          <a:p>
+            <a:pPr algn="ctr"/>
+          </a:p>
+        </p:txBody>
+      </p:sp>
+      <p:sp>
+        <p:nvSpPr>
+          <p:cNvPr id="31" name="TextBox 30"/>
+          <p:cNvSpPr txBox="1"/>
+          <p:nvPr/>
+        </p:nvSpPr>
+        <p:spPr>
+          <a:xfrm>
+            <a:off x="3108960" y="2468880"/>
+            <a:ext cx="1188720" cy="274320"/>
+          </a:xfrm>
+          <a:prstGeom prst="rect">
+            <a:avLst/>
+          </a:prstGeom>
+          <a:noFill/>
+        </p:spPr>
+        <p:txBody>
+          <a:bodyPr wrap="square">
+            <a:spAutoFit/>
+          </a:bodyPr>
+          <a:lstStyle/>
+          <a:p>
+            <a:pPr algn="l"/>
+            <a:r>
+              <a:rPr sz="1300" b="0" i="0">
+                <a:solidFill>
+                  <a:srgbClr val="2D2D2D"/>
+                </a:solidFill>
+              </a:rPr>
+              <a:t>180/day</a:t>
+            </a:r>
+          </a:p>
+        </p:txBody>
+      </p:sp>
+      <p:sp>
+        <p:nvSpPr>
+          <p:cNvPr id="32" name="Rectangle 31"/>
+          <p:cNvSpPr/>
+          <p:nvPr/>
+        </p:nvSpPr>
+        <p:spPr>
+          <a:xfrm>
+            <a:off x="4389120" y="2377440"/>
+            <a:ext cx="1371600" cy="457200"/>
+          </a:xfrm>
+          <a:prstGeom prst="rect">
+            <a:avLst/>
+          </a:prstGeom>
+          <a:solidFill>
+            <a:srgbClr val="F2F4F7"/>
+          </a:solidFill>
+          <a:ln>
+            <a:noFill/>
+          </a:ln>
+        </p:spPr>
+        <p:style>
+          <a:lnRef idx="1">
+            <a:schemeClr val="accent1"/>
+          </a:lnRef>
+          <a:fillRef idx="3">
+            <a:schemeClr val="accent1"/>
+          </a:fillRef>
+          <a:effectRef idx="2">
+            <a:schemeClr val="accent1"/>
+          </a:effectRef>
+          <a:fontRef idx="minor">
+            <a:schemeClr val="lt1"/>
+          </a:fontRef>
+        </p:style>
+        <p:txBody>
+          <a:bodyPr rtlCol="0" anchor="ctr"/>
+          <a:lstStyle/>
+          <a:p>
+            <a:pPr algn="ctr"/>
+          </a:p>
+        </p:txBody>
+      </p:sp>
+      <p:sp>
+        <p:nvSpPr>
+          <p:cNvPr id="33" name="TextBox 32"/>
+          <p:cNvSpPr txBox="1"/>
+          <p:nvPr/>
+        </p:nvSpPr>
+        <p:spPr>
+          <a:xfrm>
+            <a:off x="4480560" y="2468880"/>
+            <a:ext cx="1188720" cy="274320"/>
+          </a:xfrm>
+          <a:prstGeom prst="rect">
+            <a:avLst/>
+          </a:prstGeom>
+          <a:noFill/>
+        </p:spPr>
+        <p:txBody>
+          <a:bodyPr wrap="square">
+            <a:spAutoFit/>
+          </a:bodyPr>
+          <a:lstStyle/>
+          <a:p>
+            <a:pPr algn="l"/>
+            <a:r>
+              <a:rPr sz="1300" b="0" i="0">
+                <a:solidFill>
+                  <a:srgbClr val="2D2D2D"/>
+                </a:solidFill>
+              </a:rPr>
+              <a:t>2.0 FTE</a:t>
+            </a:r>
+          </a:p>
+        </p:txBody>
+      </p:sp>
+      <p:sp>
+        <p:nvSpPr>
+          <p:cNvPr id="34" name="Rectangle 33"/>
+          <p:cNvSpPr/>
+          <p:nvPr/>
+        </p:nvSpPr>
+        <p:spPr>
+          <a:xfrm>
+            <a:off x="5760720" y="2377440"/>
+            <a:ext cx="1188720" cy="457200"/>
+          </a:xfrm>
+          <a:prstGeom prst="rect">
+            <a:avLst/>
+          </a:prstGeom>
+          <a:solidFill>
+            <a:srgbClr val="F2F4F7"/>
+          </a:solidFill>
+          <a:ln>
+            <a:noFill/>
+          </a:ln>
+        </p:spPr>
+        <p:style>
+          <a:lnRef idx="1">
+            <a:schemeClr val="accent1"/>
+          </a:lnRef>
+          <a:fillRef idx="3">
+            <a:schemeClr val="accent1"/>
+          </a:fillRef>
+          <a:effectRef idx="2">
+            <a:schemeClr val="accent1"/>
+          </a:effectRef>
+          <a:fontRef idx="minor">
+            <a:schemeClr val="lt1"/>
+          </a:fontRef>
+        </p:style>
+        <p:txBody>
+          <a:bodyPr rtlCol="0" anchor="ctr"/>
+          <a:lstStyle/>
+          <a:p>
+            <a:pPr algn="ctr"/>
+          </a:p>
+        </p:txBody>
+      </p:sp>
+      <p:sp>
+        <p:nvSpPr>
+          <p:cNvPr id="35" name="TextBox 34"/>
+          <p:cNvSpPr txBox="1"/>
+          <p:nvPr/>
+        </p:nvSpPr>
+        <p:spPr>
+          <a:xfrm>
+            <a:off x="5852160" y="2468880"/>
+            <a:ext cx="1005840" cy="274320"/>
+          </a:xfrm>
+          <a:prstGeom prst="rect">
+            <a:avLst/>
+          </a:prstGeom>
+          <a:noFill/>
+        </p:spPr>
+        <p:txBody>
+          <a:bodyPr wrap="square">
+            <a:spAutoFit/>
+          </a:bodyPr>
+          <a:lstStyle/>
+          <a:p>
+            <a:pPr algn="l"/>
+            <a:r>
+              <a:rPr sz="1300" b="0" i="0">
+                <a:solidFill>
+                  <a:srgbClr val="CC8400"/>
+                </a:solidFill>
+              </a:rPr>
+              <a:t>MED</a:t>
+            </a:r>
+          </a:p>
+        </p:txBody>
+      </p:sp>
+      <p:sp>
+        <p:nvSpPr>
+          <p:cNvPr id="36" name="Rectangle 35"/>
+          <p:cNvSpPr/>
+          <p:nvPr/>
+        </p:nvSpPr>
+        <p:spPr>
+          <a:xfrm>
+            <a:off x="6949440" y="2377440"/>
+            <a:ext cx="1463040" cy="457200"/>
+          </a:xfrm>
+          <a:prstGeom prst="rect">
+            <a:avLst/>
+          </a:prstGeom>
+          <a:solidFill>
+            <a:srgbClr val="F2F4F7"/>
+          </a:solidFill>
+          <a:ln>
+            <a:noFill/>
+          </a:ln>
+        </p:spPr>
+        <p:style>
+          <a:lnRef idx="1">
+            <a:schemeClr val="accent1"/>
+          </a:lnRef>
+          <a:fillRef idx="3">
+            <a:schemeClr val="accent1"/>
+          </a:fillRef>
+          <a:effectRef idx="2">
+            <a:schemeClr val="accent1"/>
+          </a:effectRef>
+          <a:fontRef idx="minor">
+            <a:schemeClr val="lt1"/>
+          </a:fontRef>
+        </p:style>
+        <p:txBody>
+          <a:bodyPr rtlCol="0" anchor="ctr"/>
+          <a:lstStyle/>
+          <a:p>
+            <a:pPr algn="ctr"/>
+          </a:p>
+        </p:txBody>
+      </p:sp>
+      <p:sp>
+        <p:nvSpPr>
+          <p:cNvPr id="37" name="TextBox 36"/>
+          <p:cNvSpPr txBox="1"/>
+          <p:nvPr/>
+        </p:nvSpPr>
+        <p:spPr>
+          <a:xfrm>
+            <a:off x="7040880" y="2468880"/>
+            <a:ext cx="1280160" cy="274320"/>
+          </a:xfrm>
+          <a:prstGeom prst="rect">
+            <a:avLst/>
+          </a:prstGeom>
+          <a:noFill/>
+        </p:spPr>
+        <p:txBody>
+          <a:bodyPr wrap="square">
+            <a:spAutoFit/>
+          </a:bodyPr>
+          <a:lstStyle/>
+          <a:p>
+            <a:pPr algn="l"/>
+            <a:r>
+              <a:rPr sz="1300" b="0" i="0">
+                <a:solidFill>
+                  <a:srgbClr val="2D2D2D"/>
+                </a:solidFill>
+              </a:rPr>
+              <a:t>6-12 mo</a:t>
+            </a:r>
+          </a:p>
+        </p:txBody>
+      </p:sp>
+      <p:sp>
+        <p:nvSpPr>
+          <p:cNvPr id="38" name="Rectangle 37"/>
+          <p:cNvSpPr/>
+          <p:nvPr/>
+        </p:nvSpPr>
+        <p:spPr>
+          <a:xfrm>
+            <a:off x="8412480" y="2377440"/>
+            <a:ext cx="1828800" cy="457200"/>
+          </a:xfrm>
+          <a:prstGeom prst="rect">
+            <a:avLst/>
+          </a:prstGeom>
+          <a:solidFill>
+            <a:srgbClr val="F2F4F7"/>
+          </a:solidFill>
+          <a:ln>
+            <a:noFill/>
+          </a:ln>
+        </p:spPr>
+        <p:style>
+          <a:lnRef idx="1">
+            <a:schemeClr val="accent1"/>
+          </a:lnRef>
+          <a:fillRef idx="3">
+            <a:schemeClr val="accent1"/>
+          </a:fillRef>
+          <a:effectRef idx="2">
+            <a:schemeClr val="accent1"/>
+          </a:effectRef>
+          <a:fontRef idx="minor">
+            <a:schemeClr val="lt1"/>
+          </a:fontRef>
+        </p:style>
+        <p:txBody>
+          <a:bodyPr rtlCol="0" anchor="ctr"/>
+          <a:lstStyle/>
+          <a:p>
+            <a:pPr algn="ctr"/>
+          </a:p>
+        </p:txBody>
+      </p:sp>
+      <p:sp>
+        <p:nvSpPr>
+          <p:cNvPr id="39" name="TextBox 38"/>
+          <p:cNvSpPr txBox="1"/>
+          <p:nvPr/>
+        </p:nvSpPr>
+        <p:spPr>
+          <a:xfrm>
+            <a:off x="8503920" y="2468880"/>
+            <a:ext cx="1645920" cy="274320"/>
+          </a:xfrm>
+          <a:prstGeom prst="rect">
+            <a:avLst/>
+          </a:prstGeom>
+          <a:noFill/>
+        </p:spPr>
+        <p:txBody>
+          <a:bodyPr wrap="square">
+            <a:spAutoFit/>
+          </a:bodyPr>
+          <a:lstStyle/>
+          <a:p>
+            <a:pPr algn="l"/>
+            <a:r>
+              <a:rPr sz="1300" b="0" i="0">
+                <a:solidFill>
+                  <a:srgbClr val="606060"/>
+                </a:solidFill>
+              </a:rPr>
+              <a:t>Defer</a:t>
+            </a:r>
+          </a:p>
+        </p:txBody>
+      </p:sp>
+      <p:sp>
+        <p:nvSpPr>
+          <p:cNvPr id="40" name="Rectangle 39"/>
+          <p:cNvSpPr/>
+          <p:nvPr/>
+        </p:nvSpPr>
+        <p:spPr>
+          <a:xfrm>
+            <a:off x="457200" y="2834640"/>
+            <a:ext cx="2560320" cy="457200"/>
+          </a:xfrm>
+          <a:prstGeom prst="rect">
+            <a:avLst/>
+          </a:prstGeom>
+          <a:solidFill>
+            <a:srgbClr val="F2F4F7"/>
+          </a:solidFill>
+          <a:ln>
+            <a:noFill/>
+          </a:ln>
+        </p:spPr>
+        <p:style>
+          <a:lnRef idx="1">
+            <a:schemeClr val="accent1"/>
+          </a:lnRef>
+          <a:fillRef idx="3">
+            <a:schemeClr val="accent1"/>
+          </a:fillRef>
+          <a:effectRef idx="2">
+            <a:schemeClr val="accent1"/>
+          </a:effectRef>
+          <a:fontRef idx="minor">
+            <a:schemeClr val="lt1"/>
+          </a:fontRef>
+        </p:style>
+        <p:txBody>
+          <a:bodyPr rtlCol="0" anchor="ctr"/>
+          <a:lstStyle/>
+          <a:p>
+            <a:pPr algn="ctr"/>
+          </a:p>
+        </p:txBody>
+      </p:sp>
+      <p:sp>
+        <p:nvSpPr>
+          <p:cNvPr id="41" name="TextBox 40"/>
+          <p:cNvSpPr txBox="1"/>
+          <p:nvPr/>
+        </p:nvSpPr>
+        <p:spPr>
+          <a:xfrm>
+            <a:off x="548640" y="2926080"/>
+            <a:ext cx="2377440" cy="274320"/>
+          </a:xfrm>
+          <a:prstGeom prst="rect">
+            <a:avLst/>
+          </a:prstGeom>
+          <a:noFill/>
+        </p:spPr>
+        <p:txBody>
+          <a:bodyPr wrap="square">
+            <a:spAutoFit/>
+          </a:bodyPr>
+          <a:lstStyle/>
+          <a:p>
+            <a:pPr algn="l"/>
+            <a:r>
+              <a:rPr sz="1300" b="0" i="0">
+                <a:solidFill>
+                  <a:srgbClr val="2D2D2D"/>
+                </a:solidFill>
+              </a:rPr>
+              <a:t>W4: Billing</a:t>
+            </a:r>
+          </a:p>
+        </p:txBody>
+      </p:sp>
+      <p:sp>
+        <p:nvSpPr>
+          <p:cNvPr id="42" name="Rectangle 41"/>
+          <p:cNvSpPr/>
+          <p:nvPr/>
+        </p:nvSpPr>
+        <p:spPr>
+          <a:xfrm>
+            <a:off x="3017520" y="2834640"/>
+            <a:ext cx="1371600" cy="457200"/>
+          </a:xfrm>
+          <a:prstGeom prst="rect">
+            <a:avLst/>
+          </a:prstGeom>
+          <a:solidFill>
+            <a:srgbClr val="F2F4F7"/>
+          </a:solidFill>
+          <a:ln>
+            <a:noFill/>
+          </a:ln>
+        </p:spPr>
+        <p:style>
+          <a:lnRef idx="1">
+            <a:schemeClr val="accent1"/>
+          </a:lnRef>
+          <a:fillRef idx="3">
+            <a:schemeClr val="accent1"/>
+          </a:fillRef>
+          <a:effectRef idx="2">
+            <a:schemeClr val="accent1"/>
+          </a:effectRef>
+          <a:fontRef idx="minor">
+            <a:schemeClr val="lt1"/>
+          </a:fontRef>
+        </p:style>
+        <p:txBody>
+          <a:bodyPr rtlCol="0" anchor="ctr"/>
+          <a:lstStyle/>
+          <a:p>
+            <a:pPr algn="ctr"/>
+          </a:p>
+        </p:txBody>
+      </p:sp>
+      <p:sp>
+        <p:nvSpPr>
+          <p:cNvPr id="43" name="TextBox 42"/>
+          <p:cNvSpPr txBox="1"/>
+          <p:nvPr/>
+        </p:nvSpPr>
+        <p:spPr>
+          <a:xfrm>
+            <a:off x="3108960" y="2926080"/>
+            <a:ext cx="1188720" cy="274320"/>
+          </a:xfrm>
+          <a:prstGeom prst="rect">
+            <a:avLst/>
+          </a:prstGeom>
+          <a:noFill/>
+        </p:spPr>
+        <p:txBody>
+          <a:bodyPr wrap="square">
+            <a:spAutoFit/>
+          </a:bodyPr>
+          <a:lstStyle/>
+          <a:p>
+            <a:pPr algn="l"/>
+            <a:r>
+              <a:rPr sz="1300" b="0" i="0">
+                <a:solidFill>
+                  <a:srgbClr val="2D2D2D"/>
+                </a:solidFill>
+              </a:rPr>
+              <a:t>60/day</a:t>
+            </a:r>
+          </a:p>
+        </p:txBody>
+      </p:sp>
+      <p:sp>
+        <p:nvSpPr>
+          <p:cNvPr id="44" name="Rectangle 43"/>
+          <p:cNvSpPr/>
+          <p:nvPr/>
+        </p:nvSpPr>
+        <p:spPr>
+          <a:xfrm>
+            <a:off x="4389120" y="2834640"/>
+            <a:ext cx="1371600" cy="457200"/>
+          </a:xfrm>
+          <a:prstGeom prst="rect">
+            <a:avLst/>
+          </a:prstGeom>
+          <a:solidFill>
+            <a:srgbClr val="F2F4F7"/>
+          </a:solidFill>
+          <a:ln>
+            <a:noFill/>
+          </a:ln>
+        </p:spPr>
+        <p:style>
+          <a:lnRef idx="1">
+            <a:schemeClr val="accent1"/>
+          </a:lnRef>
+          <a:fillRef idx="3">
+            <a:schemeClr val="accent1"/>
+          </a:fillRef>
+          <a:effectRef idx="2">
+            <a:schemeClr val="accent1"/>
+          </a:effectRef>
+          <a:fontRef idx="minor">
+            <a:schemeClr val="lt1"/>
+          </a:fontRef>
+        </p:style>
+        <p:txBody>
+          <a:bodyPr rtlCol="0" anchor="ctr"/>
+          <a:lstStyle/>
+          <a:p>
+            <a:pPr algn="ctr"/>
+          </a:p>
+        </p:txBody>
+      </p:sp>
+      <p:sp>
+        <p:nvSpPr>
+          <p:cNvPr id="45" name="TextBox 44"/>
+          <p:cNvSpPr txBox="1"/>
+          <p:nvPr/>
+        </p:nvSpPr>
+        <p:spPr>
+          <a:xfrm>
+            <a:off x="4480560" y="2926080"/>
+            <a:ext cx="1188720" cy="274320"/>
+          </a:xfrm>
+          <a:prstGeom prst="rect">
+            <a:avLst/>
+          </a:prstGeom>
+          <a:noFill/>
+        </p:spPr>
+        <p:txBody>
+          <a:bodyPr wrap="square">
+            <a:spAutoFit/>
+          </a:bodyPr>
+          <a:lstStyle/>
+          <a:p>
+            <a:pPr algn="l"/>
+            <a:r>
+              <a:rPr sz="1300" b="0" i="0">
+                <a:solidFill>
+                  <a:srgbClr val="2D2D2D"/>
+                </a:solidFill>
+              </a:rPr>
+              <a:t>1.5 FTE</a:t>
+            </a:r>
+          </a:p>
+        </p:txBody>
+      </p:sp>
+      <p:sp>
+        <p:nvSpPr>
+          <p:cNvPr id="46" name="Rectangle 45"/>
+          <p:cNvSpPr/>
+          <p:nvPr/>
+        </p:nvSpPr>
+        <p:spPr>
+          <a:xfrm>
+            <a:off x="5760720" y="2834640"/>
+            <a:ext cx="1188720" cy="457200"/>
+          </a:xfrm>
+          <a:prstGeom prst="rect">
+            <a:avLst/>
+          </a:prstGeom>
+          <a:solidFill>
+            <a:srgbClr val="F2F4F7"/>
+          </a:solidFill>
+          <a:ln>
+            <a:noFill/>
+          </a:ln>
+        </p:spPr>
+        <p:style>
+          <a:lnRef idx="1">
+            <a:schemeClr val="accent1"/>
+          </a:lnRef>
+          <a:fillRef idx="3">
+            <a:schemeClr val="accent1"/>
+          </a:fillRef>
+          <a:effectRef idx="2">
+            <a:schemeClr val="accent1"/>
+          </a:effectRef>
+          <a:fontRef idx="minor">
+            <a:schemeClr val="lt1"/>
+          </a:fontRef>
+        </p:style>
+        <p:txBody>
+          <a:bodyPr rtlCol="0" anchor="ctr"/>
+          <a:lstStyle/>
+          <a:p>
+            <a:pPr algn="ctr"/>
+          </a:p>
+        </p:txBody>
+      </p:sp>
+      <p:sp>
+        <p:nvSpPr>
+          <p:cNvPr id="47" name="TextBox 46"/>
+          <p:cNvSpPr txBox="1"/>
+          <p:nvPr/>
+        </p:nvSpPr>
+        <p:spPr>
+          <a:xfrm>
+            <a:off x="5852160" y="2926080"/>
+            <a:ext cx="1005840" cy="274320"/>
+          </a:xfrm>
+          <a:prstGeom prst="rect">
+            <a:avLst/>
+          </a:prstGeom>
+          <a:noFill/>
+        </p:spPr>
+        <p:txBody>
+          <a:bodyPr wrap="square">
+            <a:spAutoFit/>
+          </a:bodyPr>
+          <a:lstStyle/>
+          <a:p>
+            <a:pPr algn="l"/>
+            <a:r>
+              <a:rPr sz="1300" b="1" i="0">
+                <a:solidFill>
+                  <a:srgbClr val="BF352A"/>
+                </a:solidFill>
+              </a:rPr>
+              <a:t>HIGH</a:t>
+            </a:r>
+          </a:p>
+        </p:txBody>
+      </p:sp>
+      <p:sp>
+        <p:nvSpPr>
+          <p:cNvPr id="48" name="Rectangle 47"/>
+          <p:cNvSpPr/>
+          <p:nvPr/>
+        </p:nvSpPr>
+        <p:spPr>
+          <a:xfrm>
+            <a:off x="6949440" y="2834640"/>
+            <a:ext cx="1463040" cy="457200"/>
+          </a:xfrm>
+          <a:prstGeom prst="rect">
+            <a:avLst/>
+          </a:prstGeom>
+          <a:solidFill>
+            <a:srgbClr val="F2F4F7"/>
+          </a:solidFill>
+          <a:ln>
+            <a:noFill/>
+          </a:ln>
+        </p:spPr>
+        <p:style>
+          <a:lnRef idx="1">
+            <a:schemeClr val="accent1"/>
+          </a:lnRef>
+          <a:fillRef idx="3">
+            <a:schemeClr val="accent1"/>
+          </a:fillRef>
+          <a:effectRef idx="2">
+            <a:schemeClr val="accent1"/>
+          </a:effectRef>
+          <a:fontRef idx="minor">
+            <a:schemeClr val="lt1"/>
+          </a:fontRef>
+        </p:style>
+        <p:txBody>
+          <a:bodyPr rtlCol="0" anchor="ctr"/>
+          <a:lstStyle/>
+          <a:p>
+            <a:pPr algn="ctr"/>
+          </a:p>
+        </p:txBody>
+      </p:sp>
+      <p:sp>
+        <p:nvSpPr>
+          <p:cNvPr id="49" name="TextBox 48"/>
+          <p:cNvSpPr txBox="1"/>
+          <p:nvPr/>
+        </p:nvSpPr>
+        <p:spPr>
+          <a:xfrm>
+            <a:off x="7040880" y="2926080"/>
+            <a:ext cx="1280160" cy="274320"/>
+          </a:xfrm>
+          <a:prstGeom prst="rect">
+            <a:avLst/>
+          </a:prstGeom>
+          <a:noFill/>
+        </p:spPr>
+        <p:txBody>
+          <a:bodyPr wrap="square">
+            <a:spAutoFit/>
+          </a:bodyPr>
+          <a:lstStyle/>
+          <a:p>
+            <a:pPr algn="l"/>
+            <a:r>
+              <a:rPr sz="1300" b="0" i="0">
+                <a:solidFill>
+                  <a:srgbClr val="2D2D2D"/>
+                </a:solidFill>
+              </a:rPr>
+              <a:t>3-6 mo</a:t>
+            </a:r>
+          </a:p>
+        </p:txBody>
+      </p:sp>
+      <p:sp>
+        <p:nvSpPr>
+          <p:cNvPr id="50" name="Rectangle 49"/>
+          <p:cNvSpPr/>
+          <p:nvPr/>
+        </p:nvSpPr>
+        <p:spPr>
+          <a:xfrm>
+            <a:off x="8412480" y="2834640"/>
+            <a:ext cx="1828800" cy="457200"/>
+          </a:xfrm>
+          <a:prstGeom prst="rect">
+            <a:avLst/>
+          </a:prstGeom>
+          <a:solidFill>
+            <a:srgbClr val="CC8400"/>
+          </a:solidFill>
+          <a:ln>
+            <a:noFill/>
+          </a:ln>
+        </p:spPr>
+        <p:style>
+          <a:lnRef idx="1">
+            <a:schemeClr val="accent1"/>
+          </a:lnRef>
+          <a:fillRef idx="3">
+            <a:schemeClr val="accent1"/>
+          </a:fillRef>
+          <a:effectRef idx="2">
+            <a:schemeClr val="accent1"/>
+          </a:effectRef>
+          <a:fontRef idx="minor">
+            <a:schemeClr val="lt1"/>
+          </a:fontRef>
+        </p:style>
+        <p:txBody>
+          <a:bodyPr rtlCol="0" anchor="ctr"/>
+          <a:lstStyle/>
+          <a:p>
+            <a:pPr algn="ctr"/>
+          </a:p>
+        </p:txBody>
+      </p:sp>
+      <p:sp>
+        <p:nvSpPr>
+          <p:cNvPr id="51" name="TextBox 50"/>
+          <p:cNvSpPr txBox="1"/>
+          <p:nvPr/>
+        </p:nvSpPr>
+        <p:spPr>
+          <a:xfrm>
+            <a:off x="8503920" y="2926080"/>
+            <a:ext cx="1645920" cy="274320"/>
+          </a:xfrm>
+          <a:prstGeom prst="rect">
+            <a:avLst/>
+          </a:prstGeom>
+          <a:noFill/>
+        </p:spPr>
+        <p:txBody>
+          <a:bodyPr wrap="square">
+            <a:spAutoFit/>
+          </a:bodyPr>
+          <a:lstStyle/>
+          <a:p>
+            <a:pPr algn="l"/>
+            <a:r>
+              <a:rPr sz="1300" b="1" i="0">
+                <a:solidFill>
+                  <a:srgbClr val="FFFFFF"/>
+                </a:solidFill>
+              </a:rPr>
+              <a:t>Phase 2</a:t>
+            </a:r>
+          </a:p>
+        </p:txBody>
+      </p:sp>
+      <p:sp>
+        <p:nvSpPr>
+          <p:cNvPr id="52" name="Rectangle 51"/>
+          <p:cNvSpPr/>
+          <p:nvPr/>
+        </p:nvSpPr>
+        <p:spPr>
+          <a:xfrm>
+            <a:off x="457200" y="3291840"/>
+            <a:ext cx="2560320" cy="457200"/>
+          </a:xfrm>
+          <a:prstGeom prst="rect">
+            <a:avLst/>
+          </a:prstGeom>
+          <a:solidFill>
+            <a:srgbClr val="F2F4F7"/>
+          </a:solidFill>
+          <a:ln>
+            <a:noFill/>
+          </a:ln>
+        </p:spPr>
+        <p:style>
+          <a:lnRef idx="1">
+            <a:schemeClr val="accent1"/>
+          </a:lnRef>
+          <a:fillRef idx="3">
+            <a:schemeClr val="accent1"/>
+          </a:fillRef>
+          <a:effectRef idx="2">
+            <a:schemeClr val="accent1"/>
+          </a:effectRef>
+          <a:fontRef idx="minor">
+            <a:schemeClr val="lt1"/>
+          </a:fontRef>
+        </p:style>
+        <p:txBody>
+          <a:bodyPr rtlCol="0" anchor="ctr"/>
+          <a:lstStyle/>
+          <a:p>
+            <a:pPr algn="ctr"/>
+          </a:p>
+        </p:txBody>
+      </p:sp>
+      <p:sp>
+        <p:nvSpPr>
+          <p:cNvPr id="53" name="TextBox 52"/>
+          <p:cNvSpPr txBox="1"/>
+          <p:nvPr/>
+        </p:nvSpPr>
+        <p:spPr>
+          <a:xfrm>
+            <a:off x="548640" y="3383280"/>
+            <a:ext cx="2377440" cy="274320"/>
+          </a:xfrm>
+          <a:prstGeom prst="rect">
+            <a:avLst/>
+          </a:prstGeom>
+          <a:noFill/>
+        </p:spPr>
+        <p:txBody>
+          <a:bodyPr wrap="square">
+            <a:spAutoFit/>
+          </a:bodyPr>
+          <a:lstStyle/>
+          <a:p>
+            <a:pPr algn="l"/>
+            <a:r>
+              <a:rPr sz="1300" b="0" i="0">
+                <a:solidFill>
+                  <a:srgbClr val="2D2D2D"/>
+                </a:solidFill>
+              </a:rPr>
+              <a:t>W3: Route Changes</a:t>
+            </a:r>
+          </a:p>
+        </p:txBody>
+      </p:sp>
+      <p:sp>
+        <p:nvSpPr>
+          <p:cNvPr id="54" name="Rectangle 53"/>
+          <p:cNvSpPr/>
+          <p:nvPr/>
+        </p:nvSpPr>
+        <p:spPr>
+          <a:xfrm>
+            <a:off x="3017520" y="3291840"/>
+            <a:ext cx="1371600" cy="457200"/>
+          </a:xfrm>
+          <a:prstGeom prst="rect">
+            <a:avLst/>
+          </a:prstGeom>
+          <a:solidFill>
+            <a:srgbClr val="F2F4F7"/>
+          </a:solidFill>
+          <a:ln>
+            <a:noFill/>
+          </a:ln>
+        </p:spPr>
+        <p:style>
+          <a:lnRef idx="1">
+            <a:schemeClr val="accent1"/>
+          </a:lnRef>
+          <a:fillRef idx="3">
+            <a:schemeClr val="accent1"/>
+          </a:fillRef>
+          <a:effectRef idx="2">
+            <a:schemeClr val="accent1"/>
+          </a:effectRef>
+          <a:fontRef idx="minor">
+            <a:schemeClr val="lt1"/>
+          </a:fontRef>
+        </p:style>
+        <p:txBody>
+          <a:bodyPr rtlCol="0" anchor="ctr"/>
+          <a:lstStyle/>
+          <a:p>
+            <a:pPr algn="ctr"/>
+          </a:p>
+        </p:txBody>
+      </p:sp>
+      <p:sp>
+        <p:nvSpPr>
+          <p:cNvPr id="55" name="TextBox 54"/>
+          <p:cNvSpPr txBox="1"/>
+          <p:nvPr/>
+        </p:nvSpPr>
+        <p:spPr>
+          <a:xfrm>
+            <a:off x="3108960" y="3383280"/>
+            <a:ext cx="1188720" cy="274320"/>
+          </a:xfrm>
+          <a:prstGeom prst="rect">
+            <a:avLst/>
+          </a:prstGeom>
+          <a:noFill/>
+        </p:spPr>
+        <p:txBody>
+          <a:bodyPr wrap="square">
+            <a:spAutoFit/>
+          </a:bodyPr>
+          <a:lstStyle/>
+          <a:p>
+            <a:pPr algn="l"/>
+            <a:r>
+              <a:rPr sz="1300" b="0" i="0">
+                <a:solidFill>
+                  <a:srgbClr val="2D2D2D"/>
+                </a:solidFill>
+              </a:rPr>
+              <a:t>90/day</a:t>
+            </a:r>
+          </a:p>
+        </p:txBody>
+      </p:sp>
+      <p:sp>
+        <p:nvSpPr>
+          <p:cNvPr id="56" name="Rectangle 55"/>
+          <p:cNvSpPr/>
+          <p:nvPr/>
+        </p:nvSpPr>
+        <p:spPr>
+          <a:xfrm>
+            <a:off x="4389120" y="3291840"/>
+            <a:ext cx="1371600" cy="457200"/>
+          </a:xfrm>
+          <a:prstGeom prst="rect">
+            <a:avLst/>
+          </a:prstGeom>
+          <a:solidFill>
+            <a:srgbClr val="F2F4F7"/>
+          </a:solidFill>
+          <a:ln>
+            <a:noFill/>
+          </a:ln>
+        </p:spPr>
+        <p:style>
+          <a:lnRef idx="1">
+            <a:schemeClr val="accent1"/>
+          </a:lnRef>
+          <a:fillRef idx="3">
+            <a:schemeClr val="accent1"/>
+          </a:fillRef>
+          <a:effectRef idx="2">
+            <a:schemeClr val="accent1"/>
+          </a:effectRef>
+          <a:fontRef idx="minor">
+            <a:schemeClr val="lt1"/>
+          </a:fontRef>
+        </p:style>
+        <p:txBody>
+          <a:bodyPr rtlCol="0" anchor="ctr"/>
+          <a:lstStyle/>
+          <a:p>
+            <a:pPr algn="ctr"/>
+          </a:p>
+        </p:txBody>
+      </p:sp>
+      <p:sp>
+        <p:nvSpPr>
+          <p:cNvPr id="57" name="TextBox 56"/>
+          <p:cNvSpPr txBox="1"/>
+          <p:nvPr/>
+        </p:nvSpPr>
+        <p:spPr>
+          <a:xfrm>
+            <a:off x="4480560" y="3383280"/>
+            <a:ext cx="1188720" cy="274320"/>
+          </a:xfrm>
+          <a:prstGeom prst="rect">
+            <a:avLst/>
+          </a:prstGeom>
+          <a:noFill/>
+        </p:spPr>
+        <p:txBody>
+          <a:bodyPr wrap="square">
+            <a:spAutoFit/>
+          </a:bodyPr>
+          <a:lstStyle/>
+          <a:p>
+            <a:pPr algn="l"/>
+            <a:r>
+              <a:rPr sz="1300" b="0" i="0">
+                <a:solidFill>
+                  <a:srgbClr val="2D2D2D"/>
+                </a:solidFill>
+              </a:rPr>
+              <a:t>0.9 FTE</a:t>
+            </a:r>
+          </a:p>
+        </p:txBody>
+      </p:sp>
+      <p:sp>
+        <p:nvSpPr>
+          <p:cNvPr id="58" name="Rectangle 57"/>
+          <p:cNvSpPr/>
+          <p:nvPr/>
+        </p:nvSpPr>
+        <p:spPr>
+          <a:xfrm>
+            <a:off x="5760720" y="3291840"/>
+            <a:ext cx="1188720" cy="457200"/>
+          </a:xfrm>
+          <a:prstGeom prst="rect">
+            <a:avLst/>
+          </a:prstGeom>
+          <a:solidFill>
+            <a:srgbClr val="F2F4F7"/>
+          </a:solidFill>
+          <a:ln>
+            <a:noFill/>
+          </a:ln>
+        </p:spPr>
+        <p:style>
+          <a:lnRef idx="1">
+            <a:schemeClr val="accent1"/>
+          </a:lnRef>
+          <a:fillRef idx="3">
+            <a:schemeClr val="accent1"/>
+          </a:fillRef>
+          <a:effectRef idx="2">
+            <a:schemeClr val="accent1"/>
+          </a:effectRef>
+          <a:fontRef idx="minor">
+            <a:schemeClr val="lt1"/>
+          </a:fontRef>
+        </p:style>
+        <p:txBody>
+          <a:bodyPr rtlCol="0" anchor="ctr"/>
+          <a:lstStyle/>
+          <a:p>
+            <a:pPr algn="ctr"/>
+          </a:p>
+        </p:txBody>
+      </p:sp>
+      <p:sp>
+        <p:nvSpPr>
+          <p:cNvPr id="59" name="TextBox 58"/>
+          <p:cNvSpPr txBox="1"/>
+          <p:nvPr/>
+        </p:nvSpPr>
+        <p:spPr>
+          <a:xfrm>
+            <a:off x="5852160" y="3383280"/>
+            <a:ext cx="1005840" cy="274320"/>
+          </a:xfrm>
+          <a:prstGeom prst="rect">
+            <a:avLst/>
+          </a:prstGeom>
+          <a:noFill/>
+        </p:spPr>
+        <p:txBody>
+          <a:bodyPr wrap="square">
+            <a:spAutoFit/>
+          </a:bodyPr>
+          <a:lstStyle/>
+          <a:p>
+            <a:pPr algn="l"/>
+            <a:r>
+              <a:rPr sz="1300" b="1" i="0">
+                <a:solidFill>
+                  <a:srgbClr val="BF352A"/>
+                </a:solidFill>
+              </a:rPr>
+              <a:t>HIGH</a:t>
+            </a:r>
+          </a:p>
+        </p:txBody>
+      </p:sp>
+      <p:sp>
+        <p:nvSpPr>
+          <p:cNvPr id="60" name="Rectangle 59"/>
+          <p:cNvSpPr/>
+          <p:nvPr/>
+        </p:nvSpPr>
+        <p:spPr>
+          <a:xfrm>
+            <a:off x="6949440" y="3291840"/>
+            <a:ext cx="1463040" cy="457200"/>
+          </a:xfrm>
+          <a:prstGeom prst="rect">
+            <a:avLst/>
+          </a:prstGeom>
+          <a:solidFill>
+            <a:srgbClr val="F2F4F7"/>
+          </a:solidFill>
+          <a:ln>
+            <a:noFill/>
+          </a:ln>
+        </p:spPr>
+        <p:style>
+          <a:lnRef idx="1">
+            <a:schemeClr val="accent1"/>
+          </a:lnRef>
+          <a:fillRef idx="3">
+            <a:schemeClr val="accent1"/>
+          </a:fillRef>
+          <a:effectRef idx="2">
+            <a:schemeClr val="accent1"/>
+          </a:effectRef>
+          <a:fontRef idx="minor">
+            <a:schemeClr val="lt1"/>
+          </a:fontRef>
+        </p:style>
+        <p:txBody>
+          <a:bodyPr rtlCol="0" anchor="ctr"/>
+          <a:lstStyle/>
+          <a:p>
+            <a:pPr algn="ctr"/>
+          </a:p>
+        </p:txBody>
+      </p:sp>
+      <p:sp>
+        <p:nvSpPr>
+          <p:cNvPr id="61" name="TextBox 60"/>
+          <p:cNvSpPr txBox="1"/>
+          <p:nvPr/>
+        </p:nvSpPr>
+        <p:spPr>
+          <a:xfrm>
+            <a:off x="7040880" y="3383280"/>
+            <a:ext cx="1280160" cy="274320"/>
+          </a:xfrm>
+          <a:prstGeom prst="rect">
+            <a:avLst/>
+          </a:prstGeom>
+          <a:noFill/>
+        </p:spPr>
+        <p:txBody>
+          <a:bodyPr wrap="square">
+            <a:spAutoFit/>
+          </a:bodyPr>
+          <a:lstStyle/>
+          <a:p>
+            <a:pPr algn="l"/>
+            <a:r>
+              <a:rPr sz="1300" b="0" i="0">
+                <a:solidFill>
+                  <a:srgbClr val="2D2D2D"/>
+                </a:solidFill>
+              </a:rPr>
+              <a:t>12-18 mo</a:t>
+            </a:r>
+          </a:p>
+        </p:txBody>
+      </p:sp>
+      <p:sp>
+        <p:nvSpPr>
+          <p:cNvPr id="62" name="Rectangle 61"/>
+          <p:cNvSpPr/>
+          <p:nvPr/>
+        </p:nvSpPr>
+        <p:spPr>
+          <a:xfrm>
+            <a:off x="8412480" y="3291840"/>
+            <a:ext cx="1828800" cy="457200"/>
+          </a:xfrm>
+          <a:prstGeom prst="rect">
+            <a:avLst/>
+          </a:prstGeom>
+          <a:solidFill>
+            <a:srgbClr val="F2F4F7"/>
+          </a:solidFill>
+          <a:ln>
+            <a:noFill/>
+          </a:ln>
+        </p:spPr>
+        <p:style>
+          <a:lnRef idx="1">
+            <a:schemeClr val="accent1"/>
+          </a:lnRef>
+          <a:fillRef idx="3">
+            <a:schemeClr val="accent1"/>
+          </a:fillRef>
+          <a:effectRef idx="2">
+            <a:schemeClr val="accent1"/>
+          </a:effectRef>
+          <a:fontRef idx="minor">
+            <a:schemeClr val="lt1"/>
+          </a:fontRef>
+        </p:style>
+        <p:txBody>
+          <a:bodyPr rtlCol="0" anchor="ctr"/>
+          <a:lstStyle/>
+          <a:p>
+            <a:pPr algn="ctr"/>
+          </a:p>
+        </p:txBody>
+      </p:sp>
+      <p:sp>
+        <p:nvSpPr>
+          <p:cNvPr id="63" name="TextBox 62"/>
+          <p:cNvSpPr txBox="1"/>
+          <p:nvPr/>
+        </p:nvSpPr>
+        <p:spPr>
+          <a:xfrm>
+            <a:off x="8503920" y="3383280"/>
+            <a:ext cx="1645920" cy="274320"/>
+          </a:xfrm>
+          <a:prstGeom prst="rect">
+            <a:avLst/>
+          </a:prstGeom>
+          <a:noFill/>
+        </p:spPr>
+        <p:txBody>
+          <a:bodyPr wrap="square">
+            <a:spAutoFit/>
+          </a:bodyPr>
+          <a:lstStyle/>
+          <a:p>
+            <a:pPr algn="l"/>
+            <a:r>
+              <a:rPr sz="1300" b="0" i="0">
+                <a:solidFill>
+                  <a:srgbClr val="BF352A"/>
+                </a:solidFill>
+              </a:rPr>
+              <a:t>Out of scope</a:t>
+            </a:r>
+          </a:p>
+        </p:txBody>
+      </p:sp>
+      <p:sp>
+        <p:nvSpPr>
+          <p:cNvPr id="64" name="TextBox 63"/>
+          <p:cNvSpPr txBox="1"/>
+          <p:nvPr/>
+        </p:nvSpPr>
+        <p:spPr>
+          <a:xfrm>
+            <a:off x="457200" y="4023360"/>
+            <a:ext cx="11247120" cy="365760"/>
+          </a:xfrm>
+          <a:prstGeom prst="rect">
+            <a:avLst/>
+          </a:prstGeom>
+          <a:noFill/>
+        </p:spPr>
+        <p:txBody>
+          <a:bodyPr wrap="square">
+            <a:spAutoFit/>
+          </a:bodyPr>
+          <a:lstStyle/>
+          <a:p>
+            <a:pPr algn="ctr"/>
+            <a:r>
+              <a:rPr sz="1600" b="1" i="0">
+                <a:solidFill>
+                  <a:srgbClr val="1A7A3C"/>
+                </a:solidFill>
+              </a:rPr>
+              <a:t>W2 wins: Highest volume + Lowest risk = Fastest trust-building win after 2 prior failures</a:t>
             </a:r>
           </a:p>
         </p:txBody>
@@ -6718,12 +7026,12 @@
           <a:p>
             <a:pPr algn="l"/>
             <a:r>
-              <a:rPr sz="3200" b="1" i="0">
+              <a:rPr sz="3000" b="1" i="0">
                 <a:solidFill>
                   <a:srgbClr val="FFFFFF"/>
                 </a:solidFill>
               </a:rPr>
-              <a:t>Implementation Strategy</a:t>
+              <a:t>Why W2 (ETA Inquiries) Is The Right Phase 1 Target</a:t>
             </a:r>
           </a:p>
         </p:txBody>
@@ -6736,8 +7044,2180 @@
         </p:nvSpPr>
         <p:spPr>
           <a:xfrm>
-            <a:off x="914400" y="1645920"/>
-            <a:ext cx="10332720" cy="1645920"/>
+            <a:off x="457200" y="1371600"/>
+            <a:ext cx="5486400" cy="4114800"/>
+          </a:xfrm>
+          <a:prstGeom prst="rect">
+            <a:avLst/>
+          </a:prstGeom>
+          <a:solidFill>
+            <a:srgbClr val="D6EEDC"/>
+          </a:solidFill>
+          <a:ln>
+            <a:noFill/>
+          </a:ln>
+        </p:spPr>
+        <p:style>
+          <a:lnRef idx="1">
+            <a:schemeClr val="accent1"/>
+          </a:lnRef>
+          <a:fillRef idx="3">
+            <a:schemeClr val="accent1"/>
+          </a:fillRef>
+          <a:effectRef idx="2">
+            <a:schemeClr val="accent1"/>
+          </a:effectRef>
+          <a:fontRef idx="minor">
+            <a:schemeClr val="lt1"/>
+          </a:fontRef>
+        </p:style>
+        <p:txBody>
+          <a:bodyPr rtlCol="0" anchor="ctr"/>
+          <a:lstStyle/>
+          <a:p>
+            <a:pPr algn="ctr"/>
+          </a:p>
+        </p:txBody>
+      </p:sp>
+      <p:sp>
+        <p:nvSpPr>
+          <p:cNvPr id="5" name="TextBox 4"/>
+          <p:cNvSpPr txBox="1"/>
+          <p:nvPr/>
+        </p:nvSpPr>
+        <p:spPr>
+          <a:xfrm>
+            <a:off x="731520" y="1645920"/>
+            <a:ext cx="5029200" cy="274320"/>
+          </a:xfrm>
+          <a:prstGeom prst="rect">
+            <a:avLst/>
+          </a:prstGeom>
+          <a:noFill/>
+        </p:spPr>
+        <p:txBody>
+          <a:bodyPr wrap="square">
+            <a:spAutoFit/>
+          </a:bodyPr>
+          <a:lstStyle/>
+          <a:p>
+            <a:pPr algn="l"/>
+            <a:r>
+              <a:rPr sz="1800" b="1" i="0">
+                <a:solidFill>
+                  <a:srgbClr val="1A7A3C"/>
+                </a:solidFill>
+              </a:rPr>
+              <a:t>Technical Fit</a:t>
+            </a:r>
+          </a:p>
+        </p:txBody>
+      </p:sp>
+      <p:sp>
+        <p:nvSpPr>
+          <p:cNvPr id="6" name="TextBox 5"/>
+          <p:cNvSpPr txBox="1"/>
+          <p:nvPr/>
+        </p:nvSpPr>
+        <p:spPr>
+          <a:xfrm>
+            <a:off x="731520" y="2011680"/>
+            <a:ext cx="4846320" cy="3200400"/>
+          </a:xfrm>
+          <a:prstGeom prst="rect">
+            <a:avLst/>
+          </a:prstGeom>
+          <a:noFill/>
+        </p:spPr>
+        <p:txBody>
+          <a:bodyPr wrap="square">
+            <a:spAutoFit/>
+          </a:bodyPr>
+          <a:lstStyle/>
+          <a:p>
+            <a:pPr/>
+            <a:r>
+              <a:rPr sz="1400">
+                <a:solidFill>
+                  <a:srgbClr val="2D2D2D"/>
+                </a:solidFill>
+              </a:rPr>
+              <a:t>Highest volume: 400 inquiries/day</a:t>
+            </a:r>
+          </a:p>
+          <a:p>
+            <a:pPr/>
+            <a:r>
+              <a:rPr sz="1400">
+                <a:solidFill>
+                  <a:srgbClr val="2D2D2D"/>
+                </a:solidFill>
+              </a:rPr>
+              <a:t>95% automation potential - mostly lookup + driver query</a:t>
+            </a:r>
+          </a:p>
+          <a:p>
+            <a:pPr/>
+            <a:r>
+              <a:rPr sz="1400">
+                <a:solidFill>
+                  <a:srgbClr val="2D2D2D"/>
+                </a:solidFill>
+              </a:rPr>
+              <a:t>Simple integration: CRM REST API available</a:t>
+            </a:r>
+          </a:p>
+          <a:p>
+            <a:pPr/>
+            <a:r>
+              <a:rPr sz="1400">
+                <a:solidFill>
+                  <a:srgbClr val="2D2D2D"/>
+                </a:solidFill>
+              </a:rPr>
+              <a:t>No legacy dependencies (unlike Aurum billing)</a:t>
+            </a:r>
+          </a:p>
+          <a:p>
+            <a:pPr/>
+            <a:r>
+              <a:rPr sz="1400">
+                <a:solidFill>
+                  <a:srgbClr val="2D2D2D"/>
+                </a:solidFill>
+              </a:rPr>
+              <a:t>Clear escalation path: driver non-response in 2 min</a:t>
+            </a:r>
+          </a:p>
+          <a:p>
+            <a:pPr/>
+            <a:r>
+              <a:rPr sz="1400">
+                <a:solidFill>
+                  <a:srgbClr val="2D2D2D"/>
+                </a:solidFill>
+              </a:rPr>
+              <a:t>Saves 558 hours/month (2.8 FTE equivalent)</a:t>
+            </a:r>
+          </a:p>
+        </p:txBody>
+      </p:sp>
+      <p:sp>
+        <p:nvSpPr>
+          <p:cNvPr id="7" name="Rectangle 6"/>
+          <p:cNvSpPr/>
+          <p:nvPr/>
+        </p:nvSpPr>
+        <p:spPr>
+          <a:xfrm>
+            <a:off x="6217920" y="1371600"/>
+            <a:ext cx="5486400" cy="4114800"/>
+          </a:xfrm>
+          <a:prstGeom prst="rect">
+            <a:avLst/>
+          </a:prstGeom>
+          <a:solidFill>
+            <a:srgbClr val="D6EEDC"/>
+          </a:solidFill>
+          <a:ln>
+            <a:noFill/>
+          </a:ln>
+        </p:spPr>
+        <p:style>
+          <a:lnRef idx="1">
+            <a:schemeClr val="accent1"/>
+          </a:lnRef>
+          <a:fillRef idx="3">
+            <a:schemeClr val="accent1"/>
+          </a:fillRef>
+          <a:effectRef idx="2">
+            <a:schemeClr val="accent1"/>
+          </a:effectRef>
+          <a:fontRef idx="minor">
+            <a:schemeClr val="lt1"/>
+          </a:fontRef>
+        </p:style>
+        <p:txBody>
+          <a:bodyPr rtlCol="0" anchor="ctr"/>
+          <a:lstStyle/>
+          <a:p>
+            <a:pPr algn="ctr"/>
+          </a:p>
+        </p:txBody>
+      </p:sp>
+      <p:sp>
+        <p:nvSpPr>
+          <p:cNvPr id="8" name="TextBox 7"/>
+          <p:cNvSpPr txBox="1"/>
+          <p:nvPr/>
+        </p:nvSpPr>
+        <p:spPr>
+          <a:xfrm>
+            <a:off x="6492240" y="1645920"/>
+            <a:ext cx="5029200" cy="274320"/>
+          </a:xfrm>
+          <a:prstGeom prst="rect">
+            <a:avLst/>
+          </a:prstGeom>
+          <a:noFill/>
+        </p:spPr>
+        <p:txBody>
+          <a:bodyPr wrap="square">
+            <a:spAutoFit/>
+          </a:bodyPr>
+          <a:lstStyle/>
+          <a:p>
+            <a:pPr algn="l"/>
+            <a:r>
+              <a:rPr sz="1800" b="1" i="0">
+                <a:solidFill>
+                  <a:srgbClr val="1A7A3C"/>
+                </a:solidFill>
+              </a:rPr>
+              <a:t>Strategic Fit</a:t>
+            </a:r>
+          </a:p>
+        </p:txBody>
+      </p:sp>
+      <p:sp>
+        <p:nvSpPr>
+          <p:cNvPr id="9" name="TextBox 8"/>
+          <p:cNvSpPr txBox="1"/>
+          <p:nvPr/>
+        </p:nvSpPr>
+        <p:spPr>
+          <a:xfrm>
+            <a:off x="6492240" y="2011680"/>
+            <a:ext cx="4846320" cy="3200400"/>
+          </a:xfrm>
+          <a:prstGeom prst="rect">
+            <a:avLst/>
+          </a:prstGeom>
+          <a:noFill/>
+        </p:spPr>
+        <p:txBody>
+          <a:bodyPr wrap="square">
+            <a:spAutoFit/>
+          </a:bodyPr>
+          <a:lstStyle/>
+          <a:p>
+            <a:pPr/>
+            <a:r>
+              <a:rPr sz="1400">
+                <a:solidFill>
+                  <a:srgbClr val="2D2D2D"/>
+                </a:solidFill>
+              </a:rPr>
+              <a:t>Fastest ROI: 1-2 month payback</a:t>
+            </a:r>
+          </a:p>
+          <a:p>
+            <a:pPr/>
+            <a:r>
+              <a:rPr sz="1400">
+                <a:solidFill>
+                  <a:srgbClr val="2D2D2D"/>
+                </a:solidFill>
+              </a:rPr>
+              <a:t>Rebuilds trust after 2 failed projects</a:t>
+            </a:r>
+          </a:p>
+          <a:p>
+            <a:pPr/>
+            <a:r>
+              <a:rPr sz="1400">
+                <a:solidFill>
+                  <a:srgbClr val="2D2D2D"/>
+                </a:solidFill>
+              </a:rPr>
+              <a:t>Proves agent value before tackling complex W4</a:t>
+            </a:r>
+          </a:p>
+          <a:p>
+            <a:pPr/>
+            <a:r>
+              <a:rPr sz="1400">
+                <a:solidFill>
+                  <a:srgbClr val="2D2D2D"/>
+                </a:solidFill>
+              </a:rPr>
+              <a:t>No chatbot interface - replies via existing channels</a:t>
+            </a:r>
+          </a:p>
+          <a:p>
+            <a:pPr/>
+            <a:r>
+              <a:rPr sz="1400">
+                <a:solidFill>
+                  <a:srgbClr val="2D2D2D"/>
+                </a:solidFill>
+              </a:rPr>
+              <a:t>Quick operational win validates approach</a:t>
+            </a:r>
+          </a:p>
+          <a:p>
+            <a:pPr/>
+            <a:r>
+              <a:rPr sz="1400">
+                <a:solidFill>
+                  <a:srgbClr val="2D2D2D"/>
+                </a:solidFill>
+              </a:rPr>
+              <a:t>Low risk = high confidence delivery</a:t>
+            </a:r>
+          </a:p>
+        </p:txBody>
+      </p:sp>
+      <p:sp>
+        <p:nvSpPr>
+          <p:cNvPr id="10" name="TextBox 9"/>
+          <p:cNvSpPr txBox="1"/>
+          <p:nvPr/>
+        </p:nvSpPr>
+        <p:spPr>
+          <a:xfrm>
+            <a:off x="457200" y="5760720"/>
+            <a:ext cx="11247120" cy="548640"/>
+          </a:xfrm>
+          <a:prstGeom prst="rect">
+            <a:avLst/>
+          </a:prstGeom>
+          <a:noFill/>
+        </p:spPr>
+        <p:txBody>
+          <a:bodyPr wrap="square">
+            <a:spAutoFit/>
+          </a:bodyPr>
+          <a:lstStyle/>
+          <a:p>
+            <a:pPr algn="ctr"/>
+            <a:r>
+              <a:rPr sz="1500" b="0" i="1">
+                <a:solidFill>
+                  <a:srgbClr val="2E5FA3"/>
+                </a:solidFill>
+              </a:rPr>
+              <a:t>After W2 success, use proven trust and capability to tackle W4 (billing disputes - higher value, higher complexity)</a:t>
+            </a:r>
+          </a:p>
+        </p:txBody>
+      </p:sp>
+    </p:spTree>
+  </p:cSld>
+  <p:clrMapOvr>
+    <a:masterClrMapping/>
+  </p:clrMapOvr>
+</p:sld>
+</file>
+
+<file path=ppt/slides/slide6.xml><?xml version="1.0" encoding="utf-8"?>
+<p:sld xmlns:a="http://schemas.openxmlformats.org/drawingml/2006/main" xmlns:p="http://schemas.openxmlformats.org/presentationml/2006/main" xmlns:r="http://schemas.openxmlformats.org/officeDocument/2006/relationships">
+  <p:cSld>
+    <p:spTree>
+      <p:nvGrpSpPr>
+        <p:cNvPr id="1" name=""/>
+        <p:cNvGrpSpPr/>
+        <p:nvPr/>
+      </p:nvGrpSpPr>
+      <p:grpSpPr/>
+      <p:sp>
+        <p:nvSpPr>
+          <p:cNvPr id="2" name="Rectangle 1"/>
+          <p:cNvSpPr/>
+          <p:nvPr/>
+        </p:nvSpPr>
+        <p:spPr>
+          <a:xfrm>
+            <a:off x="0" y="0"/>
+            <a:ext cx="12188952" cy="914400"/>
+          </a:xfrm>
+          <a:prstGeom prst="rect">
+            <a:avLst/>
+          </a:prstGeom>
+          <a:solidFill>
+            <a:srgbClr val="1B3A6B"/>
+          </a:solidFill>
+          <a:ln>
+            <a:noFill/>
+          </a:ln>
+        </p:spPr>
+        <p:style>
+          <a:lnRef idx="1">
+            <a:schemeClr val="accent1"/>
+          </a:lnRef>
+          <a:fillRef idx="3">
+            <a:schemeClr val="accent1"/>
+          </a:fillRef>
+          <a:effectRef idx="2">
+            <a:schemeClr val="accent1"/>
+          </a:effectRef>
+          <a:fontRef idx="minor">
+            <a:schemeClr val="lt1"/>
+          </a:fontRef>
+        </p:style>
+        <p:txBody>
+          <a:bodyPr rtlCol="0" anchor="ctr"/>
+          <a:lstStyle/>
+          <a:p>
+            <a:pPr algn="ctr"/>
+          </a:p>
+        </p:txBody>
+      </p:sp>
+      <p:sp>
+        <p:nvSpPr>
+          <p:cNvPr id="3" name="TextBox 2"/>
+          <p:cNvSpPr txBox="1"/>
+          <p:nvPr/>
+        </p:nvSpPr>
+        <p:spPr>
+          <a:xfrm>
+            <a:off x="457200" y="274320"/>
+            <a:ext cx="10972800" cy="457200"/>
+          </a:xfrm>
+          <a:prstGeom prst="rect">
+            <a:avLst/>
+          </a:prstGeom>
+          <a:noFill/>
+        </p:spPr>
+        <p:txBody>
+          <a:bodyPr wrap="square">
+            <a:spAutoFit/>
+          </a:bodyPr>
+          <a:lstStyle/>
+          <a:p>
+            <a:pPr algn="l"/>
+            <a:r>
+              <a:rPr sz="3200" b="1" i="0">
+                <a:solidFill>
+                  <a:srgbClr val="FFFFFF"/>
+                </a:solidFill>
+              </a:rPr>
+              <a:t>Why Not W1 or W3 for Phase 1?</a:t>
+            </a:r>
+          </a:p>
+        </p:txBody>
+      </p:sp>
+      <p:sp>
+        <p:nvSpPr>
+          <p:cNvPr id="4" name="Rectangle 3"/>
+          <p:cNvSpPr/>
+          <p:nvPr/>
+        </p:nvSpPr>
+        <p:spPr>
+          <a:xfrm>
+            <a:off x="457200" y="1371600"/>
+            <a:ext cx="11247120" cy="2011680"/>
+          </a:xfrm>
+          <a:prstGeom prst="rect">
+            <a:avLst/>
+          </a:prstGeom>
+          <a:solidFill>
+            <a:srgbClr val="FDF0D5"/>
+          </a:solidFill>
+          <a:ln>
+            <a:noFill/>
+          </a:ln>
+        </p:spPr>
+        <p:style>
+          <a:lnRef idx="1">
+            <a:schemeClr val="accent1"/>
+          </a:lnRef>
+          <a:fillRef idx="3">
+            <a:schemeClr val="accent1"/>
+          </a:fillRef>
+          <a:effectRef idx="2">
+            <a:schemeClr val="accent1"/>
+          </a:effectRef>
+          <a:fontRef idx="minor">
+            <a:schemeClr val="lt1"/>
+          </a:fontRef>
+        </p:style>
+        <p:txBody>
+          <a:bodyPr rtlCol="0" anchor="ctr"/>
+          <a:lstStyle/>
+          <a:p>
+            <a:pPr algn="ctr"/>
+          </a:p>
+        </p:txBody>
+      </p:sp>
+      <p:sp>
+        <p:nvSpPr>
+          <p:cNvPr id="5" name="TextBox 4"/>
+          <p:cNvSpPr txBox="1"/>
+          <p:nvPr/>
+        </p:nvSpPr>
+        <p:spPr>
+          <a:xfrm>
+            <a:off x="731520" y="1554480"/>
+            <a:ext cx="10698480" cy="365760"/>
+          </a:xfrm>
+          <a:prstGeom prst="rect">
+            <a:avLst/>
+          </a:prstGeom>
+          <a:noFill/>
+        </p:spPr>
+        <p:txBody>
+          <a:bodyPr wrap="square">
+            <a:spAutoFit/>
+          </a:bodyPr>
+          <a:lstStyle/>
+          <a:p>
+            <a:pPr algn="l"/>
+            <a:r>
+              <a:rPr sz="2000" b="1" i="0">
+                <a:solidFill>
+                  <a:srgbClr val="CC8400"/>
+                </a:solidFill>
+              </a:rPr>
+              <a:t>W1: Delivery Exceptions - DEFERRED</a:t>
+            </a:r>
+          </a:p>
+        </p:txBody>
+      </p:sp>
+      <p:sp>
+        <p:nvSpPr>
+          <p:cNvPr id="6" name="TextBox 5"/>
+          <p:cNvSpPr txBox="1"/>
+          <p:nvPr/>
+        </p:nvSpPr>
+        <p:spPr>
+          <a:xfrm>
+            <a:off x="731520" y="1920240"/>
+            <a:ext cx="10698480" cy="274320"/>
+          </a:xfrm>
+          <a:prstGeom prst="rect">
+            <a:avLst/>
+          </a:prstGeom>
+          <a:noFill/>
+        </p:spPr>
+        <p:txBody>
+          <a:bodyPr wrap="square">
+            <a:spAutoFit/>
+          </a:bodyPr>
+          <a:lstStyle/>
+          <a:p>
+            <a:pPr algn="l"/>
+            <a:r>
+              <a:rPr sz="1400" b="0" i="0">
+                <a:solidFill>
+                  <a:srgbClr val="2D2D2D"/>
+                </a:solidFill>
+              </a:rPr>
+              <a:t>Volume: 180/day | Savings: 2.0 FTE | Risk: MEDIUM | ROI: 6-12 months</a:t>
+            </a:r>
+          </a:p>
+        </p:txBody>
+      </p:sp>
+      <p:sp>
+        <p:nvSpPr>
+          <p:cNvPr id="7" name="TextBox 6"/>
+          <p:cNvSpPr txBox="1"/>
+          <p:nvPr/>
+        </p:nvSpPr>
+        <p:spPr>
+          <a:xfrm>
+            <a:off x="731520" y="2286000"/>
+            <a:ext cx="10698480" cy="274320"/>
+          </a:xfrm>
+          <a:prstGeom prst="rect">
+            <a:avLst/>
+          </a:prstGeom>
+          <a:noFill/>
+        </p:spPr>
+        <p:txBody>
+          <a:bodyPr wrap="square">
+            <a:spAutoFit/>
+          </a:bodyPr>
+          <a:lstStyle/>
+          <a:p>
+            <a:pPr algn="l"/>
+            <a:r>
+              <a:rPr sz="1500" b="1" i="0">
+                <a:solidFill>
+                  <a:srgbClr val="CC8400"/>
+                </a:solidFill>
+              </a:rPr>
+              <a:t>Why defer:</a:t>
+            </a:r>
+          </a:p>
+        </p:txBody>
+      </p:sp>
+      <p:sp>
+        <p:nvSpPr>
+          <p:cNvPr id="8" name="TextBox 7"/>
+          <p:cNvSpPr txBox="1"/>
+          <p:nvPr/>
+        </p:nvSpPr>
+        <p:spPr>
+          <a:xfrm>
+            <a:off x="914400" y="2560320"/>
+            <a:ext cx="10332720" cy="731520"/>
+          </a:xfrm>
+          <a:prstGeom prst="rect">
+            <a:avLst/>
+          </a:prstGeom>
+          <a:noFill/>
+        </p:spPr>
+        <p:txBody>
+          <a:bodyPr wrap="square">
+            <a:spAutoFit/>
+          </a:bodyPr>
+          <a:lstStyle/>
+          <a:p>
+            <a:pPr/>
+            <a:r>
+              <a:rPr sz="1300">
+                <a:solidFill>
+                  <a:srgbClr val="2D2D2D"/>
+                </a:solidFill>
+              </a:rPr>
+              <a:t>Dispatch console has 'limited API surface' - unclear if write access exists</a:t>
+            </a:r>
+          </a:p>
+          <a:p>
+            <a:pPr/>
+            <a:r>
+              <a:rPr sz="1300">
+                <a:solidFill>
+                  <a:srgbClr val="2D2D2D"/>
+                </a:solidFill>
+              </a:rPr>
+              <a:t>Damage assessment requires human judgment (insurance, shipper coordination)</a:t>
+            </a:r>
+          </a:p>
+          <a:p>
+            <a:pPr/>
+            <a:r>
+              <a:rPr sz="1300">
+                <a:solidFill>
+                  <a:srgbClr val="2D2D2D"/>
+                </a:solidFill>
+              </a:rPr>
+              <a:t>SOP references retired system (DispatchHub) - documented process outdated</a:t>
+            </a:r>
+          </a:p>
+          <a:p>
+            <a:pPr/>
+            <a:r>
+              <a:rPr sz="1300">
+                <a:solidFill>
+                  <a:srgbClr val="2D2D2D"/>
+                </a:solidFill>
+              </a:rPr>
+              <a:t>Higher complexity than W2 with similar volume - not worth the risk for Phase 1</a:t>
+            </a:r>
+          </a:p>
+        </p:txBody>
+      </p:sp>
+      <p:sp>
+        <p:nvSpPr>
+          <p:cNvPr id="9" name="Rectangle 8"/>
+          <p:cNvSpPr/>
+          <p:nvPr/>
+        </p:nvSpPr>
+        <p:spPr>
+          <a:xfrm>
+            <a:off x="457200" y="3657600"/>
+            <a:ext cx="11247120" cy="2011680"/>
+          </a:xfrm>
+          <a:prstGeom prst="rect">
+            <a:avLst/>
+          </a:prstGeom>
+          <a:solidFill>
+            <a:srgbClr val="F7DCDA"/>
+          </a:solidFill>
+          <a:ln>
+            <a:noFill/>
+          </a:ln>
+        </p:spPr>
+        <p:style>
+          <a:lnRef idx="1">
+            <a:schemeClr val="accent1"/>
+          </a:lnRef>
+          <a:fillRef idx="3">
+            <a:schemeClr val="accent1"/>
+          </a:fillRef>
+          <a:effectRef idx="2">
+            <a:schemeClr val="accent1"/>
+          </a:effectRef>
+          <a:fontRef idx="minor">
+            <a:schemeClr val="lt1"/>
+          </a:fontRef>
+        </p:style>
+        <p:txBody>
+          <a:bodyPr rtlCol="0" anchor="ctr"/>
+          <a:lstStyle/>
+          <a:p>
+            <a:pPr algn="ctr"/>
+          </a:p>
+        </p:txBody>
+      </p:sp>
+      <p:sp>
+        <p:nvSpPr>
+          <p:cNvPr id="10" name="TextBox 9"/>
+          <p:cNvSpPr txBox="1"/>
+          <p:nvPr/>
+        </p:nvSpPr>
+        <p:spPr>
+          <a:xfrm>
+            <a:off x="731520" y="3840480"/>
+            <a:ext cx="10698480" cy="365760"/>
+          </a:xfrm>
+          <a:prstGeom prst="rect">
+            <a:avLst/>
+          </a:prstGeom>
+          <a:noFill/>
+        </p:spPr>
+        <p:txBody>
+          <a:bodyPr wrap="square">
+            <a:spAutoFit/>
+          </a:bodyPr>
+          <a:lstStyle/>
+          <a:p>
+            <a:pPr algn="l"/>
+            <a:r>
+              <a:rPr sz="2000" b="1" i="0">
+                <a:solidFill>
+                  <a:srgbClr val="BF352A"/>
+                </a:solidFill>
+              </a:rPr>
+              <a:t>W3: Dispatch Adjustments - OUT OF SCOPE</a:t>
+            </a:r>
+          </a:p>
+        </p:txBody>
+      </p:sp>
+      <p:sp>
+        <p:nvSpPr>
+          <p:cNvPr id="11" name="TextBox 10"/>
+          <p:cNvSpPr txBox="1"/>
+          <p:nvPr/>
+        </p:nvSpPr>
+        <p:spPr>
+          <a:xfrm>
+            <a:off x="731520" y="4206240"/>
+            <a:ext cx="10698480" cy="274320"/>
+          </a:xfrm>
+          <a:prstGeom prst="rect">
+            <a:avLst/>
+          </a:prstGeom>
+          <a:noFill/>
+        </p:spPr>
+        <p:txBody>
+          <a:bodyPr wrap="square">
+            <a:spAutoFit/>
+          </a:bodyPr>
+          <a:lstStyle/>
+          <a:p>
+            <a:pPr algn="l"/>
+            <a:r>
+              <a:rPr sz="1400" b="0" i="0">
+                <a:solidFill>
+                  <a:srgbClr val="2D2D2D"/>
+                </a:solidFill>
+              </a:rPr>
+              <a:t>Volume: 90/day | Savings: 0.9 FTE | Risk: HIGH | ROI: 12-18 months</a:t>
+            </a:r>
+          </a:p>
+        </p:txBody>
+      </p:sp>
+      <p:sp>
+        <p:nvSpPr>
+          <p:cNvPr id="12" name="TextBox 11"/>
+          <p:cNvSpPr txBox="1"/>
+          <p:nvPr/>
+        </p:nvSpPr>
+        <p:spPr>
+          <a:xfrm>
+            <a:off x="731520" y="4572000"/>
+            <a:ext cx="10698480" cy="274320"/>
+          </a:xfrm>
+          <a:prstGeom prst="rect">
+            <a:avLst/>
+          </a:prstGeom>
+          <a:noFill/>
+        </p:spPr>
+        <p:txBody>
+          <a:bodyPr wrap="square">
+            <a:spAutoFit/>
+          </a:bodyPr>
+          <a:lstStyle/>
+          <a:p>
+            <a:pPr algn="l"/>
+            <a:r>
+              <a:rPr sz="1500" b="1" i="0">
+                <a:solidFill>
+                  <a:srgbClr val="BF352A"/>
+                </a:solidFill>
+              </a:rPr>
+              <a:t>Why out of scope:</a:t>
+            </a:r>
+          </a:p>
+        </p:txBody>
+      </p:sp>
+      <p:sp>
+        <p:nvSpPr>
+          <p:cNvPr id="13" name="TextBox 12"/>
+          <p:cNvSpPr txBox="1"/>
+          <p:nvPr/>
+        </p:nvSpPr>
+        <p:spPr>
+          <a:xfrm>
+            <a:off x="914400" y="4846320"/>
+            <a:ext cx="10332720" cy="731520"/>
+          </a:xfrm>
+          <a:prstGeom prst="rect">
+            <a:avLst/>
+          </a:prstGeom>
+          <a:noFill/>
+        </p:spPr>
+        <p:txBody>
+          <a:bodyPr wrap="square">
+            <a:spAutoFit/>
+          </a:bodyPr>
+          <a:lstStyle/>
+          <a:p>
+            <a:pPr/>
+            <a:r>
+              <a:rPr sz="1300">
+                <a:solidFill>
+                  <a:srgbClr val="2D2D2D"/>
+                </a:solidFill>
+              </a:rPr>
+              <a:t>Requires route optimization engine - unknown if exists or has API</a:t>
+            </a:r>
+          </a:p>
+          <a:p>
+            <a:pPr/>
+            <a:r>
+              <a:rPr sz="1300">
+                <a:solidFill>
+                  <a:srgbClr val="2D2D2D"/>
+                </a:solidFill>
+              </a:rPr>
+              <a:t>Tight time pressure + high judgment (driver swaps, diversions)</a:t>
+            </a:r>
+          </a:p>
+          <a:p>
+            <a:pPr/>
+            <a:r>
+              <a:rPr sz="1300">
+                <a:solidFill>
+                  <a:srgbClr val="2D2D2D"/>
+                </a:solidFill>
+              </a:rPr>
+              <a:t>Dispatch console API surface must be confirmed before scoping (Discovery Q6)</a:t>
+            </a:r>
+          </a:p>
+          <a:p>
+            <a:pPr/>
+            <a:r>
+              <a:rPr sz="1300">
+                <a:solidFill>
+                  <a:srgbClr val="2D2D2D"/>
+                </a:solidFill>
+              </a:rPr>
+              <a:t>If API is read-only or non-existent, automation limited to data surfacing only</a:t>
+            </a:r>
+          </a:p>
+        </p:txBody>
+      </p:sp>
+    </p:spTree>
+  </p:cSld>
+  <p:clrMapOvr>
+    <a:masterClrMapping/>
+  </p:clrMapOvr>
+</p:sld>
+</file>
+
+<file path=ppt/slides/slide7.xml><?xml version="1.0" encoding="utf-8"?>
+<p:sld xmlns:a="http://schemas.openxmlformats.org/drawingml/2006/main" xmlns:p="http://schemas.openxmlformats.org/presentationml/2006/main" xmlns:r="http://schemas.openxmlformats.org/officeDocument/2006/relationships">
+  <p:cSld>
+    <p:spTree>
+      <p:nvGrpSpPr>
+        <p:cNvPr id="1" name=""/>
+        <p:cNvGrpSpPr/>
+        <p:nvPr/>
+      </p:nvGrpSpPr>
+      <p:grpSpPr/>
+      <p:sp>
+        <p:nvSpPr>
+          <p:cNvPr id="2" name="Rectangle 1"/>
+          <p:cNvSpPr/>
+          <p:nvPr/>
+        </p:nvSpPr>
+        <p:spPr>
+          <a:xfrm>
+            <a:off x="0" y="0"/>
+            <a:ext cx="12188952" cy="914400"/>
+          </a:xfrm>
+          <a:prstGeom prst="rect">
+            <a:avLst/>
+          </a:prstGeom>
+          <a:solidFill>
+            <a:srgbClr val="CC8400"/>
+          </a:solidFill>
+          <a:ln>
+            <a:noFill/>
+          </a:ln>
+        </p:spPr>
+        <p:style>
+          <a:lnRef idx="1">
+            <a:schemeClr val="accent1"/>
+          </a:lnRef>
+          <a:fillRef idx="3">
+            <a:schemeClr val="accent1"/>
+          </a:fillRef>
+          <a:effectRef idx="2">
+            <a:schemeClr val="accent1"/>
+          </a:effectRef>
+          <a:fontRef idx="minor">
+            <a:schemeClr val="lt1"/>
+          </a:fontRef>
+        </p:style>
+        <p:txBody>
+          <a:bodyPr rtlCol="0" anchor="ctr"/>
+          <a:lstStyle/>
+          <a:p>
+            <a:pPr algn="ctr"/>
+          </a:p>
+        </p:txBody>
+      </p:sp>
+      <p:sp>
+        <p:nvSpPr>
+          <p:cNvPr id="3" name="TextBox 2"/>
+          <p:cNvSpPr txBox="1"/>
+          <p:nvPr/>
+        </p:nvSpPr>
+        <p:spPr>
+          <a:xfrm>
+            <a:off x="457200" y="274320"/>
+            <a:ext cx="10972800" cy="457200"/>
+          </a:xfrm>
+          <a:prstGeom prst="rect">
+            <a:avLst/>
+          </a:prstGeom>
+          <a:noFill/>
+        </p:spPr>
+        <p:txBody>
+          <a:bodyPr wrap="square">
+            <a:spAutoFit/>
+          </a:bodyPr>
+          <a:lstStyle/>
+          <a:p>
+            <a:pPr algn="l"/>
+            <a:r>
+              <a:rPr sz="3200" b="1" i="0">
+                <a:solidFill>
+                  <a:srgbClr val="FFFFFF"/>
+                </a:solidFill>
+              </a:rPr>
+              <a:t>Why Not W4 (Billing Disputes) for Phase 1?</a:t>
+            </a:r>
+          </a:p>
+        </p:txBody>
+      </p:sp>
+      <p:sp>
+        <p:nvSpPr>
+          <p:cNvPr id="4" name="TextBox 3"/>
+          <p:cNvSpPr txBox="1"/>
+          <p:nvPr/>
+        </p:nvSpPr>
+        <p:spPr>
+          <a:xfrm>
+            <a:off x="457200" y="1097280"/>
+            <a:ext cx="11247120" cy="365760"/>
+          </a:xfrm>
+          <a:prstGeom prst="rect">
+            <a:avLst/>
+          </a:prstGeom>
+          <a:noFill/>
+        </p:spPr>
+        <p:txBody>
+          <a:bodyPr wrap="square">
+            <a:spAutoFit/>
+          </a:bodyPr>
+          <a:lstStyle/>
+          <a:p>
+            <a:pPr algn="ctr"/>
+            <a:r>
+              <a:rPr sz="1600" b="0" i="1">
+                <a:solidFill>
+                  <a:srgbClr val="CC8400"/>
+                </a:solidFill>
+              </a:rPr>
+              <a:t>W4 has HIGHER strategic value but HIGHER risk - perfect for Phase 2 after W2 proves value</a:t>
+            </a:r>
+          </a:p>
+        </p:txBody>
+      </p:sp>
+      <p:sp>
+        <p:nvSpPr>
+          <p:cNvPr id="5" name="Rectangle 4"/>
+          <p:cNvSpPr/>
+          <p:nvPr/>
+        </p:nvSpPr>
+        <p:spPr>
+          <a:xfrm>
+            <a:off x="457200" y="1645920"/>
+            <a:ext cx="5486400" cy="1828800"/>
+          </a:xfrm>
+          <a:prstGeom prst="rect">
+            <a:avLst/>
+          </a:prstGeom>
+          <a:solidFill>
+            <a:srgbClr val="D6EEDC"/>
+          </a:solidFill>
+          <a:ln>
+            <a:noFill/>
+          </a:ln>
+        </p:spPr>
+        <p:style>
+          <a:lnRef idx="1">
+            <a:schemeClr val="accent1"/>
+          </a:lnRef>
+          <a:fillRef idx="3">
+            <a:schemeClr val="accent1"/>
+          </a:fillRef>
+          <a:effectRef idx="2">
+            <a:schemeClr val="accent1"/>
+          </a:effectRef>
+          <a:fontRef idx="minor">
+            <a:schemeClr val="lt1"/>
+          </a:fontRef>
+        </p:style>
+        <p:txBody>
+          <a:bodyPr rtlCol="0" anchor="ctr"/>
+          <a:lstStyle/>
+          <a:p>
+            <a:pPr algn="ctr"/>
+          </a:p>
+        </p:txBody>
+      </p:sp>
+      <p:sp>
+        <p:nvSpPr>
+          <p:cNvPr id="6" name="TextBox 5"/>
+          <p:cNvSpPr txBox="1"/>
+          <p:nvPr/>
+        </p:nvSpPr>
+        <p:spPr>
+          <a:xfrm>
+            <a:off x="640080" y="1828800"/>
+            <a:ext cx="5029200" cy="274320"/>
+          </a:xfrm>
+          <a:prstGeom prst="rect">
+            <a:avLst/>
+          </a:prstGeom>
+          <a:noFill/>
+        </p:spPr>
+        <p:txBody>
+          <a:bodyPr wrap="square">
+            <a:spAutoFit/>
+          </a:bodyPr>
+          <a:lstStyle/>
+          <a:p>
+            <a:pPr algn="l"/>
+            <a:r>
+              <a:rPr sz="1600" b="1" i="0">
+                <a:solidFill>
+                  <a:srgbClr val="1A7A3C"/>
+                </a:solidFill>
+              </a:rPr>
+              <a:t>Why W4 Is Important</a:t>
+            </a:r>
+          </a:p>
+        </p:txBody>
+      </p:sp>
+      <p:sp>
+        <p:nvSpPr>
+          <p:cNvPr id="7" name="TextBox 6"/>
+          <p:cNvSpPr txBox="1"/>
+          <p:nvPr/>
+        </p:nvSpPr>
+        <p:spPr>
+          <a:xfrm>
+            <a:off x="640080" y="2194560"/>
+            <a:ext cx="5029200" cy="1188720"/>
+          </a:xfrm>
+          <a:prstGeom prst="rect">
+            <a:avLst/>
+          </a:prstGeom>
+          <a:noFill/>
+        </p:spPr>
+        <p:txBody>
+          <a:bodyPr wrap="square">
+            <a:spAutoFit/>
+          </a:bodyPr>
+          <a:lstStyle/>
+          <a:p>
+            <a:pPr/>
+            <a:r>
+              <a:rPr sz="1300">
+                <a:solidFill>
+                  <a:srgbClr val="2D2D2D"/>
+                </a:solidFill>
+              </a:rPr>
+              <a:t>High strategic value: compliance risk reduction</a:t>
+            </a:r>
+          </a:p>
+          <a:p>
+            <a:pPr/>
+            <a:r>
+              <a:rPr sz="1300">
+                <a:solidFill>
+                  <a:srgbClr val="2D2D2D"/>
+                </a:solidFill>
+              </a:rPr>
+              <a:t>Audit trail gaps found (Sandra credit with no log)</a:t>
+            </a:r>
+          </a:p>
+          <a:p>
+            <a:pPr/>
+            <a:r>
+              <a:rPr sz="1300">
+                <a:solidFill>
+                  <a:srgbClr val="2D2D2D"/>
+                </a:solidFill>
+              </a:rPr>
+              <a:t>Customer satisfaction impact (28 min avg handling)</a:t>
+            </a:r>
+          </a:p>
+          <a:p>
+            <a:pPr/>
+            <a:r>
+              <a:rPr sz="1300">
+                <a:solidFill>
+                  <a:srgbClr val="2D2D2D"/>
+                </a:solidFill>
+              </a:rPr>
+              <a:t>Saves 1.5 FTE (308 hours/month)</a:t>
+            </a:r>
+          </a:p>
+          <a:p>
+            <a:pPr/>
+            <a:r>
+              <a:rPr sz="1300">
+                <a:solidFill>
+                  <a:srgbClr val="2D2D2D"/>
+                </a:solidFill>
+              </a:rPr>
+              <a:t>3-6 month ROI payback</a:t>
+            </a:r>
+          </a:p>
+        </p:txBody>
+      </p:sp>
+      <p:sp>
+        <p:nvSpPr>
+          <p:cNvPr id="8" name="Rectangle 7"/>
+          <p:cNvSpPr/>
+          <p:nvPr/>
+        </p:nvSpPr>
+        <p:spPr>
+          <a:xfrm>
+            <a:off x="6217920" y="1645920"/>
+            <a:ext cx="5486400" cy="1828800"/>
+          </a:xfrm>
+          <a:prstGeom prst="rect">
+            <a:avLst/>
+          </a:prstGeom>
+          <a:solidFill>
+            <a:srgbClr val="F7DCDA"/>
+          </a:solidFill>
+          <a:ln>
+            <a:noFill/>
+          </a:ln>
+        </p:spPr>
+        <p:style>
+          <a:lnRef idx="1">
+            <a:schemeClr val="accent1"/>
+          </a:lnRef>
+          <a:fillRef idx="3">
+            <a:schemeClr val="accent1"/>
+          </a:fillRef>
+          <a:effectRef idx="2">
+            <a:schemeClr val="accent1"/>
+          </a:effectRef>
+          <a:fontRef idx="minor">
+            <a:schemeClr val="lt1"/>
+          </a:fontRef>
+        </p:style>
+        <p:txBody>
+          <a:bodyPr rtlCol="0" anchor="ctr"/>
+          <a:lstStyle/>
+          <a:p>
+            <a:pPr algn="ctr"/>
+          </a:p>
+        </p:txBody>
+      </p:sp>
+      <p:sp>
+        <p:nvSpPr>
+          <p:cNvPr id="9" name="TextBox 8"/>
+          <p:cNvSpPr txBox="1"/>
+          <p:nvPr/>
+        </p:nvSpPr>
+        <p:spPr>
+          <a:xfrm>
+            <a:off x="6400800" y="1828800"/>
+            <a:ext cx="5029200" cy="274320"/>
+          </a:xfrm>
+          <a:prstGeom prst="rect">
+            <a:avLst/>
+          </a:prstGeom>
+          <a:noFill/>
+        </p:spPr>
+        <p:txBody>
+          <a:bodyPr wrap="square">
+            <a:spAutoFit/>
+          </a:bodyPr>
+          <a:lstStyle/>
+          <a:p>
+            <a:pPr algn="l"/>
+            <a:r>
+              <a:rPr sz="1600" b="1" i="0">
+                <a:solidFill>
+                  <a:srgbClr val="BF352A"/>
+                </a:solidFill>
+              </a:rPr>
+              <a:t>Why Defer to Phase 2</a:t>
+            </a:r>
+          </a:p>
+        </p:txBody>
+      </p:sp>
+      <p:sp>
+        <p:nvSpPr>
+          <p:cNvPr id="10" name="TextBox 9"/>
+          <p:cNvSpPr txBox="1"/>
+          <p:nvPr/>
+        </p:nvSpPr>
+        <p:spPr>
+          <a:xfrm>
+            <a:off x="6400800" y="2194560"/>
+            <a:ext cx="5029200" cy="1188720"/>
+          </a:xfrm>
+          <a:prstGeom prst="rect">
+            <a:avLst/>
+          </a:prstGeom>
+          <a:noFill/>
+        </p:spPr>
+        <p:txBody>
+          <a:bodyPr wrap="square">
+            <a:spAutoFit/>
+          </a:bodyPr>
+          <a:lstStyle/>
+          <a:p>
+            <a:pPr/>
+            <a:r>
+              <a:rPr sz="1300">
+                <a:solidFill>
+                  <a:srgbClr val="2D2D2D"/>
+                </a:solidFill>
+              </a:rPr>
+              <a:t>Legacy Aurum billing: NO API, batch-only, 24h lag</a:t>
+            </a:r>
+          </a:p>
+          <a:p>
+            <a:pPr/>
+            <a:r>
+              <a:rPr sz="1300">
+                <a:solidFill>
+                  <a:srgbClr val="2D2D2D"/>
+                </a:solidFill>
+              </a:rPr>
+              <a:t>Prior RPA broke when Aurum schema changed</a:t>
+            </a:r>
+          </a:p>
+          <a:p>
+            <a:pPr/>
+            <a:r>
+              <a:rPr sz="1300">
+                <a:solidFill>
+                  <a:srgbClr val="2D2D2D"/>
+                </a:solidFill>
+              </a:rPr>
+              <a:t>Multiple async dependencies (shipper 24-72h, insurance)</a:t>
+            </a:r>
+          </a:p>
+          <a:p>
+            <a:pPr/>
+            <a:r>
+              <a:rPr sz="1300">
+                <a:solidFill>
+                  <a:srgbClr val="2D2D2D"/>
+                </a:solidFill>
+              </a:rPr>
+              <a:t>Lower volume than W2 (60/day vs 400/day)</a:t>
+            </a:r>
+          </a:p>
+          <a:p>
+            <a:pPr/>
+            <a:r>
+              <a:rPr sz="1300">
+                <a:solidFill>
+                  <a:srgbClr val="2D2D2D"/>
+                </a:solidFill>
+              </a:rPr>
+              <a:t>Need proven trust before tackling this complexity</a:t>
+            </a:r>
+          </a:p>
+        </p:txBody>
+      </p:sp>
+      <p:sp>
+        <p:nvSpPr>
+          <p:cNvPr id="11" name="Rectangle 10"/>
+          <p:cNvSpPr/>
+          <p:nvPr/>
+        </p:nvSpPr>
+        <p:spPr>
+          <a:xfrm>
+            <a:off x="457200" y="3749039"/>
+            <a:ext cx="11247120" cy="2011680"/>
+          </a:xfrm>
+          <a:prstGeom prst="rect">
+            <a:avLst/>
+          </a:prstGeom>
+          <a:solidFill>
+            <a:srgbClr val="F2F4F7"/>
+          </a:solidFill>
+          <a:ln>
+            <a:noFill/>
+          </a:ln>
+        </p:spPr>
+        <p:style>
+          <a:lnRef idx="1">
+            <a:schemeClr val="accent1"/>
+          </a:lnRef>
+          <a:fillRef idx="3">
+            <a:schemeClr val="accent1"/>
+          </a:fillRef>
+          <a:effectRef idx="2">
+            <a:schemeClr val="accent1"/>
+          </a:effectRef>
+          <a:fontRef idx="minor">
+            <a:schemeClr val="lt1"/>
+          </a:fontRef>
+        </p:style>
+        <p:txBody>
+          <a:bodyPr rtlCol="0" anchor="ctr"/>
+          <a:lstStyle/>
+          <a:p>
+            <a:pPr algn="ctr"/>
+          </a:p>
+        </p:txBody>
+      </p:sp>
+      <p:sp>
+        <p:nvSpPr>
+          <p:cNvPr id="12" name="TextBox 11"/>
+          <p:cNvSpPr txBox="1"/>
+          <p:nvPr/>
+        </p:nvSpPr>
+        <p:spPr>
+          <a:xfrm>
+            <a:off x="731520" y="3931920"/>
+            <a:ext cx="10698480" cy="274320"/>
+          </a:xfrm>
+          <a:prstGeom prst="rect">
+            <a:avLst/>
+          </a:prstGeom>
+          <a:noFill/>
+        </p:spPr>
+        <p:txBody>
+          <a:bodyPr wrap="square">
+            <a:spAutoFit/>
+          </a:bodyPr>
+          <a:lstStyle/>
+          <a:p>
+            <a:pPr algn="l"/>
+            <a:r>
+              <a:rPr sz="1800" b="1" i="0">
+                <a:solidFill>
+                  <a:srgbClr val="BF352A"/>
+                </a:solidFill>
+              </a:rPr>
+              <a:t>The Aurum Constraint</a:t>
+            </a:r>
+          </a:p>
+        </p:txBody>
+      </p:sp>
+      <p:sp>
+        <p:nvSpPr>
+          <p:cNvPr id="13" name="TextBox 12"/>
+          <p:cNvSpPr txBox="1"/>
+          <p:nvPr/>
+        </p:nvSpPr>
+        <p:spPr>
+          <a:xfrm>
+            <a:off x="731520" y="4297680"/>
+            <a:ext cx="10698480" cy="274320"/>
+          </a:xfrm>
+          <a:prstGeom prst="rect">
+            <a:avLst/>
+          </a:prstGeom>
+          <a:noFill/>
+        </p:spPr>
+        <p:txBody>
+          <a:bodyPr wrap="square">
+            <a:spAutoFit/>
+          </a:bodyPr>
+          <a:lstStyle/>
+          <a:p>
+            <a:pPr algn="l"/>
+            <a:r>
+              <a:rPr sz="1400" b="0" i="0">
+                <a:solidFill>
+                  <a:srgbClr val="2D2D2D"/>
+                </a:solidFill>
+              </a:rPr>
+              <a:t>Aurum Billing System (on-prem Oracle, since 2008):</a:t>
+            </a:r>
+          </a:p>
+        </p:txBody>
+      </p:sp>
+      <p:sp>
+        <p:nvSpPr>
+          <p:cNvPr id="14" name="TextBox 13"/>
+          <p:cNvSpPr txBox="1"/>
+          <p:nvPr/>
+        </p:nvSpPr>
+        <p:spPr>
+          <a:xfrm>
+            <a:off x="914400" y="4572000"/>
+            <a:ext cx="10332720" cy="1097280"/>
+          </a:xfrm>
+          <a:prstGeom prst="rect">
+            <a:avLst/>
+          </a:prstGeom>
+          <a:noFill/>
+        </p:spPr>
+        <p:txBody>
+          <a:bodyPr wrap="square">
+            <a:spAutoFit/>
+          </a:bodyPr>
+          <a:lstStyle/>
+          <a:p>
+            <a:pPr/>
+            <a:r>
+              <a:rPr sz="1300">
+                <a:solidFill>
+                  <a:srgbClr val="2D2D2D"/>
+                </a:solidFill>
+              </a:rPr>
+              <a:t>Batch-file exports only: Daily 02:00-04:00 GMT to CSV</a:t>
+            </a:r>
+          </a:p>
+          <a:p>
+            <a:pPr/>
+            <a:r>
+              <a:rPr sz="1300">
+                <a:solidFill>
+                  <a:srgbClr val="2D2D2D"/>
+                </a:solidFill>
+              </a:rPr>
+              <a:t>No real-time API - reconciliation lags 24 hours behind invoice generation</a:t>
+            </a:r>
+          </a:p>
+          <a:p>
+            <a:pPr/>
+            <a:r>
+              <a:rPr sz="1300">
+                <a:solidFill>
+                  <a:srgbClr val="2D2D2D"/>
+                </a:solidFill>
+              </a:rPr>
+              <a:t>Invoice modifications require manual ticket to Aurum support (48h turnaround)</a:t>
+            </a:r>
+          </a:p>
+          <a:p>
+            <a:pPr/>
+            <a:r>
+              <a:rPr sz="1300">
+                <a:solidFill>
+                  <a:srgbClr val="2D2D2D"/>
+                </a:solidFill>
+              </a:rPr>
+              <a:t>Schema changes quarterly without notice - broke previous RPA automation</a:t>
+            </a:r>
+          </a:p>
+          <a:p>
+            <a:pPr/>
+            <a:r>
+              <a:rPr sz="1300">
+                <a:solidFill>
+                  <a:srgbClr val="2D2D2D"/>
+                </a:solidFill>
+              </a:rPr>
+              <a:t>Any Phase 2 billing agent must include schema validation as first-class feature</a:t>
+            </a:r>
+          </a:p>
+        </p:txBody>
+      </p:sp>
+    </p:spTree>
+  </p:cSld>
+  <p:clrMapOvr>
+    <a:masterClrMapping/>
+  </p:clrMapOvr>
+</p:sld>
+</file>
+
+<file path=ppt/slides/slide8.xml><?xml version="1.0" encoding="utf-8"?>
+<p:sld xmlns:a="http://schemas.openxmlformats.org/drawingml/2006/main" xmlns:p="http://schemas.openxmlformats.org/presentationml/2006/main" xmlns:r="http://schemas.openxmlformats.org/officeDocument/2006/relationships">
+  <p:cSld>
+    <p:spTree>
+      <p:nvGrpSpPr>
+        <p:cNvPr id="1" name=""/>
+        <p:cNvGrpSpPr/>
+        <p:nvPr/>
+      </p:nvGrpSpPr>
+      <p:grpSpPr/>
+      <p:sp>
+        <p:nvSpPr>
+          <p:cNvPr id="2" name="Rectangle 1"/>
+          <p:cNvSpPr/>
+          <p:nvPr/>
+        </p:nvSpPr>
+        <p:spPr>
+          <a:xfrm>
+            <a:off x="0" y="0"/>
+            <a:ext cx="12188952" cy="914400"/>
+          </a:xfrm>
+          <a:prstGeom prst="rect">
+            <a:avLst/>
+          </a:prstGeom>
+          <a:solidFill>
+            <a:srgbClr val="BF352A"/>
+          </a:solidFill>
+          <a:ln>
+            <a:noFill/>
+          </a:ln>
+        </p:spPr>
+        <p:style>
+          <a:lnRef idx="1">
+            <a:schemeClr val="accent1"/>
+          </a:lnRef>
+          <a:fillRef idx="3">
+            <a:schemeClr val="accent1"/>
+          </a:fillRef>
+          <a:effectRef idx="2">
+            <a:schemeClr val="accent1"/>
+          </a:effectRef>
+          <a:fontRef idx="minor">
+            <a:schemeClr val="lt1"/>
+          </a:fontRef>
+        </p:style>
+        <p:txBody>
+          <a:bodyPr rtlCol="0" anchor="ctr"/>
+          <a:lstStyle/>
+          <a:p>
+            <a:pPr algn="ctr"/>
+          </a:p>
+        </p:txBody>
+      </p:sp>
+      <p:sp>
+        <p:nvSpPr>
+          <p:cNvPr id="3" name="TextBox 2"/>
+          <p:cNvSpPr txBox="1"/>
+          <p:nvPr/>
+        </p:nvSpPr>
+        <p:spPr>
+          <a:xfrm>
+            <a:off x="457200" y="274320"/>
+            <a:ext cx="10972800" cy="457200"/>
+          </a:xfrm>
+          <a:prstGeom prst="rect">
+            <a:avLst/>
+          </a:prstGeom>
+          <a:noFill/>
+        </p:spPr>
+        <p:txBody>
+          <a:bodyPr wrap="square">
+            <a:spAutoFit/>
+          </a:bodyPr>
+          <a:lstStyle/>
+          <a:p>
+            <a:pPr algn="l"/>
+            <a:r>
+              <a:rPr sz="3200" b="1" i="0">
+                <a:solidFill>
+                  <a:srgbClr val="FFFFFF"/>
+                </a:solidFill>
+              </a:rPr>
+              <a:t>3 Critical Questions for Sarah</a:t>
+            </a:r>
+          </a:p>
+        </p:txBody>
+      </p:sp>
+      <p:sp>
+        <p:nvSpPr>
+          <p:cNvPr id="4" name="TextBox 3"/>
+          <p:cNvSpPr txBox="1"/>
+          <p:nvPr/>
+        </p:nvSpPr>
+        <p:spPr>
+          <a:xfrm>
+            <a:off x="457200" y="1097280"/>
+            <a:ext cx="10972800" cy="274320"/>
+          </a:xfrm>
+          <a:prstGeom prst="rect">
+            <a:avLst/>
+          </a:prstGeom>
+          <a:noFill/>
+        </p:spPr>
+        <p:txBody>
+          <a:bodyPr wrap="square">
+            <a:spAutoFit/>
+          </a:bodyPr>
+          <a:lstStyle/>
+          <a:p>
+            <a:pPr algn="ctr"/>
+            <a:r>
+              <a:rPr sz="1600" b="0" i="1">
+                <a:solidFill>
+                  <a:srgbClr val="606060"/>
+                </a:solidFill>
+              </a:rPr>
+              <a:t>Answers will materially change the agent design - rated LOW confidence</a:t>
+            </a:r>
+          </a:p>
+        </p:txBody>
+      </p:sp>
+      <p:sp>
+        <p:nvSpPr>
+          <p:cNvPr id="5" name="Rectangle 4"/>
+          <p:cNvSpPr/>
+          <p:nvPr/>
+        </p:nvSpPr>
+        <p:spPr>
+          <a:xfrm>
+            <a:off x="457200" y="1645920"/>
+            <a:ext cx="11247120" cy="1188720"/>
+          </a:xfrm>
+          <a:prstGeom prst="rect">
+            <a:avLst/>
+          </a:prstGeom>
+          <a:solidFill>
+            <a:srgbClr val="FDF0D5"/>
+          </a:solidFill>
+          <a:ln>
+            <a:noFill/>
+          </a:ln>
+        </p:spPr>
+        <p:style>
+          <a:lnRef idx="1">
+            <a:schemeClr val="accent1"/>
+          </a:lnRef>
+          <a:fillRef idx="3">
+            <a:schemeClr val="accent1"/>
+          </a:fillRef>
+          <a:effectRef idx="2">
+            <a:schemeClr val="accent1"/>
+          </a:effectRef>
+          <a:fontRef idx="minor">
+            <a:schemeClr val="lt1"/>
+          </a:fontRef>
+        </p:style>
+        <p:txBody>
+          <a:bodyPr rtlCol="0" anchor="ctr"/>
+          <a:lstStyle/>
+          <a:p>
+            <a:pPr algn="ctr"/>
+          </a:p>
+        </p:txBody>
+      </p:sp>
+      <p:sp>
+        <p:nvSpPr>
+          <p:cNvPr id="6" name="TextBox 5"/>
+          <p:cNvSpPr txBox="1"/>
+          <p:nvPr/>
+        </p:nvSpPr>
+        <p:spPr>
+          <a:xfrm>
+            <a:off x="640080" y="1828800"/>
+            <a:ext cx="10789920" cy="274320"/>
+          </a:xfrm>
+          <a:prstGeom prst="rect">
+            <a:avLst/>
+          </a:prstGeom>
+          <a:noFill/>
+        </p:spPr>
+        <p:txBody>
+          <a:bodyPr wrap="square">
+            <a:spAutoFit/>
+          </a:bodyPr>
+          <a:lstStyle/>
+          <a:p>
+            <a:pPr algn="l"/>
+            <a:r>
+              <a:rPr sz="1500" b="1" i="0">
+                <a:solidFill>
+                  <a:srgbClr val="CC8400"/>
+                </a:solidFill>
+              </a:rPr>
+              <a:t>Q1: Driver App API Surface - GPS Query or Message-Only?</a:t>
+            </a:r>
+          </a:p>
+        </p:txBody>
+      </p:sp>
+      <p:sp>
+        <p:nvSpPr>
+          <p:cNvPr id="7" name="TextBox 6"/>
+          <p:cNvSpPr txBox="1"/>
+          <p:nvPr/>
+        </p:nvSpPr>
+        <p:spPr>
+          <a:xfrm>
+            <a:off x="640080" y="2148840"/>
+            <a:ext cx="10789920" cy="365760"/>
+          </a:xfrm>
+          <a:prstGeom prst="rect">
+            <a:avLst/>
+          </a:prstGeom>
+          <a:noFill/>
+        </p:spPr>
+        <p:txBody>
+          <a:bodyPr wrap="square">
+            <a:spAutoFit/>
+          </a:bodyPr>
+          <a:lstStyle/>
+          <a:p>
+            <a:pPr algn="l"/>
+            <a:r>
+              <a:rPr sz="1200" b="0" i="0">
+                <a:solidFill>
+                  <a:srgbClr val="2D2D2D"/>
+                </a:solidFill>
+              </a:rPr>
+              <a:t>Can the agent programmatically query driver GPS for real-time location, or must it send a message and wait for driver reply (2 min timeout)?</a:t>
+            </a:r>
+          </a:p>
+        </p:txBody>
+      </p:sp>
+      <p:sp>
+        <p:nvSpPr>
+          <p:cNvPr id="8" name="TextBox 7"/>
+          <p:cNvSpPr txBox="1"/>
+          <p:nvPr/>
+        </p:nvSpPr>
+        <p:spPr>
+          <a:xfrm>
+            <a:off x="640080" y="2514600"/>
+            <a:ext cx="10789920" cy="320040"/>
+          </a:xfrm>
+          <a:prstGeom prst="rect">
+            <a:avLst/>
+          </a:prstGeom>
+          <a:noFill/>
+        </p:spPr>
+        <p:txBody>
+          <a:bodyPr wrap="square">
+            <a:spAutoFit/>
+          </a:bodyPr>
+          <a:lstStyle/>
+          <a:p>
+            <a:pPr algn="l"/>
+            <a:r>
+              <a:rPr sz="1100" b="0" i="1">
+                <a:solidFill>
+                  <a:srgbClr val="BF352A"/>
+                </a:solidFill>
+              </a:rPr>
+              <a:t>Impact: If message-only, response time has 2-min floor. If no API at all, agent becomes lookup-only tool (major capability reduction).</a:t>
+            </a:r>
+          </a:p>
+        </p:txBody>
+      </p:sp>
+      <p:sp>
+        <p:nvSpPr>
+          <p:cNvPr id="9" name="Rectangle 8"/>
+          <p:cNvSpPr/>
+          <p:nvPr/>
+        </p:nvSpPr>
+        <p:spPr>
+          <a:xfrm>
+            <a:off x="457200" y="3017520"/>
+            <a:ext cx="11247120" cy="1188720"/>
+          </a:xfrm>
+          <a:prstGeom prst="rect">
+            <a:avLst/>
+          </a:prstGeom>
+          <a:solidFill>
+            <a:srgbClr val="FDF0D5"/>
+          </a:solidFill>
+          <a:ln>
+            <a:noFill/>
+          </a:ln>
+        </p:spPr>
+        <p:style>
+          <a:lnRef idx="1">
+            <a:schemeClr val="accent1"/>
+          </a:lnRef>
+          <a:fillRef idx="3">
+            <a:schemeClr val="accent1"/>
+          </a:fillRef>
+          <a:effectRef idx="2">
+            <a:schemeClr val="accent1"/>
+          </a:effectRef>
+          <a:fontRef idx="minor">
+            <a:schemeClr val="lt1"/>
+          </a:fontRef>
+        </p:style>
+        <p:txBody>
+          <a:bodyPr rtlCol="0" anchor="ctr"/>
+          <a:lstStyle/>
+          <a:p>
+            <a:pPr algn="ctr"/>
+          </a:p>
+        </p:txBody>
+      </p:sp>
+      <p:sp>
+        <p:nvSpPr>
+          <p:cNvPr id="10" name="TextBox 9"/>
+          <p:cNvSpPr txBox="1"/>
+          <p:nvPr/>
+        </p:nvSpPr>
+        <p:spPr>
+          <a:xfrm>
+            <a:off x="640080" y="3200400"/>
+            <a:ext cx="10789920" cy="274320"/>
+          </a:xfrm>
+          <a:prstGeom prst="rect">
+            <a:avLst/>
+          </a:prstGeom>
+          <a:noFill/>
+        </p:spPr>
+        <p:txBody>
+          <a:bodyPr wrap="square">
+            <a:spAutoFit/>
+          </a:bodyPr>
+          <a:lstStyle/>
+          <a:p>
+            <a:pPr algn="l"/>
+            <a:r>
+              <a:rPr sz="1500" b="1" i="0">
+                <a:solidFill>
+                  <a:srgbClr val="CC8400"/>
+                </a:solidFill>
+              </a:rPr>
+              <a:t>Q2: CRM Status Freshness - Real-time Webhook or Batch?</a:t>
+            </a:r>
+          </a:p>
+        </p:txBody>
+      </p:sp>
+      <p:sp>
+        <p:nvSpPr>
+          <p:cNvPr id="11" name="TextBox 10"/>
+          <p:cNvSpPr txBox="1"/>
+          <p:nvPr/>
+        </p:nvSpPr>
+        <p:spPr>
+          <a:xfrm>
+            <a:off x="640080" y="3520440"/>
+            <a:ext cx="10789920" cy="365760"/>
+          </a:xfrm>
+          <a:prstGeom prst="rect">
+            <a:avLst/>
+          </a:prstGeom>
+          <a:noFill/>
+        </p:spPr>
+        <p:txBody>
+          <a:bodyPr wrap="square">
+            <a:spAutoFit/>
+          </a:bodyPr>
+          <a:lstStyle/>
+          <a:p>
+            <a:pPr algn="l"/>
+            <a:r>
+              <a:rPr sz="1200" b="0" i="0">
+                <a:solidFill>
+                  <a:srgbClr val="2D2D2D"/>
+                </a:solidFill>
+              </a:rPr>
+              <a:t>When a driver scans a package on delivery, how long before that status appears in Salesforce CRM? Immediate (&lt;1 min), polling (5-30 min), or end-of-shift batch?</a:t>
+            </a:r>
+          </a:p>
+        </p:txBody>
+      </p:sp>
+      <p:sp>
+        <p:nvSpPr>
+          <p:cNvPr id="12" name="TextBox 11"/>
+          <p:cNvSpPr txBox="1"/>
+          <p:nvPr/>
+        </p:nvSpPr>
+        <p:spPr>
+          <a:xfrm>
+            <a:off x="640080" y="3886200"/>
+            <a:ext cx="10789920" cy="320040"/>
+          </a:xfrm>
+          <a:prstGeom prst="rect">
+            <a:avLst/>
+          </a:prstGeom>
+          <a:noFill/>
+        </p:spPr>
+        <p:txBody>
+          <a:bodyPr wrap="square">
+            <a:spAutoFit/>
+          </a:bodyPr>
+          <a:lstStyle/>
+          <a:p>
+            <a:pPr algn="l"/>
+            <a:r>
+              <a:rPr sz="1100" b="0" i="1">
+                <a:solidFill>
+                  <a:srgbClr val="BF352A"/>
+                </a:solidFill>
+              </a:rPr>
+              <a:t>Impact: If end-of-day batch, 'out-for-delivery' status is unreliable. Agent cannot distinguish 'in transit' from 'already delivered'. ETA logic breaks - requires full redesign.</a:t>
+            </a:r>
+          </a:p>
+        </p:txBody>
+      </p:sp>
+      <p:sp>
+        <p:nvSpPr>
+          <p:cNvPr id="13" name="Rectangle 12"/>
+          <p:cNvSpPr/>
+          <p:nvPr/>
+        </p:nvSpPr>
+        <p:spPr>
+          <a:xfrm>
+            <a:off x="457200" y="4389120"/>
+            <a:ext cx="11247120" cy="1188720"/>
+          </a:xfrm>
+          <a:prstGeom prst="rect">
+            <a:avLst/>
+          </a:prstGeom>
+          <a:solidFill>
+            <a:srgbClr val="FDF0D5"/>
+          </a:solidFill>
+          <a:ln>
+            <a:noFill/>
+          </a:ln>
+        </p:spPr>
+        <p:style>
+          <a:lnRef idx="1">
+            <a:schemeClr val="accent1"/>
+          </a:lnRef>
+          <a:fillRef idx="3">
+            <a:schemeClr val="accent1"/>
+          </a:fillRef>
+          <a:effectRef idx="2">
+            <a:schemeClr val="accent1"/>
+          </a:effectRef>
+          <a:fontRef idx="minor">
+            <a:schemeClr val="lt1"/>
+          </a:fontRef>
+        </p:style>
+        <p:txBody>
+          <a:bodyPr rtlCol="0" anchor="ctr"/>
+          <a:lstStyle/>
+          <a:p>
+            <a:pPr algn="ctr"/>
+          </a:p>
+        </p:txBody>
+      </p:sp>
+      <p:sp>
+        <p:nvSpPr>
+          <p:cNvPr id="14" name="TextBox 13"/>
+          <p:cNvSpPr txBox="1"/>
+          <p:nvPr/>
+        </p:nvSpPr>
+        <p:spPr>
+          <a:xfrm>
+            <a:off x="640080" y="4572000"/>
+            <a:ext cx="10789920" cy="274320"/>
+          </a:xfrm>
+          <a:prstGeom prst="rect">
+            <a:avLst/>
+          </a:prstGeom>
+          <a:noFill/>
+        </p:spPr>
+        <p:txBody>
+          <a:bodyPr wrap="square">
+            <a:spAutoFit/>
+          </a:bodyPr>
+          <a:lstStyle/>
+          <a:p>
+            <a:pPr algn="l"/>
+            <a:r>
+              <a:rPr sz="1500" b="1" i="0">
+                <a:solidFill>
+                  <a:srgbClr val="CC8400"/>
+                </a:solidFill>
+              </a:rPr>
+              <a:t>Q3: Sandra Credit Audit Trail Gap - Known Issue or Off-Policy?</a:t>
+            </a:r>
+          </a:p>
+        </p:txBody>
+      </p:sp>
+      <p:sp>
+        <p:nvSpPr>
+          <p:cNvPr id="15" name="TextBox 14"/>
+          <p:cNvSpPr txBox="1"/>
+          <p:nvPr/>
+        </p:nvSpPr>
+        <p:spPr>
+          <a:xfrm>
+            <a:off x="640080" y="4892040"/>
+            <a:ext cx="10789920" cy="365760"/>
+          </a:xfrm>
+          <a:prstGeom prst="rect">
+            <a:avLst/>
+          </a:prstGeom>
+          <a:noFill/>
+        </p:spPr>
+        <p:txBody>
+          <a:bodyPr wrap="square">
+            <a:spAutoFit/>
+          </a:bodyPr>
+          <a:lstStyle/>
+          <a:p>
+            <a:pPr algn="l"/>
+            <a:r>
+              <a:rPr sz="1200" b="0" i="0">
+                <a:solidFill>
+                  <a:srgbClr val="2D2D2D"/>
+                </a:solidFill>
+              </a:rPr>
+              <a:t>The £170 Hayes &amp; Sons goodwill credit has no audit log entry. Is this a known gap where manual overrides bypass the export, or was it off-policy?</a:t>
+            </a:r>
+          </a:p>
+        </p:txBody>
+      </p:sp>
+      <p:sp>
+        <p:nvSpPr>
+          <p:cNvPr id="16" name="TextBox 15"/>
+          <p:cNvSpPr txBox="1"/>
+          <p:nvPr/>
+        </p:nvSpPr>
+        <p:spPr>
+          <a:xfrm>
+            <a:off x="640080" y="5257800"/>
+            <a:ext cx="10789920" cy="320040"/>
+          </a:xfrm>
+          <a:prstGeom prst="rect">
+            <a:avLst/>
+          </a:prstGeom>
+          <a:noFill/>
+        </p:spPr>
+        <p:txBody>
+          <a:bodyPr wrap="square">
+            <a:spAutoFit/>
+          </a:bodyPr>
+          <a:lstStyle/>
+          <a:p>
+            <a:pPr algn="l"/>
+            <a:r>
+              <a:rPr sz="1100" b="0" i="1">
+                <a:solidFill>
+                  <a:srgbClr val="BF352A"/>
+                </a:solidFill>
+              </a:rPr>
+              <a:t>Impact: If exports are incomplete, Phase 2 billing agent will misidentify resolved disputes as open. Compliance exposure - credits without audit trail.</a:t>
+            </a:r>
+          </a:p>
+        </p:txBody>
+      </p:sp>
+    </p:spTree>
+  </p:cSld>
+  <p:clrMapOvr>
+    <a:masterClrMapping/>
+  </p:clrMapOvr>
+</p:sld>
+</file>
+
+<file path=ppt/slides/slide9.xml><?xml version="1.0" encoding="utf-8"?>
+<p:sld xmlns:a="http://schemas.openxmlformats.org/drawingml/2006/main" xmlns:p="http://schemas.openxmlformats.org/presentationml/2006/main" xmlns:r="http://schemas.openxmlformats.org/officeDocument/2006/relationships">
+  <p:cSld>
+    <p:spTree>
+      <p:nvGrpSpPr>
+        <p:cNvPr id="1" name=""/>
+        <p:cNvGrpSpPr/>
+        <p:nvPr/>
+      </p:nvGrpSpPr>
+      <p:grpSpPr/>
+      <p:sp>
+        <p:nvSpPr>
+          <p:cNvPr id="2" name="Rectangle 1"/>
+          <p:cNvSpPr/>
+          <p:nvPr/>
+        </p:nvSpPr>
+        <p:spPr>
+          <a:xfrm>
+            <a:off x="0" y="0"/>
+            <a:ext cx="12188952" cy="914400"/>
+          </a:xfrm>
+          <a:prstGeom prst="rect">
+            <a:avLst/>
+          </a:prstGeom>
+          <a:solidFill>
+            <a:srgbClr val="0E7C7B"/>
+          </a:solidFill>
+          <a:ln>
+            <a:noFill/>
+          </a:ln>
+        </p:spPr>
+        <p:style>
+          <a:lnRef idx="1">
+            <a:schemeClr val="accent1"/>
+          </a:lnRef>
+          <a:fillRef idx="3">
+            <a:schemeClr val="accent1"/>
+          </a:fillRef>
+          <a:effectRef idx="2">
+            <a:schemeClr val="accent1"/>
+          </a:effectRef>
+          <a:fontRef idx="minor">
+            <a:schemeClr val="lt1"/>
+          </a:fontRef>
+        </p:style>
+        <p:txBody>
+          <a:bodyPr rtlCol="0" anchor="ctr"/>
+          <a:lstStyle/>
+          <a:p>
+            <a:pPr algn="ctr"/>
+          </a:p>
+        </p:txBody>
+      </p:sp>
+      <p:sp>
+        <p:nvSpPr>
+          <p:cNvPr id="3" name="TextBox 2"/>
+          <p:cNvSpPr txBox="1"/>
+          <p:nvPr/>
+        </p:nvSpPr>
+        <p:spPr>
+          <a:xfrm>
+            <a:off x="457200" y="274320"/>
+            <a:ext cx="10972800" cy="457200"/>
+          </a:xfrm>
+          <a:prstGeom prst="rect">
+            <a:avLst/>
+          </a:prstGeom>
+          <a:noFill/>
+        </p:spPr>
+        <p:txBody>
+          <a:bodyPr wrap="square">
+            <a:spAutoFit/>
+          </a:bodyPr>
+          <a:lstStyle/>
+          <a:p>
+            <a:pPr algn="l"/>
+            <a:r>
+              <a:rPr sz="3200" b="1" i="0">
+                <a:solidFill>
+                  <a:srgbClr val="FFFFFF"/>
+                </a:solidFill>
+              </a:rPr>
+              <a:t>Phased Implementation Strategy</a:t>
+            </a:r>
+          </a:p>
+        </p:txBody>
+      </p:sp>
+      <p:sp>
+        <p:nvSpPr>
+          <p:cNvPr id="4" name="Rectangle 3"/>
+          <p:cNvSpPr/>
+          <p:nvPr/>
+        </p:nvSpPr>
+        <p:spPr>
+          <a:xfrm>
+            <a:off x="914400" y="1371600"/>
+            <a:ext cx="10332720" cy="1828800"/>
           </a:xfrm>
           <a:prstGeom prst="rect">
             <a:avLst/>
@@ -6779,7 +9259,7 @@
         </p:nvSpPr>
         <p:spPr>
           <a:xfrm>
-            <a:off x="1188720" y="1828800"/>
+            <a:off x="1188720" y="1554480"/>
             <a:ext cx="9784080" cy="365760"/>
           </a:xfrm>
           <a:prstGeom prst="rect">
@@ -6800,7 +9280,7 @@
                   <a:srgbClr val="FFFFFF"/>
                 </a:solidFill>
               </a:rPr>
-              <a:t>PHASE 1: Build ETA Inquiry Agent (W2)</a:t>
+              <a:t>PHASE 1: ETA Inquiry Agent (W2) - 6-8 Week Build</a:t>
             </a:r>
           </a:p>
         </p:txBody>
@@ -6813,8 +9293,8 @@
         </p:nvSpPr>
         <p:spPr>
           <a:xfrm>
-            <a:off x="1371600" y="2286000"/>
-            <a:ext cx="9144000" cy="914400"/>
+            <a:off x="1371600" y="2011680"/>
+            <a:ext cx="9144000" cy="1097280"/>
           </a:xfrm>
           <a:prstGeom prst="rect">
             <a:avLst/>
@@ -6829,34 +9309,56 @@
           <a:p>
             <a:pPr/>
             <a:r>
-              <a:rPr sz="1600">
+              <a:rPr sz="1400">
                 <a:solidFill>
                   <a:srgbClr val="2D2D2D"/>
                 </a:solidFill>
               </a:rPr>
-              <a:t>Quick operational win - rebuild trust after 2 failures</a:t>
+              <a:t>Scope: Automate 'where's my delivery' inquiries (400/day)</a:t>
             </a:r>
           </a:p>
           <a:p>
             <a:pPr/>
             <a:r>
-              <a:rPr sz="1600">
+              <a:rPr sz="1400">
                 <a:solidFill>
                   <a:srgbClr val="2D2D2D"/>
                 </a:solidFill>
               </a:rPr>
-              <a:t>400 inquiries/day automated - 2.8 FTE freed</a:t>
+              <a:t>Quick win: Rebuild Sarah's trust after chatbot and RPA failures</a:t>
             </a:r>
           </a:p>
           <a:p>
             <a:pPr/>
             <a:r>
-              <a:rPr sz="1600">
+              <a:rPr sz="1400">
                 <a:solidFill>
                   <a:srgbClr val="2D2D2D"/>
                 </a:solidFill>
               </a:rPr>
-              <a:t>1-2 month ROI payback - prove value fast</a:t>
+              <a:t>Low risk: CRM REST API available, no legacy dependencies</a:t>
+            </a:r>
+          </a:p>
+          <a:p>
+            <a:pPr/>
+            <a:r>
+              <a:rPr sz="1400">
+                <a:solidFill>
+                  <a:srgbClr val="2D2D2D"/>
+                </a:solidFill>
+              </a:rPr>
+              <a:t>1-2 month ROI payback: 2.8 FTE savings (558 hours/month)</a:t>
+            </a:r>
+          </a:p>
+          <a:p>
+            <a:pPr/>
+            <a:r>
+              <a:rPr sz="1400">
+                <a:solidFill>
+                  <a:srgbClr val="2D2D2D"/>
+                </a:solidFill>
+              </a:rPr>
+              <a:t>Success metrics: &lt;5 min response, &gt;80% resolution without escalation</a:t>
             </a:r>
           </a:p>
         </p:txBody>
@@ -6869,8 +9371,8 @@
         </p:nvSpPr>
         <p:spPr>
           <a:xfrm>
-            <a:off x="914400" y="3566160"/>
-            <a:ext cx="10332720" cy="1645920"/>
+            <a:off x="914400" y="3474720"/>
+            <a:ext cx="10332720" cy="1828800"/>
           </a:xfrm>
           <a:prstGeom prst="rect">
             <a:avLst/>
@@ -6912,7 +9414,7 @@
         </p:nvSpPr>
         <p:spPr>
           <a:xfrm>
-            <a:off x="1188720" y="3749039"/>
+            <a:off x="1188720" y="3657600"/>
             <a:ext cx="9784080" cy="365760"/>
           </a:xfrm>
           <a:prstGeom prst="rect">
@@ -6933,7 +9435,7 @@
                   <a:srgbClr val="FFFFFF"/>
                 </a:solidFill>
               </a:rPr>
-              <a:t>PHASE 2: Billing Disputes Agent (W4)</a:t>
+              <a:t>PHASE 2: Billing Dispute Agent (W4) - After Phase 1 Success</a:t>
             </a:r>
           </a:p>
         </p:txBody>
@@ -6946,8 +9448,8 @@
         </p:nvSpPr>
         <p:spPr>
           <a:xfrm>
-            <a:off x="1371600" y="4206240"/>
-            <a:ext cx="9144000" cy="914400"/>
+            <a:off x="1371600" y="4114800"/>
+            <a:ext cx="9144000" cy="1097280"/>
           </a:xfrm>
           <a:prstGeom prst="rect">
             <a:avLst/>
@@ -6962,34 +9464,56 @@
           <a:p>
             <a:pPr/>
             <a:r>
-              <a:rPr sz="1600">
+              <a:rPr sz="1400">
                 <a:solidFill>
                   <a:srgbClr val="2D2D2D"/>
                 </a:solidFill>
               </a:rPr>
-              <a:t>Higher strategic value - compliance risk reduction</a:t>
+              <a:t>Scope: Triage, investigate, and resolve billing disputes (60/day)</a:t>
             </a:r>
           </a:p>
           <a:p>
             <a:pPr/>
             <a:r>
-              <a:rPr sz="1600">
+              <a:rPr sz="1400">
                 <a:solidFill>
                   <a:srgbClr val="2D2D2D"/>
                 </a:solidFill>
               </a:rPr>
-              <a:t>Only after Phase 1 proves success - higher complexity</a:t>
+              <a:t>Strategic value: Compliance risk reduction + audit trail enforcement</a:t>
             </a:r>
           </a:p>
           <a:p>
             <a:pPr/>
             <a:r>
-              <a:rPr sz="1600">
+              <a:rPr sz="1400">
                 <a:solidFill>
                   <a:srgbClr val="2D2D2D"/>
                 </a:solidFill>
               </a:rPr>
-              <a:t>Address legacy Aurum constraints with validated approach</a:t>
+              <a:t>Higher complexity: Aurum batch dependency + schema validation required</a:t>
+            </a:r>
+          </a:p>
+          <a:p>
+            <a:pPr/>
+            <a:r>
+              <a:rPr sz="1400">
+                <a:solidFill>
+                  <a:srgbClr val="2D2D2D"/>
+                </a:solidFill>
+              </a:rPr>
+              <a:t>3-6 month ROI payback: 1.5 FTE savings + penalty avoidance</a:t>
+            </a:r>
+          </a:p>
+          <a:p>
+            <a:pPr/>
+            <a:r>
+              <a:rPr sz="1400">
+                <a:solidFill>
+                  <a:srgbClr val="2D2D2D"/>
+                </a:solidFill>
+              </a:rPr>
+              <a:t>Only proceed after Phase 1 proves agent reliability and team buy-in</a:t>
             </a:r>
           </a:p>
         </p:txBody>
@@ -7023,7 +9547,7 @@
                   <a:srgbClr val="2E5FA3"/>
                 </a:solidFill>
               </a:rPr>
-              <a:t>Bottom Line: Start with easy, high-volume win before tackling harder strategic problems</a:t>
+              <a:t>Bottom Line: Start easy, prove value, then tackle strategic complexity</a:t>
             </a:r>
           </a:p>
         </p:txBody>
